--- a/presentation/COMP6713_Financial_NLP.pptx
+++ b/presentation/COMP6713_Financial_NLP.pptx
@@ -18,6 +18,8 @@
     <p:sldId id="266" r:id="rId17"/>
     <p:sldId id="267" r:id="rId18"/>
     <p:sldId id="268" r:id="rId19"/>
+    <p:sldId id="269" r:id="rId20"/>
+    <p:sldId id="270" r:id="rId21"/>
   </p:sldIdLst>
   <p:sldSz cx="12191695" cy="6858000" type="screen4x3"/>
   <p:notesSz cx="6858000" cy="9144000"/>
@@ -3315,7 +3317,7 @@
               </a:lnSpc>
             </a:pPr>
             <a:r>
-              <a:t>Member A (zID) | Member B (zID) | Member C (zID) | Member D (zID)</a:t>
+              <a:t>Louis Nguyen (z5428797) | Quoc Dat Bui (z5404752) | Nam Khanh Tran (z5577208) | Quang Minh Phan (z5531827)</a:t>
             </a:r>
           </a:p>
         </p:txBody>
@@ -3469,27 +3471,69 @@
               </a:lnSpc>
             </a:pPr>
             <a:r>
-              <a:t>Key Findings &amp; Analysis</a:t>
-            </a:r>
-          </a:p>
-        </p:txBody>
-      </p:sp>
-      <p:sp>
-        <p:nvSpPr>
-          <p:cNvPr id="5" name="Rectangle 4"/>
-          <p:cNvSpPr/>
+              <a:t>Multi-task Learning (Extended Method)</a:t>
+            </a:r>
+          </a:p>
+        </p:txBody>
+      </p:sp>
+      <p:sp>
+        <p:nvSpPr>
+          <p:cNvPr id="5" name="TextBox 4"/>
+          <p:cNvSpPr txBox="1"/>
           <p:nvPr/>
         </p:nvSpPr>
         <p:spPr>
           <a:xfrm>
-            <a:off x="457200" y="1371600"/>
-            <a:ext cx="5394960" cy="2286000"/>
+            <a:off x="548640" y="658368"/>
+            <a:ext cx="10972800" cy="365760"/>
           </a:xfrm>
           <a:prstGeom prst="rect">
             <a:avLst/>
           </a:prstGeom>
+          <a:noFill/>
+        </p:spPr>
+        <p:txBody>
+          <a:bodyPr wrap="square">
+            <a:spAutoFit/>
+          </a:bodyPr>
+          <a:lstStyle/>
+          <a:p>
+            <a:pPr algn="l">
+              <a:spcAft>
+                <a:spcPts val="200"/>
+              </a:spcAft>
+              <a:defRPr sz="1400" b="0">
+                <a:solidFill>
+                  <a:srgbClr val="D6E8F7"/>
+                </a:solidFill>
+                <a:latin typeface="Calibri"/>
+              </a:defRPr>
+              <a:lnSpc>
+                <a:spcPct val="114999"/>
+              </a:lnSpc>
+            </a:pPr>
+            <a:r>
+              <a:t>Best-performing architecture</a:t>
+            </a:r>
+          </a:p>
+        </p:txBody>
+      </p:sp>
+      <p:sp>
+        <p:nvSpPr>
+          <p:cNvPr id="6" name="Rounded Rectangle 5"/>
+          <p:cNvSpPr/>
+          <p:nvPr/>
+        </p:nvSpPr>
+        <p:spPr>
+          <a:xfrm>
+            <a:off x="3200400" y="1463040"/>
+            <a:ext cx="5760720" cy="640080"/>
+          </a:xfrm>
+          <a:prstGeom prst="roundRect">
+            <a:avLst/>
+          </a:prstGeom>
           <a:solidFill>
-            <a:srgbClr val="D6E8F7"/>
+            <a:srgbClr val="1B2A4A"/>
           </a:solidFill>
           <a:ln>
             <a:noFill/>
@@ -3510,151 +3554,45 @@
           </a:fontRef>
         </p:style>
         <p:txBody>
-          <a:bodyPr rtlCol="0" anchor="ctr"/>
-          <a:lstStyle/>
-          <a:p>
-            <a:pPr algn="ctr"/>
-          </a:p>
-        </p:txBody>
-      </p:sp>
-      <p:sp>
-        <p:nvSpPr>
-          <p:cNvPr id="6" name="TextBox 5"/>
-          <p:cNvSpPr txBox="1"/>
+          <a:bodyPr rtlCol="0" anchor="ctr" wrap="square"/>
+          <a:lstStyle/>
+          <a:p>
+            <a:pPr algn="ctr">
+              <a:spcBef>
+                <a:spcPts val="0"/>
+              </a:spcBef>
+              <a:spcAft>
+                <a:spcPts val="0"/>
+              </a:spcAft>
+              <a:defRPr sz="1500" b="1">
+                <a:solidFill>
+                  <a:srgbClr val="FFFFFF"/>
+                </a:solidFill>
+                <a:latin typeface="Calibri"/>
+              </a:defRPr>
+            </a:pPr>
+            <a:r>
+              <a:t>Shared FinBERT Encoder (12 layers, 768-d)</a:t>
+            </a:r>
+          </a:p>
+        </p:txBody>
+      </p:sp>
+      <p:sp>
+        <p:nvSpPr>
+          <p:cNvPr id="7" name="Rectangle 6"/>
+          <p:cNvSpPr/>
           <p:nvPr/>
         </p:nvSpPr>
         <p:spPr>
           <a:xfrm>
-            <a:off x="640080" y="1463040"/>
-            <a:ext cx="5029200" cy="320040"/>
-          </a:xfrm>
-          <a:prstGeom prst="rect">
-            <a:avLst/>
-          </a:prstGeom>
-          <a:noFill/>
-        </p:spPr>
-        <p:txBody>
-          <a:bodyPr wrap="square">
-            <a:spAutoFit/>
-          </a:bodyPr>
-          <a:lstStyle/>
-          <a:p>
-            <a:pPr algn="l">
-              <a:spcAft>
-                <a:spcPts val="200"/>
-              </a:spcAft>
-              <a:defRPr sz="1700" b="1">
-                <a:solidFill>
-                  <a:srgbClr val="1B2A4A"/>
-                </a:solidFill>
-                <a:latin typeface="Calibri"/>
-              </a:defRPr>
-              <a:lnSpc>
-                <a:spcPct val="114999"/>
-              </a:lnSpc>
-            </a:pPr>
-            <a:r>
-              <a:t>Domain Pre-training Is Essential</a:t>
-            </a:r>
-          </a:p>
-        </p:txBody>
-      </p:sp>
-      <p:sp>
-        <p:nvSpPr>
-          <p:cNvPr id="7" name="TextBox 6"/>
-          <p:cNvSpPr txBox="1"/>
-          <p:nvPr/>
-        </p:nvSpPr>
-        <p:spPr>
-          <a:xfrm>
-            <a:off x="640080" y="1828800"/>
-            <a:ext cx="5029200" cy="1645920"/>
-          </a:xfrm>
-          <a:prstGeom prst="rect">
-            <a:avLst/>
-          </a:prstGeom>
-          <a:noFill/>
-        </p:spPr>
-        <p:txBody>
-          <a:bodyPr wrap="square">
-            <a:spAutoFit/>
-          </a:bodyPr>
-          <a:lstStyle/>
-          <a:p>
-            <a:pPr algn="l">
-              <a:spcAft>
-                <a:spcPts val="400"/>
-              </a:spcAft>
-              <a:defRPr sz="1200" b="0">
-                <a:solidFill>
-                  <a:srgbClr val="202020"/>
-                </a:solidFill>
-                <a:latin typeface="Calibri"/>
-              </a:defRPr>
-              <a:lnSpc>
-                <a:spcPct val="130000"/>
-              </a:lnSpc>
-            </a:pPr>
-            <a:r>
-              <a:t>• FinBERT few-shot (97.7%) &gt;&gt; BERT few-shot (74.2%) on sentiment (+23.5 pp)</a:t>
-            </a:r>
-          </a:p>
-          <a:p>
-            <a:pPr algn="l">
-              <a:spcAft>
-                <a:spcPts val="400"/>
-              </a:spcAft>
-              <a:defRPr sz="1200" b="0">
-                <a:solidFill>
-                  <a:srgbClr val="202020"/>
-                </a:solidFill>
-                <a:latin typeface="Calibri"/>
-              </a:defRPr>
-              <a:lnSpc>
-                <a:spcPct val="130000"/>
-              </a:lnSpc>
-            </a:pPr>
-            <a:r>
-              <a:t>• Financial vocabulary and phrase semantics are encoded during MLM pre-training</a:t>
-            </a:r>
-          </a:p>
-          <a:p>
-            <a:pPr algn="l">
-              <a:spcAft>
-                <a:spcPts val="400"/>
-              </a:spcAft>
-              <a:defRPr sz="1200" b="0">
-                <a:solidFill>
-                  <a:srgbClr val="202020"/>
-                </a:solidFill>
-                <a:latin typeface="Calibri"/>
-              </a:defRPr>
-              <a:lnSpc>
-                <a:spcPct val="130000"/>
-              </a:lnSpc>
-            </a:pPr>
-            <a:r>
-              <a:t>• General BERT treats 'volatility', 'bearish' as neutral tokens</a:t>
-            </a:r>
-          </a:p>
-        </p:txBody>
-      </p:sp>
-      <p:sp>
-        <p:nvSpPr>
-          <p:cNvPr id="8" name="Rectangle 7"/>
-          <p:cNvSpPr/>
-          <p:nvPr/>
-        </p:nvSpPr>
-        <p:spPr>
-          <a:xfrm>
-            <a:off x="6126480" y="1371600"/>
-            <a:ext cx="5394960" cy="2286000"/>
+            <a:off x="4114800" y="2103120"/>
+            <a:ext cx="54864" cy="457200"/>
           </a:xfrm>
           <a:prstGeom prst="rect">
             <a:avLst/>
           </a:prstGeom>
           <a:solidFill>
-            <a:srgbClr val="D6E8F7"/>
+            <a:srgbClr val="E8A838"/>
           </a:solidFill>
           <a:ln>
             <a:noFill/>
@@ -3684,142 +3622,20 @@
       </p:sp>
       <p:sp>
         <p:nvSpPr>
-          <p:cNvPr id="9" name="TextBox 8"/>
-          <p:cNvSpPr txBox="1"/>
+          <p:cNvPr id="8" name="Rectangle 7"/>
+          <p:cNvSpPr/>
           <p:nvPr/>
         </p:nvSpPr>
         <p:spPr>
           <a:xfrm>
-            <a:off x="6309360" y="1463040"/>
-            <a:ext cx="5029200" cy="320040"/>
-          </a:xfrm>
-          <a:prstGeom prst="rect">
-            <a:avLst/>
-          </a:prstGeom>
-          <a:noFill/>
-        </p:spPr>
-        <p:txBody>
-          <a:bodyPr wrap="square">
-            <a:spAutoFit/>
-          </a:bodyPr>
-          <a:lstStyle/>
-          <a:p>
-            <a:pPr algn="l">
-              <a:spcAft>
-                <a:spcPts val="200"/>
-              </a:spcAft>
-              <a:defRPr sz="1700" b="1">
-                <a:solidFill>
-                  <a:srgbClr val="1B2A4A"/>
-                </a:solidFill>
-                <a:latin typeface="Calibri"/>
-              </a:defRPr>
-              <a:lnSpc>
-                <a:spcPct val="114999"/>
-              </a:lnSpc>
-            </a:pPr>
-            <a:r>
-              <a:t>Multi-task Learning Benefits Both Tasks</a:t>
-            </a:r>
-          </a:p>
-        </p:txBody>
-      </p:sp>
-      <p:sp>
-        <p:nvSpPr>
-          <p:cNvPr id="10" name="TextBox 9"/>
-          <p:cNvSpPr txBox="1"/>
-          <p:nvPr/>
-        </p:nvSpPr>
-        <p:spPr>
-          <a:xfrm>
-            <a:off x="6309360" y="1828800"/>
-            <a:ext cx="5029200" cy="1645920"/>
-          </a:xfrm>
-          <a:prstGeom prst="rect">
-            <a:avLst/>
-          </a:prstGeom>
-          <a:noFill/>
-        </p:spPr>
-        <p:txBody>
-          <a:bodyPr wrap="square">
-            <a:spAutoFit/>
-          </a:bodyPr>
-          <a:lstStyle/>
-          <a:p>
-            <a:pPr algn="l">
-              <a:spcAft>
-                <a:spcPts val="400"/>
-              </a:spcAft>
-              <a:defRPr sz="1200" b="0">
-                <a:solidFill>
-                  <a:srgbClr val="202020"/>
-                </a:solidFill>
-                <a:latin typeface="Calibri"/>
-              </a:defRPr>
-              <a:lnSpc>
-                <a:spcPct val="130000"/>
-              </a:lnSpc>
-            </a:pPr>
-            <a:r>
-              <a:t>• Shared representations act as an inductive bias / regulariser</a:t>
-            </a:r>
-          </a:p>
-          <a:p>
-            <a:pPr algn="l">
-              <a:spcAft>
-                <a:spcPts val="400"/>
-              </a:spcAft>
-              <a:defRPr sz="1200" b="0">
-                <a:solidFill>
-                  <a:srgbClr val="202020"/>
-                </a:solidFill>
-                <a:latin typeface="Calibri"/>
-              </a:defRPr>
-              <a:lnSpc>
-                <a:spcPct val="130000"/>
-              </a:lnSpc>
-            </a:pPr>
-            <a:r>
-              <a:t>• Sentiment head learns stance-relevant features (and vice versa)</a:t>
-            </a:r>
-          </a:p>
-          <a:p>
-            <a:pPr algn="l">
-              <a:spcAft>
-                <a:spcPts val="400"/>
-              </a:spcAft>
-              <a:defRPr sz="1200" b="0">
-                <a:solidFill>
-                  <a:srgbClr val="202020"/>
-                </a:solidFill>
-                <a:latin typeface="Calibri"/>
-              </a:defRPr>
-              <a:lnSpc>
-                <a:spcPct val="130000"/>
-              </a:lnSpc>
-            </a:pPr>
-            <a:r>
-              <a:t>• Best combined performance: 98.45% sentiment, 67.74% stance</a:t>
-            </a:r>
-          </a:p>
-        </p:txBody>
-      </p:sp>
-      <p:sp>
-        <p:nvSpPr>
-          <p:cNvPr id="11" name="Rectangle 10"/>
-          <p:cNvSpPr/>
-          <p:nvPr/>
-        </p:nvSpPr>
-        <p:spPr>
-          <a:xfrm>
-            <a:off x="457200" y="3931920"/>
-            <a:ext cx="5394960" cy="2286000"/>
+            <a:off x="7772400" y="2103120"/>
+            <a:ext cx="54864" cy="457200"/>
           </a:xfrm>
           <a:prstGeom prst="rect">
             <a:avLst/>
           </a:prstGeom>
           <a:solidFill>
-            <a:srgbClr val="D6E8F7"/>
+            <a:srgbClr val="E8A838"/>
           </a:solidFill>
           <a:ln>
             <a:noFill/>
@@ -3849,142 +3665,20 @@
       </p:sp>
       <p:sp>
         <p:nvSpPr>
-          <p:cNvPr id="12" name="TextBox 11"/>
-          <p:cNvSpPr txBox="1"/>
+          <p:cNvPr id="9" name="Rounded Rectangle 8"/>
+          <p:cNvSpPr/>
           <p:nvPr/>
         </p:nvSpPr>
         <p:spPr>
           <a:xfrm>
-            <a:off x="640080" y="4023360"/>
-            <a:ext cx="5029200" cy="320040"/>
+            <a:off x="2560320" y="2560320"/>
+            <a:ext cx="3200400" cy="548640"/>
           </a:xfrm>
-          <a:prstGeom prst="rect">
-            <a:avLst/>
-          </a:prstGeom>
-          <a:noFill/>
-        </p:spPr>
-        <p:txBody>
-          <a:bodyPr wrap="square">
-            <a:spAutoFit/>
-          </a:bodyPr>
-          <a:lstStyle/>
-          <a:p>
-            <a:pPr algn="l">
-              <a:spcAft>
-                <a:spcPts val="200"/>
-              </a:spcAft>
-              <a:defRPr sz="1700" b="1">
-                <a:solidFill>
-                  <a:srgbClr val="1B2A4A"/>
-                </a:solidFill>
-                <a:latin typeface="Calibri"/>
-              </a:defRPr>
-              <a:lnSpc>
-                <a:spcPct val="114999"/>
-              </a:lnSpc>
-            </a:pPr>
-            <a:r>
-              <a:t>Stance Is Inherently Harder</a:t>
-            </a:r>
-          </a:p>
-        </p:txBody>
-      </p:sp>
-      <p:sp>
-        <p:nvSpPr>
-          <p:cNvPr id="13" name="TextBox 12"/>
-          <p:cNvSpPr txBox="1"/>
-          <p:nvPr/>
-        </p:nvSpPr>
-        <p:spPr>
-          <a:xfrm>
-            <a:off x="640080" y="4389120"/>
-            <a:ext cx="5029200" cy="1645920"/>
-          </a:xfrm>
-          <a:prstGeom prst="rect">
-            <a:avLst/>
-          </a:prstGeom>
-          <a:noFill/>
-        </p:spPr>
-        <p:txBody>
-          <a:bodyPr wrap="square">
-            <a:spAutoFit/>
-          </a:bodyPr>
-          <a:lstStyle/>
-          <a:p>
-            <a:pPr algn="l">
-              <a:spcAft>
-                <a:spcPts val="400"/>
-              </a:spcAft>
-              <a:defRPr sz="1200" b="0">
-                <a:solidFill>
-                  <a:srgbClr val="202020"/>
-                </a:solidFill>
-                <a:latin typeface="Calibri"/>
-              </a:defRPr>
-              <a:lnSpc>
-                <a:spcPct val="130000"/>
-              </a:lnSpc>
-            </a:pPr>
-            <a:r>
-              <a:t>• Best stance accuracy: 67.74% vs. 98.45% sentiment</a:t>
-            </a:r>
-          </a:p>
-          <a:p>
-            <a:pPr algn="l">
-              <a:spcAft>
-                <a:spcPts val="400"/>
-              </a:spcAft>
-              <a:defRPr sz="1200" b="0">
-                <a:solidFill>
-                  <a:srgbClr val="202020"/>
-                </a:solidFill>
-                <a:latin typeface="Calibri"/>
-              </a:defRPr>
-              <a:lnSpc>
-                <a:spcPct val="130000"/>
-              </a:lnSpc>
-            </a:pPr>
-            <a:r>
-              <a:t>• Subtle, hedged policy language: 'may consider adjusting' → ambiguous</a:t>
-            </a:r>
-          </a:p>
-          <a:p>
-            <a:pPr algn="l">
-              <a:spcAft>
-                <a:spcPts val="400"/>
-              </a:spcAft>
-              <a:defRPr sz="1200" b="0">
-                <a:solidFill>
-                  <a:srgbClr val="202020"/>
-                </a:solidFill>
-                <a:latin typeface="Calibri"/>
-              </a:defRPr>
-              <a:lnSpc>
-                <a:spcPct val="130000"/>
-              </a:lnSpc>
-            </a:pPr>
-            <a:r>
-              <a:t>• Class imbalance: neutral ~50% dominates; dovish underrepresented</a:t>
-            </a:r>
-          </a:p>
-        </p:txBody>
-      </p:sp>
-      <p:sp>
-        <p:nvSpPr>
-          <p:cNvPr id="14" name="Rectangle 13"/>
-          <p:cNvSpPr/>
-          <p:nvPr/>
-        </p:nvSpPr>
-        <p:spPr>
-          <a:xfrm>
-            <a:off x="6126480" y="3931920"/>
-            <a:ext cx="5394960" cy="2286000"/>
-          </a:xfrm>
-          <a:prstGeom prst="rect">
+          <a:prstGeom prst="roundRect">
             <a:avLst/>
           </a:prstGeom>
           <a:solidFill>
-            <a:srgbClr val="D6E8F7"/>
+            <a:srgbClr val="2C5F8A"/>
           </a:solidFill>
           <a:ln>
             <a:noFill/>
@@ -4005,23 +3699,106 @@
           </a:fontRef>
         </p:style>
         <p:txBody>
-          <a:bodyPr rtlCol="0" anchor="ctr"/>
-          <a:lstStyle/>
-          <a:p>
-            <a:pPr algn="ctr"/>
-          </a:p>
-        </p:txBody>
-      </p:sp>
-      <p:sp>
-        <p:nvSpPr>
-          <p:cNvPr id="15" name="TextBox 14"/>
+          <a:bodyPr rtlCol="0" anchor="ctr" wrap="square"/>
+          <a:lstStyle/>
+          <a:p>
+            <a:pPr algn="ctr">
+              <a:spcBef>
+                <a:spcPts val="0"/>
+              </a:spcBef>
+              <a:spcAft>
+                <a:spcPts val="0"/>
+              </a:spcAft>
+              <a:defRPr sz="1300" b="1">
+                <a:solidFill>
+                  <a:srgbClr val="FFFFFF"/>
+                </a:solidFill>
+                <a:latin typeface="Calibri"/>
+              </a:defRPr>
+            </a:pPr>
+            <a:r>
+              <a:t>Sentiment Head</a:t>
+            </a:r>
+            <a:br/>
+            <a:r>
+              <a:t>Linear(768, 3)</a:t>
+            </a:r>
+          </a:p>
+        </p:txBody>
+      </p:sp>
+      <p:sp>
+        <p:nvSpPr>
+          <p:cNvPr id="10" name="Rounded Rectangle 9"/>
+          <p:cNvSpPr/>
+          <p:nvPr/>
+        </p:nvSpPr>
+        <p:spPr>
+          <a:xfrm>
+            <a:off x="6400800" y="2560320"/>
+            <a:ext cx="3200400" cy="548640"/>
+          </a:xfrm>
+          <a:prstGeom prst="roundRect">
+            <a:avLst/>
+          </a:prstGeom>
+          <a:solidFill>
+            <a:srgbClr val="2C5F8A"/>
+          </a:solidFill>
+          <a:ln>
+            <a:noFill/>
+          </a:ln>
+        </p:spPr>
+        <p:style>
+          <a:lnRef idx="1">
+            <a:schemeClr val="accent1"/>
+          </a:lnRef>
+          <a:fillRef idx="3">
+            <a:schemeClr val="accent1"/>
+          </a:fillRef>
+          <a:effectRef idx="2">
+            <a:schemeClr val="accent1"/>
+          </a:effectRef>
+          <a:fontRef idx="minor">
+            <a:schemeClr val="lt1"/>
+          </a:fontRef>
+        </p:style>
+        <p:txBody>
+          <a:bodyPr rtlCol="0" anchor="ctr" wrap="square"/>
+          <a:lstStyle/>
+          <a:p>
+            <a:pPr algn="ctr">
+              <a:spcBef>
+                <a:spcPts val="0"/>
+              </a:spcBef>
+              <a:spcAft>
+                <a:spcPts val="0"/>
+              </a:spcAft>
+              <a:defRPr sz="1300" b="1">
+                <a:solidFill>
+                  <a:srgbClr val="FFFFFF"/>
+                </a:solidFill>
+                <a:latin typeface="Calibri"/>
+              </a:defRPr>
+            </a:pPr>
+            <a:r>
+              <a:t>Stance Head</a:t>
+            </a:r>
+            <a:br/>
+            <a:r>
+              <a:t>Linear(768, 3)</a:t>
+            </a:r>
+          </a:p>
+        </p:txBody>
+      </p:sp>
+      <p:sp>
+        <p:nvSpPr>
+          <p:cNvPr id="11" name="TextBox 10"/>
           <p:cNvSpPr txBox="1"/>
           <p:nvPr/>
         </p:nvSpPr>
         <p:spPr>
           <a:xfrm>
-            <a:off x="6309360" y="4023360"/>
-            <a:ext cx="5029200" cy="320040"/>
+            <a:off x="457200" y="3474720"/>
+            <a:ext cx="5486400" cy="365760"/>
           </a:xfrm>
           <a:prstGeom prst="rect">
             <a:avLst/>
@@ -4038,7 +3815,7 @@
               <a:spcAft>
                 <a:spcPts val="200"/>
               </a:spcAft>
-              <a:defRPr sz="1700" b="1">
+              <a:defRPr sz="1800" b="1">
                 <a:solidFill>
                   <a:srgbClr val="1B2A4A"/>
                 </a:solidFill>
@@ -4049,21 +3826,21 @@
               </a:lnSpc>
             </a:pPr>
             <a:r>
-              <a:t>Error Patterns</a:t>
-            </a:r>
-          </a:p>
-        </p:txBody>
-      </p:sp>
-      <p:sp>
-        <p:nvSpPr>
-          <p:cNvPr id="16" name="TextBox 15"/>
+              <a:t>Training Configuration</a:t>
+            </a:r>
+          </a:p>
+        </p:txBody>
+      </p:sp>
+      <p:sp>
+        <p:nvSpPr>
+          <p:cNvPr id="12" name="TextBox 11"/>
           <p:cNvSpPr txBox="1"/>
           <p:nvPr/>
         </p:nvSpPr>
         <p:spPr>
           <a:xfrm>
-            <a:off x="6309360" y="4389120"/>
-            <a:ext cx="5029200" cy="1645920"/>
+            <a:off x="457200" y="3840480"/>
+            <a:ext cx="5303520" cy="2560320"/>
           </a:xfrm>
           <a:prstGeom prst="rect">
             <a:avLst/>
@@ -4080,7 +3857,7 @@
               <a:spcAft>
                 <a:spcPts val="400"/>
               </a:spcAft>
-              <a:defRPr sz="1200" b="0">
+              <a:defRPr sz="1300" b="0">
                 <a:solidFill>
                   <a:srgbClr val="202020"/>
                 </a:solidFill>
@@ -4091,7 +3868,7 @@
               </a:lnSpc>
             </a:pPr>
             <a:r>
-              <a:t>• Most common confusion: neutral ↔ hawkish (stance)</a:t>
+              <a:t>• Alternating task batches: sentiment batch → stance batch</a:t>
             </a:r>
           </a:p>
           <a:p>
@@ -4099,7 +3876,7 @@
               <a:spcAft>
                 <a:spcPts val="400"/>
               </a:spcAft>
-              <a:defRPr sz="1200" b="0">
+              <a:defRPr sz="1300" b="0">
                 <a:solidFill>
                   <a:srgbClr val="202020"/>
                 </a:solidFill>
@@ -4110,7 +3887,7 @@
               </a:lnSpc>
             </a:pPr>
             <a:r>
-              <a:t>• Dovish least represented → lowest per-class recall</a:t>
+              <a:t>• Shared encoder gradients from both tasks each step</a:t>
             </a:r>
           </a:p>
           <a:p>
@@ -4118,7 +3895,7 @@
               <a:spcAft>
                 <a:spcPts val="400"/>
               </a:spcAft>
-              <a:defRPr sz="1200" b="0">
+              <a:defRPr sz="1300" b="0">
                 <a:solidFill>
                   <a:srgbClr val="202020"/>
                 </a:solidFill>
@@ -4129,7 +3906,490 @@
               </a:lnSpc>
             </a:pPr>
             <a:r>
-              <a:t>• Sentiment errors rare; mostly neutral/negative boundary</a:t>
+              <a:t>• Weighted CE for stance (handles class imbalance)</a:t>
+            </a:r>
+          </a:p>
+          <a:p>
+            <a:pPr algn="l">
+              <a:spcAft>
+                <a:spcPts val="400"/>
+              </a:spcAft>
+              <a:defRPr sz="1300" b="0">
+                <a:solidFill>
+                  <a:srgbClr val="202020"/>
+                </a:solidFill>
+                <a:latin typeface="Calibri"/>
+              </a:defRPr>
+              <a:lnSpc>
+                <a:spcPct val="130000"/>
+              </a:lnSpc>
+            </a:pPr>
+            <a:r>
+              <a:t>• Standard CE for sentiment (more balanced)</a:t>
+            </a:r>
+          </a:p>
+          <a:p>
+            <a:pPr algn="l">
+              <a:spcAft>
+                <a:spcPts val="400"/>
+              </a:spcAft>
+              <a:defRPr sz="1300" b="0">
+                <a:solidFill>
+                  <a:srgbClr val="202020"/>
+                </a:solidFill>
+                <a:latin typeface="Calibri"/>
+              </a:defRPr>
+              <a:lnSpc>
+                <a:spcPct val="130000"/>
+              </a:lnSpc>
+            </a:pPr>
+            <a:r>
+              <a:t>• AdamW, lr=2e-5, 8 epochs, linear warmup + decay</a:t>
+            </a:r>
+          </a:p>
+          <a:p>
+            <a:pPr algn="l">
+              <a:spcAft>
+                <a:spcPts val="400"/>
+              </a:spcAft>
+              <a:defRPr sz="1300" b="0">
+                <a:solidFill>
+                  <a:srgbClr val="202020"/>
+                </a:solidFill>
+                <a:latin typeface="Calibri"/>
+              </a:defRPr>
+              <a:lnSpc>
+                <a:spcPct val="130000"/>
+              </a:lnSpc>
+            </a:pPr>
+            <a:r>
+              <a:t>• Early stopping on combined validation loss</a:t>
+            </a:r>
+          </a:p>
+        </p:txBody>
+      </p:sp>
+      <p:sp>
+        <p:nvSpPr>
+          <p:cNvPr id="13" name="TextBox 12"/>
+          <p:cNvSpPr txBox="1"/>
+          <p:nvPr/>
+        </p:nvSpPr>
+        <p:spPr>
+          <a:xfrm>
+            <a:off x="6400800" y="3474720"/>
+            <a:ext cx="5303520" cy="365760"/>
+          </a:xfrm>
+          <a:prstGeom prst="rect">
+            <a:avLst/>
+          </a:prstGeom>
+          <a:noFill/>
+        </p:spPr>
+        <p:txBody>
+          <a:bodyPr wrap="square">
+            <a:spAutoFit/>
+          </a:bodyPr>
+          <a:lstStyle/>
+          <a:p>
+            <a:pPr algn="l">
+              <a:spcAft>
+                <a:spcPts val="200"/>
+              </a:spcAft>
+              <a:defRPr sz="1800" b="1">
+                <a:solidFill>
+                  <a:srgbClr val="1B2A4A"/>
+                </a:solidFill>
+                <a:latin typeface="Calibri"/>
+              </a:defRPr>
+              <a:lnSpc>
+                <a:spcPct val="114999"/>
+              </a:lnSpc>
+            </a:pPr>
+            <a:r>
+              <a:t>Results (BEST MODEL)</a:t>
+            </a:r>
+          </a:p>
+        </p:txBody>
+      </p:sp>
+      <p:graphicFrame>
+        <p:nvGraphicFramePr>
+          <p:cNvPr id="14" name="Table 13"/>
+          <p:cNvGraphicFramePr>
+            <a:graphicFrameLocks noGrp="1"/>
+          </p:cNvGraphicFramePr>
+          <p:nvPr/>
+        </p:nvGraphicFramePr>
+        <p:xfrm>
+          <a:off x="6400800" y="3931920"/>
+          <a:ext cx="4572000" cy="1463040"/>
+        </p:xfrm>
+        <a:graphic>
+          <a:graphicData uri="http://schemas.openxmlformats.org/drawingml/2006/table">
+            <a:tbl>
+              <a:tblPr firstRow="1" bandRow="1">
+                <a:tableStyleId>{5C22544A-7EE6-4342-B048-85BDC9FD1C3A}</a:tableStyleId>
+              </a:tblPr>
+              <a:tblGrid>
+                <a:gridCol w="1645920"/>
+                <a:gridCol w="1463040"/>
+                <a:gridCol w="1463040"/>
+              </a:tblGrid>
+              <a:tr h="365760">
+                <a:tc>
+                  <a:txBody>
+                    <a:bodyPr/>
+                    <a:lstStyle/>
+                    <a:p>
+                      <a:pPr algn="ctr">
+                        <a:defRPr sz="1400" b="1">
+                          <a:solidFill>
+                            <a:srgbClr val="FFFFFF"/>
+                          </a:solidFill>
+                          <a:latin typeface="Calibri"/>
+                        </a:defRPr>
+                      </a:pPr>
+                      <a:r>
+                        <a:t>Metric</a:t>
+                      </a:r>
+                    </a:p>
+                  </a:txBody>
+                  <a:tcPr anchor="ctr">
+                    <a:solidFill>
+                      <a:srgbClr val="1B2A4A"/>
+                    </a:solidFill>
+                  </a:tcPr>
+                </a:tc>
+                <a:tc>
+                  <a:txBody>
+                    <a:bodyPr/>
+                    <a:lstStyle/>
+                    <a:p>
+                      <a:pPr algn="ctr">
+                        <a:defRPr sz="1400" b="1">
+                          <a:solidFill>
+                            <a:srgbClr val="FFFFFF"/>
+                          </a:solidFill>
+                          <a:latin typeface="Calibri"/>
+                        </a:defRPr>
+                      </a:pPr>
+                      <a:r>
+                        <a:t>Sentiment</a:t>
+                      </a:r>
+                    </a:p>
+                  </a:txBody>
+                  <a:tcPr anchor="ctr">
+                    <a:solidFill>
+                      <a:srgbClr val="1B2A4A"/>
+                    </a:solidFill>
+                  </a:tcPr>
+                </a:tc>
+                <a:tc>
+                  <a:txBody>
+                    <a:bodyPr/>
+                    <a:lstStyle/>
+                    <a:p>
+                      <a:pPr algn="ctr">
+                        <a:defRPr sz="1400" b="1">
+                          <a:solidFill>
+                            <a:srgbClr val="FFFFFF"/>
+                          </a:solidFill>
+                          <a:latin typeface="Calibri"/>
+                        </a:defRPr>
+                      </a:pPr>
+                      <a:r>
+                        <a:t>Stance</a:t>
+                      </a:r>
+                    </a:p>
+                  </a:txBody>
+                  <a:tcPr anchor="ctr">
+                    <a:solidFill>
+                      <a:srgbClr val="1B2A4A"/>
+                    </a:solidFill>
+                  </a:tcPr>
+                </a:tc>
+              </a:tr>
+              <a:tr h="365760">
+                <a:tc>
+                  <a:txBody>
+                    <a:bodyPr/>
+                    <a:lstStyle/>
+                    <a:p>
+                      <a:pPr algn="ctr">
+                        <a:defRPr sz="1400">
+                          <a:solidFill>
+                            <a:srgbClr val="202020"/>
+                          </a:solidFill>
+                          <a:latin typeface="Calibri"/>
+                        </a:defRPr>
+                      </a:pPr>
+                      <a:r>
+                        <a:t>Accuracy</a:t>
+                      </a:r>
+                    </a:p>
+                  </a:txBody>
+                  <a:tcPr anchor="ctr">
+                    <a:solidFill>
+                      <a:srgbClr val="FFFFFF"/>
+                    </a:solidFill>
+                  </a:tcPr>
+                </a:tc>
+                <a:tc>
+                  <a:txBody>
+                    <a:bodyPr/>
+                    <a:lstStyle/>
+                    <a:p>
+                      <a:pPr algn="ctr">
+                        <a:defRPr sz="1400">
+                          <a:solidFill>
+                            <a:srgbClr val="202020"/>
+                          </a:solidFill>
+                          <a:latin typeface="Calibri"/>
+                        </a:defRPr>
+                      </a:pPr>
+                      <a:r>
+                        <a:t>98.45%</a:t>
+                      </a:r>
+                    </a:p>
+                  </a:txBody>
+                  <a:tcPr anchor="ctr">
+                    <a:solidFill>
+                      <a:srgbClr val="FFFFFF"/>
+                    </a:solidFill>
+                  </a:tcPr>
+                </a:tc>
+                <a:tc>
+                  <a:txBody>
+                    <a:bodyPr/>
+                    <a:lstStyle/>
+                    <a:p>
+                      <a:pPr algn="ctr">
+                        <a:defRPr sz="1400">
+                          <a:solidFill>
+                            <a:srgbClr val="202020"/>
+                          </a:solidFill>
+                          <a:latin typeface="Calibri"/>
+                        </a:defRPr>
+                      </a:pPr>
+                      <a:r>
+                        <a:t>67.74%</a:t>
+                      </a:r>
+                    </a:p>
+                  </a:txBody>
+                  <a:tcPr anchor="ctr">
+                    <a:solidFill>
+                      <a:srgbClr val="FFFFFF"/>
+                    </a:solidFill>
+                  </a:tcPr>
+                </a:tc>
+              </a:tr>
+              <a:tr h="365760">
+                <a:tc>
+                  <a:txBody>
+                    <a:bodyPr/>
+                    <a:lstStyle/>
+                    <a:p>
+                      <a:pPr algn="ctr">
+                        <a:defRPr sz="1400">
+                          <a:solidFill>
+                            <a:srgbClr val="202020"/>
+                          </a:solidFill>
+                          <a:latin typeface="Calibri"/>
+                        </a:defRPr>
+                      </a:pPr>
+                      <a:r>
+                        <a:t>Macro-F1</a:t>
+                      </a:r>
+                    </a:p>
+                  </a:txBody>
+                  <a:tcPr anchor="ctr">
+                    <a:solidFill>
+                      <a:srgbClr val="F2F2F2"/>
+                    </a:solidFill>
+                  </a:tcPr>
+                </a:tc>
+                <a:tc>
+                  <a:txBody>
+                    <a:bodyPr/>
+                    <a:lstStyle/>
+                    <a:p>
+                      <a:pPr algn="ctr">
+                        <a:defRPr sz="1400">
+                          <a:solidFill>
+                            <a:srgbClr val="202020"/>
+                          </a:solidFill>
+                          <a:latin typeface="Calibri"/>
+                        </a:defRPr>
+                      </a:pPr>
+                      <a:r>
+                        <a:t>0.9772</a:t>
+                      </a:r>
+                    </a:p>
+                  </a:txBody>
+                  <a:tcPr anchor="ctr">
+                    <a:solidFill>
+                      <a:srgbClr val="F2F2F2"/>
+                    </a:solidFill>
+                  </a:tcPr>
+                </a:tc>
+                <a:tc>
+                  <a:txBody>
+                    <a:bodyPr/>
+                    <a:lstStyle/>
+                    <a:p>
+                      <a:pPr algn="ctr">
+                        <a:defRPr sz="1400">
+                          <a:solidFill>
+                            <a:srgbClr val="202020"/>
+                          </a:solidFill>
+                          <a:latin typeface="Calibri"/>
+                        </a:defRPr>
+                      </a:pPr>
+                      <a:r>
+                        <a:t>0.6684</a:t>
+                      </a:r>
+                    </a:p>
+                  </a:txBody>
+                  <a:tcPr anchor="ctr">
+                    <a:solidFill>
+                      <a:srgbClr val="F2F2F2"/>
+                    </a:solidFill>
+                  </a:tcPr>
+                </a:tc>
+              </a:tr>
+              <a:tr h="365760">
+                <a:tc>
+                  <a:txBody>
+                    <a:bodyPr/>
+                    <a:lstStyle/>
+                    <a:p>
+                      <a:pPr algn="ctr">
+                        <a:defRPr sz="1400">
+                          <a:solidFill>
+                            <a:srgbClr val="202020"/>
+                          </a:solidFill>
+                          <a:latin typeface="Calibri"/>
+                        </a:defRPr>
+                      </a:pPr>
+                      <a:r>
+                        <a:t>Weighted-F1</a:t>
+                      </a:r>
+                    </a:p>
+                  </a:txBody>
+                  <a:tcPr anchor="ctr">
+                    <a:solidFill>
+                      <a:srgbClr val="FFFFFF"/>
+                    </a:solidFill>
+                  </a:tcPr>
+                </a:tc>
+                <a:tc>
+                  <a:txBody>
+                    <a:bodyPr/>
+                    <a:lstStyle/>
+                    <a:p>
+                      <a:pPr algn="ctr">
+                        <a:defRPr sz="1400">
+                          <a:solidFill>
+                            <a:srgbClr val="202020"/>
+                          </a:solidFill>
+                          <a:latin typeface="Calibri"/>
+                        </a:defRPr>
+                      </a:pPr>
+                      <a:r>
+                        <a:t>0.9800</a:t>
+                      </a:r>
+                    </a:p>
+                  </a:txBody>
+                  <a:tcPr anchor="ctr">
+                    <a:solidFill>
+                      <a:srgbClr val="FFFFFF"/>
+                    </a:solidFill>
+                  </a:tcPr>
+                </a:tc>
+                <a:tc>
+                  <a:txBody>
+                    <a:bodyPr/>
+                    <a:lstStyle/>
+                    <a:p>
+                      <a:pPr algn="ctr">
+                        <a:defRPr sz="1400">
+                          <a:solidFill>
+                            <a:srgbClr val="202020"/>
+                          </a:solidFill>
+                          <a:latin typeface="Calibri"/>
+                        </a:defRPr>
+                      </a:pPr>
+                      <a:r>
+                        <a:t>0.6583</a:t>
+                      </a:r>
+                    </a:p>
+                  </a:txBody>
+                  <a:tcPr anchor="ctr">
+                    <a:solidFill>
+                      <a:srgbClr val="FFFFFF"/>
+                    </a:solidFill>
+                  </a:tcPr>
+                </a:tc>
+              </a:tr>
+            </a:tbl>
+          </a:graphicData>
+        </a:graphic>
+      </p:graphicFrame>
+      <p:sp>
+        <p:nvSpPr>
+          <p:cNvPr id="15" name="TextBox 14"/>
+          <p:cNvSpPr txBox="1"/>
+          <p:nvPr/>
+        </p:nvSpPr>
+        <p:spPr>
+          <a:xfrm>
+            <a:off x="6400800" y="5486400"/>
+            <a:ext cx="5303520" cy="914400"/>
+          </a:xfrm>
+          <a:prstGeom prst="rect">
+            <a:avLst/>
+          </a:prstGeom>
+          <a:noFill/>
+        </p:spPr>
+        <p:txBody>
+          <a:bodyPr wrap="square">
+            <a:spAutoFit/>
+          </a:bodyPr>
+          <a:lstStyle/>
+          <a:p>
+            <a:pPr algn="l">
+              <a:spcAft>
+                <a:spcPts val="400"/>
+              </a:spcAft>
+              <a:defRPr sz="1300" b="0">
+                <a:solidFill>
+                  <a:srgbClr val="27AE60"/>
+                </a:solidFill>
+                <a:latin typeface="Calibri"/>
+              </a:defRPr>
+              <a:lnSpc>
+                <a:spcPct val="130000"/>
+              </a:lnSpc>
+            </a:pPr>
+            <a:r>
+              <a:t>• Improves over single-task FinBERT on BOTH tasks</a:t>
+            </a:r>
+          </a:p>
+          <a:p>
+            <a:pPr algn="l">
+              <a:spcAft>
+                <a:spcPts val="400"/>
+              </a:spcAft>
+              <a:defRPr sz="1300" b="0">
+                <a:solidFill>
+                  <a:srgbClr val="27AE60"/>
+                </a:solidFill>
+                <a:latin typeface="Calibri"/>
+              </a:defRPr>
+              <a:lnSpc>
+                <a:spcPct val="130000"/>
+              </a:lnSpc>
+            </a:pPr>
+            <a:r>
+              <a:t>• Cross-task regularization reduces overfitting</a:t>
             </a:r>
           </a:p>
         </p:txBody>
@@ -4283,384 +4543,22 @@
               </a:lnSpc>
             </a:pPr>
             <a:r>
-              <a:t>Error Analysis</a:t>
-            </a:r>
-          </a:p>
-        </p:txBody>
-      </p:sp>
-      <p:sp>
-        <p:nvSpPr>
-          <p:cNvPr id="5" name="TextBox 4"/>
-          <p:cNvSpPr txBox="1"/>
-          <p:nvPr/>
-        </p:nvSpPr>
-        <p:spPr>
-          <a:xfrm>
-            <a:off x="457200" y="1371600"/>
-            <a:ext cx="5486400" cy="365760"/>
-          </a:xfrm>
-          <a:prstGeom prst="rect">
-            <a:avLst/>
-          </a:prstGeom>
-          <a:noFill/>
-        </p:spPr>
-        <p:txBody>
-          <a:bodyPr wrap="square">
-            <a:spAutoFit/>
-          </a:bodyPr>
-          <a:lstStyle/>
-          <a:p>
-            <a:pPr algn="l">
-              <a:spcAft>
-                <a:spcPts val="200"/>
-              </a:spcAft>
-              <a:defRPr sz="2000" b="1">
-                <a:solidFill>
-                  <a:srgbClr val="1B2A4A"/>
-                </a:solidFill>
-                <a:latin typeface="Calibri"/>
-              </a:defRPr>
-              <a:lnSpc>
-                <a:spcPct val="114999"/>
-              </a:lnSpc>
-            </a:pPr>
-            <a:r>
-              <a:t>Stance Classification Errors</a:t>
-            </a:r>
-          </a:p>
-        </p:txBody>
-      </p:sp>
-      <p:sp>
-        <p:nvSpPr>
-          <p:cNvPr id="6" name="TextBox 5"/>
-          <p:cNvSpPr txBox="1"/>
-          <p:nvPr/>
-        </p:nvSpPr>
-        <p:spPr>
-          <a:xfrm>
-            <a:off x="457200" y="1783080"/>
-            <a:ext cx="5303520" cy="2103120"/>
-          </a:xfrm>
-          <a:prstGeom prst="rect">
-            <a:avLst/>
-          </a:prstGeom>
-          <a:noFill/>
-        </p:spPr>
-        <p:txBody>
-          <a:bodyPr wrap="square">
-            <a:spAutoFit/>
-          </a:bodyPr>
-          <a:lstStyle/>
-          <a:p>
-            <a:pPr algn="l">
-              <a:spcAft>
-                <a:spcPts val="400"/>
-              </a:spcAft>
-              <a:defRPr sz="1400" b="0">
-                <a:solidFill>
-                  <a:srgbClr val="202020"/>
-                </a:solidFill>
-                <a:latin typeface="Calibri"/>
-              </a:defRPr>
-              <a:lnSpc>
-                <a:spcPct val="130000"/>
-              </a:lnSpc>
-            </a:pPr>
-            <a:r>
-              <a:t>• Neutral ↔ Hawkish: most frequent confusion pair</a:t>
-            </a:r>
-          </a:p>
-          <a:p>
-            <a:pPr algn="l">
-              <a:spcAft>
-                <a:spcPts val="400"/>
-              </a:spcAft>
-              <a:defRPr sz="1400" b="0">
-                <a:solidFill>
-                  <a:srgbClr val="202020"/>
-                </a:solidFill>
-                <a:latin typeface="Calibri"/>
-              </a:defRPr>
-              <a:lnSpc>
-                <a:spcPct val="130000"/>
-              </a:lnSpc>
-            </a:pPr>
-            <a:r>
-              <a:t>• "Mixed signal" sentences containing both tightening and easing cues</a:t>
-            </a:r>
-          </a:p>
-          <a:p>
-            <a:pPr algn="l">
-              <a:spcAft>
-                <a:spcPts val="400"/>
-              </a:spcAft>
-              <a:defRPr sz="1400" b="0">
-                <a:solidFill>
-                  <a:srgbClr val="202020"/>
-                </a:solidFill>
-                <a:latin typeface="Calibri"/>
-              </a:defRPr>
-              <a:lnSpc>
-                <a:spcPct val="130000"/>
-              </a:lnSpc>
-            </a:pPr>
-            <a:r>
-              <a:t>• Hedged language: 'could', 'might', 'may consider' blurs stance</a:t>
-            </a:r>
-          </a:p>
-          <a:p>
-            <a:pPr algn="l">
-              <a:spcAft>
-                <a:spcPts val="400"/>
-              </a:spcAft>
-              <a:defRPr sz="1400" b="0">
-                <a:solidFill>
-                  <a:srgbClr val="202020"/>
-                </a:solidFill>
-                <a:latin typeface="Calibri"/>
-              </a:defRPr>
-              <a:lnSpc>
-                <a:spcPct val="130000"/>
-              </a:lnSpc>
-            </a:pPr>
-            <a:r>
-              <a:t>• Conditional statements: hawkish action under dovish framing</a:t>
-            </a:r>
-          </a:p>
-          <a:p>
-            <a:pPr algn="l">
-              <a:spcAft>
-                <a:spcPts val="400"/>
-              </a:spcAft>
-              <a:defRPr sz="1400" b="0">
-                <a:solidFill>
-                  <a:srgbClr val="202020"/>
-                </a:solidFill>
-                <a:latin typeface="Calibri"/>
-              </a:defRPr>
-              <a:lnSpc>
-                <a:spcPct val="130000"/>
-              </a:lnSpc>
-            </a:pPr>
-            <a:r>
-              <a:t>• Forward guidance vs. current assessment confusion</a:t>
-            </a:r>
-          </a:p>
-        </p:txBody>
-      </p:sp>
-      <p:sp>
-        <p:nvSpPr>
-          <p:cNvPr id="7" name="TextBox 6"/>
-          <p:cNvSpPr txBox="1"/>
-          <p:nvPr/>
-        </p:nvSpPr>
-        <p:spPr>
-          <a:xfrm>
-            <a:off x="6400800" y="1371600"/>
-            <a:ext cx="5303520" cy="365760"/>
-          </a:xfrm>
-          <a:prstGeom prst="rect">
-            <a:avLst/>
-          </a:prstGeom>
-          <a:noFill/>
-        </p:spPr>
-        <p:txBody>
-          <a:bodyPr wrap="square">
-            <a:spAutoFit/>
-          </a:bodyPr>
-          <a:lstStyle/>
-          <a:p>
-            <a:pPr algn="l">
-              <a:spcAft>
-                <a:spcPts val="200"/>
-              </a:spcAft>
-              <a:defRPr sz="2000" b="1">
-                <a:solidFill>
-                  <a:srgbClr val="1B2A4A"/>
-                </a:solidFill>
-                <a:latin typeface="Calibri"/>
-              </a:defRPr>
-              <a:lnSpc>
-                <a:spcPct val="114999"/>
-              </a:lnSpc>
-            </a:pPr>
-            <a:r>
-              <a:t>Sentiment Classification Errors</a:t>
-            </a:r>
-          </a:p>
-        </p:txBody>
-      </p:sp>
-      <p:sp>
-        <p:nvSpPr>
-          <p:cNvPr id="8" name="TextBox 7"/>
-          <p:cNvSpPr txBox="1"/>
-          <p:nvPr/>
-        </p:nvSpPr>
-        <p:spPr>
-          <a:xfrm>
-            <a:off x="6400800" y="1783080"/>
-            <a:ext cx="5303520" cy="2103120"/>
-          </a:xfrm>
-          <a:prstGeom prst="rect">
-            <a:avLst/>
-          </a:prstGeom>
-          <a:noFill/>
-        </p:spPr>
-        <p:txBody>
-          <a:bodyPr wrap="square">
-            <a:spAutoFit/>
-          </a:bodyPr>
-          <a:lstStyle/>
-          <a:p>
-            <a:pPr algn="l">
-              <a:spcAft>
-                <a:spcPts val="400"/>
-              </a:spcAft>
-              <a:defRPr sz="1400" b="0">
-                <a:solidFill>
-                  <a:srgbClr val="202020"/>
-                </a:solidFill>
-                <a:latin typeface="Calibri"/>
-              </a:defRPr>
-              <a:lnSpc>
-                <a:spcPct val="130000"/>
-              </a:lnSpc>
-            </a:pPr>
-            <a:r>
-              <a:t>• Errors are rare (&lt;2% for multi-task FinBERT)</a:t>
-            </a:r>
-          </a:p>
-          <a:p>
-            <a:pPr algn="l">
-              <a:spcAft>
-                <a:spcPts val="400"/>
-              </a:spcAft>
-              <a:defRPr sz="1400" b="0">
-                <a:solidFill>
-                  <a:srgbClr val="202020"/>
-                </a:solidFill>
-                <a:latin typeface="Calibri"/>
-              </a:defRPr>
-              <a:lnSpc>
-                <a:spcPct val="130000"/>
-              </a:lnSpc>
-            </a:pPr>
-            <a:r>
-              <a:t>• Most errors at neutral/negative boundary</a:t>
-            </a:r>
-          </a:p>
-          <a:p>
-            <a:pPr algn="l">
-              <a:spcAft>
-                <a:spcPts val="400"/>
-              </a:spcAft>
-              <a:defRPr sz="1400" b="0">
-                <a:solidFill>
-                  <a:srgbClr val="202020"/>
-                </a:solidFill>
-                <a:latin typeface="Calibri"/>
-              </a:defRPr>
-              <a:lnSpc>
-                <a:spcPct val="130000"/>
-              </a:lnSpc>
-            </a:pPr>
-            <a:r>
-              <a:t>• Financial idioms: 'limited upside' = negative, not neutral</a:t>
-            </a:r>
-          </a:p>
-          <a:p>
-            <a:pPr algn="l">
-              <a:spcAft>
-                <a:spcPts val="400"/>
-              </a:spcAft>
-              <a:defRPr sz="1400" b="0">
-                <a:solidFill>
-                  <a:srgbClr val="202020"/>
-                </a:solidFill>
-                <a:latin typeface="Calibri"/>
-              </a:defRPr>
-              <a:lnSpc>
-                <a:spcPct val="130000"/>
-              </a:lnSpc>
-            </a:pPr>
-            <a:r>
-              <a:t>• Comparative statements sometimes misclassified</a:t>
-            </a:r>
-          </a:p>
-          <a:p>
-            <a:pPr algn="l">
-              <a:spcAft>
-                <a:spcPts val="400"/>
-              </a:spcAft>
-              <a:defRPr sz="1400" b="0">
-                <a:solidFill>
-                  <a:srgbClr val="202020"/>
-                </a:solidFill>
-                <a:latin typeface="Calibri"/>
-              </a:defRPr>
-              <a:lnSpc>
-                <a:spcPct val="130000"/>
-              </a:lnSpc>
-            </a:pPr>
-            <a:r>
-              <a:t>• Multi-task reduces ambiguous-boundary errors</a:t>
-            </a:r>
-          </a:p>
-        </p:txBody>
-      </p:sp>
-      <p:sp>
-        <p:nvSpPr>
-          <p:cNvPr id="9" name="TextBox 8"/>
-          <p:cNvSpPr txBox="1"/>
-          <p:nvPr/>
-        </p:nvSpPr>
-        <p:spPr>
-          <a:xfrm>
-            <a:off x="457200" y="4114800"/>
-            <a:ext cx="11247120" cy="365760"/>
-          </a:xfrm>
-          <a:prstGeom prst="rect">
-            <a:avLst/>
-          </a:prstGeom>
-          <a:noFill/>
-        </p:spPr>
-        <p:txBody>
-          <a:bodyPr wrap="square">
-            <a:spAutoFit/>
-          </a:bodyPr>
-          <a:lstStyle/>
-          <a:p>
-            <a:pPr algn="l">
-              <a:spcAft>
-                <a:spcPts val="200"/>
-              </a:spcAft>
-              <a:defRPr sz="2000" b="1">
-                <a:solidFill>
-                  <a:srgbClr val="1B2A4A"/>
-                </a:solidFill>
-                <a:latin typeface="Calibri"/>
-              </a:defRPr>
-              <a:lnSpc>
-                <a:spcPct val="114999"/>
-              </a:lnSpc>
-            </a:pPr>
-            <a:r>
-              <a:t>Multi-task Effect on Error Reduction</a:t>
+              <a:t>Results Summary — All Models</a:t>
             </a:r>
           </a:p>
         </p:txBody>
       </p:sp>
       <p:graphicFrame>
         <p:nvGraphicFramePr>
-          <p:cNvPr id="10" name="Table 9"/>
+          <p:cNvPr id="5" name="Table 4"/>
           <p:cNvGraphicFramePr>
             <a:graphicFrameLocks noGrp="1"/>
           </p:cNvGraphicFramePr>
           <p:nvPr/>
         </p:nvGraphicFramePr>
         <p:xfrm>
-          <a:off x="457200" y="4572000"/>
-          <a:ext cx="11247120" cy="2011680"/>
+          <a:off x="457200" y="1371600"/>
+          <a:ext cx="11247120" cy="4754880"/>
         </p:xfrm>
         <a:graphic>
           <a:graphicData uri="http://schemas.openxmlformats.org/drawingml/2006/table">
@@ -4669,12 +4567,14 @@
                 <a:tableStyleId>{5C22544A-7EE6-4342-B048-85BDC9FD1C3A}</a:tableStyleId>
               </a:tblPr>
               <a:tblGrid>
-                <a:gridCol w="3200400"/>
-                <a:gridCol w="2560320"/>
-                <a:gridCol w="2560320"/>
+                <a:gridCol w="2286000"/>
+                <a:gridCol w="1371600"/>
+                <a:gridCol w="1371600"/>
+                <a:gridCol w="1645920"/>
+                <a:gridCol w="1645920"/>
                 <a:gridCol w="2926080"/>
               </a:tblGrid>
-              <a:tr h="335280">
+              <a:tr h="432261">
                 <a:tc>
                   <a:txBody>
                     <a:bodyPr/>
@@ -4689,7 +4589,7 @@
                         </a:defRPr>
                       </a:pPr>
                       <a:r>
-                        <a:t>Error Type</a:t>
+                        <a:t>Model</a:t>
                       </a:r>
                     </a:p>
                   </a:txBody>
@@ -4713,7 +4613,7 @@
                         </a:defRPr>
                       </a:pPr>
                       <a:r>
-                        <a:t>Single-task FinBERT</a:t>
+                        <a:t>Sent. Acc</a:t>
                       </a:r>
                     </a:p>
                   </a:txBody>
@@ -4737,13 +4637,1425 @@
                         </a:defRPr>
                       </a:pPr>
                       <a:r>
+                        <a:t>Sent. F1</a:t>
+                      </a:r>
+                    </a:p>
+                  </a:txBody>
+                  <a:tcPr anchor="ctr">
+                    <a:solidFill>
+                      <a:srgbClr val="1B2A4A"/>
+                    </a:solidFill>
+                  </a:tcPr>
+                </a:tc>
+                <a:tc>
+                  <a:txBody>
+                    <a:bodyPr/>
+                    <a:lstStyle/>
+                    <a:p>
+                      <a:pPr algn="ctr">
+                        <a:defRPr sz="1200" b="1">
+                          <a:solidFill>
+                            <a:srgbClr val="FFFFFF"/>
+                          </a:solidFill>
+                          <a:latin typeface="Calibri"/>
+                        </a:defRPr>
+                      </a:pPr>
+                      <a:r>
+                        <a:t>Stance Acc</a:t>
+                      </a:r>
+                    </a:p>
+                  </a:txBody>
+                  <a:tcPr anchor="ctr">
+                    <a:solidFill>
+                      <a:srgbClr val="1B2A4A"/>
+                    </a:solidFill>
+                  </a:tcPr>
+                </a:tc>
+                <a:tc>
+                  <a:txBody>
+                    <a:bodyPr/>
+                    <a:lstStyle/>
+                    <a:p>
+                      <a:pPr algn="ctr">
+                        <a:defRPr sz="1200" b="1">
+                          <a:solidFill>
+                            <a:srgbClr val="FFFFFF"/>
+                          </a:solidFill>
+                          <a:latin typeface="Calibri"/>
+                        </a:defRPr>
+                      </a:pPr>
+                      <a:r>
+                        <a:t>Stance F1</a:t>
+                      </a:r>
+                    </a:p>
+                  </a:txBody>
+                  <a:tcPr anchor="ctr">
+                    <a:solidFill>
+                      <a:srgbClr val="1B2A4A"/>
+                    </a:solidFill>
+                  </a:tcPr>
+                </a:tc>
+                <a:tc>
+                  <a:txBody>
+                    <a:bodyPr/>
+                    <a:lstStyle/>
+                    <a:p>
+                      <a:pPr algn="ctr">
+                        <a:defRPr sz="1200" b="1">
+                          <a:solidFill>
+                            <a:srgbClr val="FFFFFF"/>
+                          </a:solidFill>
+                          <a:latin typeface="Calibri"/>
+                        </a:defRPr>
+                      </a:pPr>
+                      <a:r>
+                        <a:t>Notes</a:t>
+                      </a:r>
+                    </a:p>
+                  </a:txBody>
+                  <a:tcPr anchor="ctr">
+                    <a:solidFill>
+                      <a:srgbClr val="1B2A4A"/>
+                    </a:solidFill>
+                  </a:tcPr>
+                </a:tc>
+              </a:tr>
+              <a:tr h="432261">
+                <a:tc>
+                  <a:txBody>
+                    <a:bodyPr/>
+                    <a:lstStyle/>
+                    <a:p>
+                      <a:pPr algn="ctr">
+                        <a:defRPr sz="1200">
+                          <a:solidFill>
+                            <a:srgbClr val="202020"/>
+                          </a:solidFill>
+                          <a:latin typeface="Calibri"/>
+                        </a:defRPr>
+                      </a:pPr>
+                      <a:r>
+                        <a:t>TF-IDF + LR</a:t>
+                      </a:r>
+                    </a:p>
+                  </a:txBody>
+                  <a:tcPr anchor="ctr">
+                    <a:solidFill>
+                      <a:srgbClr val="FFFFFF"/>
+                    </a:solidFill>
+                  </a:tcPr>
+                </a:tc>
+                <a:tc>
+                  <a:txBody>
+                    <a:bodyPr/>
+                    <a:lstStyle/>
+                    <a:p>
+                      <a:pPr algn="ctr">
+                        <a:defRPr sz="1200">
+                          <a:solidFill>
+                            <a:srgbClr val="202020"/>
+                          </a:solidFill>
+                          <a:latin typeface="Calibri"/>
+                        </a:defRPr>
+                      </a:pPr>
+                      <a:r>
+                        <a:t>87.0%</a:t>
+                      </a:r>
+                    </a:p>
+                  </a:txBody>
+                  <a:tcPr anchor="ctr">
+                    <a:solidFill>
+                      <a:srgbClr val="FFFFFF"/>
+                    </a:solidFill>
+                  </a:tcPr>
+                </a:tc>
+                <a:tc>
+                  <a:txBody>
+                    <a:bodyPr/>
+                    <a:lstStyle/>
+                    <a:p>
+                      <a:pPr algn="ctr">
+                        <a:defRPr sz="1200">
+                          <a:solidFill>
+                            <a:srgbClr val="202020"/>
+                          </a:solidFill>
+                          <a:latin typeface="Calibri"/>
+                        </a:defRPr>
+                      </a:pPr>
+                      <a:r>
+                        <a:t>0.838</a:t>
+                      </a:r>
+                    </a:p>
+                  </a:txBody>
+                  <a:tcPr anchor="ctr">
+                    <a:solidFill>
+                      <a:srgbClr val="FFFFFF"/>
+                    </a:solidFill>
+                  </a:tcPr>
+                </a:tc>
+                <a:tc>
+                  <a:txBody>
+                    <a:bodyPr/>
+                    <a:lstStyle/>
+                    <a:p>
+                      <a:pPr algn="ctr">
+                        <a:defRPr sz="1200">
+                          <a:solidFill>
+                            <a:srgbClr val="202020"/>
+                          </a:solidFill>
+                          <a:latin typeface="Calibri"/>
+                        </a:defRPr>
+                      </a:pPr>
+                      <a:r>
+                        <a:t>60.1%</a:t>
+                      </a:r>
+                    </a:p>
+                  </a:txBody>
+                  <a:tcPr anchor="ctr">
+                    <a:solidFill>
+                      <a:srgbClr val="FFFFFF"/>
+                    </a:solidFill>
+                  </a:tcPr>
+                </a:tc>
+                <a:tc>
+                  <a:txBody>
+                    <a:bodyPr/>
+                    <a:lstStyle/>
+                    <a:p>
+                      <a:pPr algn="ctr">
+                        <a:defRPr sz="1200">
+                          <a:solidFill>
+                            <a:srgbClr val="202020"/>
+                          </a:solidFill>
+                          <a:latin typeface="Calibri"/>
+                        </a:defRPr>
+                      </a:pPr>
+                      <a:r>
+                        <a:t>0.561</a:t>
+                      </a:r>
+                    </a:p>
+                  </a:txBody>
+                  <a:tcPr anchor="ctr">
+                    <a:solidFill>
+                      <a:srgbClr val="FFFFFF"/>
+                    </a:solidFill>
+                  </a:tcPr>
+                </a:tc>
+                <a:tc>
+                  <a:txBody>
+                    <a:bodyPr/>
+                    <a:lstStyle/>
+                    <a:p>
+                      <a:pPr algn="ctr">
+                        <a:defRPr sz="1200">
+                          <a:solidFill>
+                            <a:srgbClr val="202020"/>
+                          </a:solidFill>
+                          <a:latin typeface="Calibri"/>
+                        </a:defRPr>
+                      </a:pPr>
+                      <a:r>
+                        <a:t>Baseline</a:t>
+                      </a:r>
+                    </a:p>
+                  </a:txBody>
+                  <a:tcPr anchor="ctr">
+                    <a:solidFill>
+                      <a:srgbClr val="FFFFFF"/>
+                    </a:solidFill>
+                  </a:tcPr>
+                </a:tc>
+              </a:tr>
+              <a:tr h="432261">
+                <a:tc>
+                  <a:txBody>
+                    <a:bodyPr/>
+                    <a:lstStyle/>
+                    <a:p>
+                      <a:pPr algn="ctr">
+                        <a:defRPr sz="1200">
+                          <a:solidFill>
+                            <a:srgbClr val="202020"/>
+                          </a:solidFill>
+                          <a:latin typeface="Calibri"/>
+                        </a:defRPr>
+                      </a:pPr>
+                      <a:r>
+                        <a:t>TF-IDF + SVM</a:t>
+                      </a:r>
+                    </a:p>
+                  </a:txBody>
+                  <a:tcPr anchor="ctr">
+                    <a:solidFill>
+                      <a:srgbClr val="F2F2F2"/>
+                    </a:solidFill>
+                  </a:tcPr>
+                </a:tc>
+                <a:tc>
+                  <a:txBody>
+                    <a:bodyPr/>
+                    <a:lstStyle/>
+                    <a:p>
+                      <a:pPr algn="ctr">
+                        <a:defRPr sz="1200">
+                          <a:solidFill>
+                            <a:srgbClr val="202020"/>
+                          </a:solidFill>
+                          <a:latin typeface="Calibri"/>
+                        </a:defRPr>
+                      </a:pPr>
+                      <a:r>
+                        <a:t>89.4%</a:t>
+                      </a:r>
+                    </a:p>
+                  </a:txBody>
+                  <a:tcPr anchor="ctr">
+                    <a:solidFill>
+                      <a:srgbClr val="F2F2F2"/>
+                    </a:solidFill>
+                  </a:tcPr>
+                </a:tc>
+                <a:tc>
+                  <a:txBody>
+                    <a:bodyPr/>
+                    <a:lstStyle/>
+                    <a:p>
+                      <a:pPr algn="ctr">
+                        <a:defRPr sz="1200">
+                          <a:solidFill>
+                            <a:srgbClr val="202020"/>
+                          </a:solidFill>
+                          <a:latin typeface="Calibri"/>
+                        </a:defRPr>
+                      </a:pPr>
+                      <a:r>
+                        <a:t>0.866</a:t>
+                      </a:r>
+                    </a:p>
+                  </a:txBody>
+                  <a:tcPr anchor="ctr">
+                    <a:solidFill>
+                      <a:srgbClr val="F2F2F2"/>
+                    </a:solidFill>
+                  </a:tcPr>
+                </a:tc>
+                <a:tc>
+                  <a:txBody>
+                    <a:bodyPr/>
+                    <a:lstStyle/>
+                    <a:p>
+                      <a:pPr algn="ctr">
+                        <a:defRPr sz="1200">
+                          <a:solidFill>
+                            <a:srgbClr val="202020"/>
+                          </a:solidFill>
+                          <a:latin typeface="Calibri"/>
+                        </a:defRPr>
+                      </a:pPr>
+                      <a:r>
+                        <a:t>63.3%</a:t>
+                      </a:r>
+                    </a:p>
+                  </a:txBody>
+                  <a:tcPr anchor="ctr">
+                    <a:solidFill>
+                      <a:srgbClr val="F2F2F2"/>
+                    </a:solidFill>
+                  </a:tcPr>
+                </a:tc>
+                <a:tc>
+                  <a:txBody>
+                    <a:bodyPr/>
+                    <a:lstStyle/>
+                    <a:p>
+                      <a:pPr algn="ctr">
+                        <a:defRPr sz="1200">
+                          <a:solidFill>
+                            <a:srgbClr val="202020"/>
+                          </a:solidFill>
+                          <a:latin typeface="Calibri"/>
+                        </a:defRPr>
+                      </a:pPr>
+                      <a:r>
+                        <a:t>0.583</a:t>
+                      </a:r>
+                    </a:p>
+                  </a:txBody>
+                  <a:tcPr anchor="ctr">
+                    <a:solidFill>
+                      <a:srgbClr val="F2F2F2"/>
+                    </a:solidFill>
+                  </a:tcPr>
+                </a:tc>
+                <a:tc>
+                  <a:txBody>
+                    <a:bodyPr/>
+                    <a:lstStyle/>
+                    <a:p>
+                      <a:pPr algn="ctr">
+                        <a:defRPr sz="1200">
+                          <a:solidFill>
+                            <a:srgbClr val="202020"/>
+                          </a:solidFill>
+                          <a:latin typeface="Calibri"/>
+                        </a:defRPr>
+                      </a:pPr>
+                      <a:r>
+                        <a:t>Best baseline</a:t>
+                      </a:r>
+                    </a:p>
+                  </a:txBody>
+                  <a:tcPr anchor="ctr">
+                    <a:solidFill>
+                      <a:srgbClr val="F2F2F2"/>
+                    </a:solidFill>
+                  </a:tcPr>
+                </a:tc>
+              </a:tr>
+              <a:tr h="432261">
+                <a:tc>
+                  <a:txBody>
+                    <a:bodyPr/>
+                    <a:lstStyle/>
+                    <a:p>
+                      <a:pPr algn="ctr">
+                        <a:defRPr sz="1200">
+                          <a:solidFill>
+                            <a:srgbClr val="202020"/>
+                          </a:solidFill>
+                          <a:latin typeface="Calibri"/>
+                        </a:defRPr>
+                      </a:pPr>
+                      <a:r>
+                        <a:t>LM Lexicon (rule)</a:t>
+                      </a:r>
+                    </a:p>
+                  </a:txBody>
+                  <a:tcPr anchor="ctr">
+                    <a:solidFill>
+                      <a:srgbClr val="FFFFFF"/>
+                    </a:solidFill>
+                  </a:tcPr>
+                </a:tc>
+                <a:tc>
+                  <a:txBody>
+                    <a:bodyPr/>
+                    <a:lstStyle/>
+                    <a:p>
+                      <a:pPr algn="ctr">
+                        <a:defRPr sz="1200">
+                          <a:solidFill>
+                            <a:srgbClr val="202020"/>
+                          </a:solidFill>
+                          <a:latin typeface="Calibri"/>
+                        </a:defRPr>
+                      </a:pPr>
+                      <a:r>
+                        <a:t>62.8%</a:t>
+                      </a:r>
+                    </a:p>
+                  </a:txBody>
+                  <a:tcPr anchor="ctr">
+                    <a:solidFill>
+                      <a:srgbClr val="FFFFFF"/>
+                    </a:solidFill>
+                  </a:tcPr>
+                </a:tc>
+                <a:tc>
+                  <a:txBody>
+                    <a:bodyPr/>
+                    <a:lstStyle/>
+                    <a:p>
+                      <a:pPr algn="ctr">
+                        <a:defRPr sz="1200">
+                          <a:solidFill>
+                            <a:srgbClr val="202020"/>
+                          </a:solidFill>
+                          <a:latin typeface="Calibri"/>
+                        </a:defRPr>
+                      </a:pPr>
+                      <a:r>
+                        <a:t>0.510</a:t>
+                      </a:r>
+                    </a:p>
+                  </a:txBody>
+                  <a:tcPr anchor="ctr">
+                    <a:solidFill>
+                      <a:srgbClr val="FFFFFF"/>
+                    </a:solidFill>
+                  </a:tcPr>
+                </a:tc>
+                <a:tc>
+                  <a:txBody>
+                    <a:bodyPr/>
+                    <a:lstStyle/>
+                    <a:p>
+                      <a:pPr algn="ctr">
+                        <a:defRPr sz="1200">
+                          <a:solidFill>
+                            <a:srgbClr val="202020"/>
+                          </a:solidFill>
+                          <a:latin typeface="Calibri"/>
+                        </a:defRPr>
+                      </a:pPr>
+                      <a:r>
+                        <a:t>45.2%</a:t>
+                      </a:r>
+                    </a:p>
+                  </a:txBody>
+                  <a:tcPr anchor="ctr">
+                    <a:solidFill>
+                      <a:srgbClr val="FFFFFF"/>
+                    </a:solidFill>
+                  </a:tcPr>
+                </a:tc>
+                <a:tc>
+                  <a:txBody>
+                    <a:bodyPr/>
+                    <a:lstStyle/>
+                    <a:p>
+                      <a:pPr algn="ctr">
+                        <a:defRPr sz="1200">
+                          <a:solidFill>
+                            <a:srgbClr val="202020"/>
+                          </a:solidFill>
+                          <a:latin typeface="Calibri"/>
+                        </a:defRPr>
+                      </a:pPr>
+                      <a:r>
+                        <a:t>0.388</a:t>
+                      </a:r>
+                    </a:p>
+                  </a:txBody>
+                  <a:tcPr anchor="ctr">
+                    <a:solidFill>
+                      <a:srgbClr val="FFFFFF"/>
+                    </a:solidFill>
+                  </a:tcPr>
+                </a:tc>
+                <a:tc>
+                  <a:txBody>
+                    <a:bodyPr/>
+                    <a:lstStyle/>
+                    <a:p>
+                      <a:pPr algn="ctr">
+                        <a:defRPr sz="1200">
+                          <a:solidFill>
+                            <a:srgbClr val="202020"/>
+                          </a:solidFill>
+                          <a:latin typeface="Calibri"/>
+                        </a:defRPr>
+                      </a:pPr>
+                      <a:r>
+                        <a:t>No context</a:t>
+                      </a:r>
+                    </a:p>
+                  </a:txBody>
+                  <a:tcPr anchor="ctr">
+                    <a:solidFill>
+                      <a:srgbClr val="FFFFFF"/>
+                    </a:solidFill>
+                  </a:tcPr>
+                </a:tc>
+              </a:tr>
+              <a:tr h="432261">
+                <a:tc>
+                  <a:txBody>
+                    <a:bodyPr/>
+                    <a:lstStyle/>
+                    <a:p>
+                      <a:pPr algn="ctr">
+                        <a:defRPr sz="1200">
+                          <a:solidFill>
+                            <a:srgbClr val="202020"/>
+                          </a:solidFill>
+                          <a:latin typeface="Calibri"/>
+                        </a:defRPr>
+                      </a:pPr>
+                      <a:r>
+                        <a:t>TF-IDF + LM + SVM</a:t>
+                      </a:r>
+                    </a:p>
+                  </a:txBody>
+                  <a:tcPr anchor="ctr">
+                    <a:solidFill>
+                      <a:srgbClr val="F2F2F2"/>
+                    </a:solidFill>
+                  </a:tcPr>
+                </a:tc>
+                <a:tc>
+                  <a:txBody>
+                    <a:bodyPr/>
+                    <a:lstStyle/>
+                    <a:p>
+                      <a:pPr algn="ctr">
+                        <a:defRPr sz="1200">
+                          <a:solidFill>
+                            <a:srgbClr val="202020"/>
+                          </a:solidFill>
+                          <a:latin typeface="Calibri"/>
+                        </a:defRPr>
+                      </a:pPr>
+                      <a:r>
+                        <a:t>89.6%</a:t>
+                      </a:r>
+                    </a:p>
+                  </a:txBody>
+                  <a:tcPr anchor="ctr">
+                    <a:solidFill>
+                      <a:srgbClr val="F2F2F2"/>
+                    </a:solidFill>
+                  </a:tcPr>
+                </a:tc>
+                <a:tc>
+                  <a:txBody>
+                    <a:bodyPr/>
+                    <a:lstStyle/>
+                    <a:p>
+                      <a:pPr algn="ctr">
+                        <a:defRPr sz="1200">
+                          <a:solidFill>
+                            <a:srgbClr val="202020"/>
+                          </a:solidFill>
+                          <a:latin typeface="Calibri"/>
+                        </a:defRPr>
+                      </a:pPr>
+                      <a:r>
+                        <a:t>0.869</a:t>
+                      </a:r>
+                    </a:p>
+                  </a:txBody>
+                  <a:tcPr anchor="ctr">
+                    <a:solidFill>
+                      <a:srgbClr val="F2F2F2"/>
+                    </a:solidFill>
+                  </a:tcPr>
+                </a:tc>
+                <a:tc>
+                  <a:txBody>
+                    <a:bodyPr/>
+                    <a:lstStyle/>
+                    <a:p>
+                      <a:pPr algn="ctr">
+                        <a:defRPr sz="1200">
+                          <a:solidFill>
+                            <a:srgbClr val="202020"/>
+                          </a:solidFill>
+                          <a:latin typeface="Calibri"/>
+                        </a:defRPr>
+                      </a:pPr>
+                      <a:r>
+                        <a:t>62.8%</a:t>
+                      </a:r>
+                    </a:p>
+                  </a:txBody>
+                  <a:tcPr anchor="ctr">
+                    <a:solidFill>
+                      <a:srgbClr val="F2F2F2"/>
+                    </a:solidFill>
+                  </a:tcPr>
+                </a:tc>
+                <a:tc>
+                  <a:txBody>
+                    <a:bodyPr/>
+                    <a:lstStyle/>
+                    <a:p>
+                      <a:pPr algn="ctr">
+                        <a:defRPr sz="1200">
+                          <a:solidFill>
+                            <a:srgbClr val="202020"/>
+                          </a:solidFill>
+                          <a:latin typeface="Calibri"/>
+                        </a:defRPr>
+                      </a:pPr>
+                      <a:r>
+                        <a:t>0.579</a:t>
+                      </a:r>
+                    </a:p>
+                  </a:txBody>
+                  <a:tcPr anchor="ctr">
+                    <a:solidFill>
+                      <a:srgbClr val="F2F2F2"/>
+                    </a:solidFill>
+                  </a:tcPr>
+                </a:tc>
+                <a:tc>
+                  <a:txBody>
+                    <a:bodyPr/>
+                    <a:lstStyle/>
+                    <a:p>
+                      <a:pPr algn="ctr">
+                        <a:defRPr sz="1200">
+                          <a:solidFill>
+                            <a:srgbClr val="202020"/>
+                          </a:solidFill>
+                          <a:latin typeface="Calibri"/>
+                        </a:defRPr>
+                      </a:pPr>
+                      <a:r>
+                        <a:t>Lexicon aug.</a:t>
+                      </a:r>
+                    </a:p>
+                  </a:txBody>
+                  <a:tcPr anchor="ctr">
+                    <a:solidFill>
+                      <a:srgbClr val="F2F2F2"/>
+                    </a:solidFill>
+                  </a:tcPr>
+                </a:tc>
+              </a:tr>
+              <a:tr h="432261">
+                <a:tc>
+                  <a:txBody>
+                    <a:bodyPr/>
+                    <a:lstStyle/>
+                    <a:p>
+                      <a:pPr algn="ctr">
+                        <a:defRPr sz="1200">
+                          <a:solidFill>
+                            <a:srgbClr val="202020"/>
+                          </a:solidFill>
+                          <a:latin typeface="Calibri"/>
+                        </a:defRPr>
+                      </a:pPr>
+                      <a:r>
+                        <a:t>FinBERT zero-shot</a:t>
+                      </a:r>
+                    </a:p>
+                  </a:txBody>
+                  <a:tcPr anchor="ctr">
+                    <a:solidFill>
+                      <a:srgbClr val="FFFFFF"/>
+                    </a:solidFill>
+                  </a:tcPr>
+                </a:tc>
+                <a:tc>
+                  <a:txBody>
+                    <a:bodyPr/>
+                    <a:lstStyle/>
+                    <a:p>
+                      <a:pPr algn="ctr">
+                        <a:defRPr sz="1200">
+                          <a:solidFill>
+                            <a:srgbClr val="202020"/>
+                          </a:solidFill>
+                          <a:latin typeface="Calibri"/>
+                        </a:defRPr>
+                      </a:pPr>
+                      <a:r>
+                        <a:t>97.35%</a:t>
+                      </a:r>
+                    </a:p>
+                  </a:txBody>
+                  <a:tcPr anchor="ctr">
+                    <a:solidFill>
+                      <a:srgbClr val="FFFFFF"/>
+                    </a:solidFill>
+                  </a:tcPr>
+                </a:tc>
+                <a:tc>
+                  <a:txBody>
+                    <a:bodyPr/>
+                    <a:lstStyle/>
+                    <a:p>
+                      <a:pPr algn="ctr">
+                        <a:defRPr sz="1200">
+                          <a:solidFill>
+                            <a:srgbClr val="202020"/>
+                          </a:solidFill>
+                          <a:latin typeface="Calibri"/>
+                        </a:defRPr>
+                      </a:pPr>
+                      <a:r>
+                        <a:t>0.958</a:t>
+                      </a:r>
+                    </a:p>
+                  </a:txBody>
+                  <a:tcPr anchor="ctr">
+                    <a:solidFill>
+                      <a:srgbClr val="FFFFFF"/>
+                    </a:solidFill>
+                  </a:tcPr>
+                </a:tc>
+                <a:tc>
+                  <a:txBody>
+                    <a:bodyPr/>
+                    <a:lstStyle/>
+                    <a:p>
+                      <a:pPr algn="ctr">
+                        <a:defRPr sz="1200">
+                          <a:solidFill>
+                            <a:srgbClr val="202020"/>
+                          </a:solidFill>
+                          <a:latin typeface="Calibri"/>
+                        </a:defRPr>
+                      </a:pPr>
+                      <a:r>
+                        <a:t>—</a:t>
+                      </a:r>
+                    </a:p>
+                  </a:txBody>
+                  <a:tcPr anchor="ctr">
+                    <a:solidFill>
+                      <a:srgbClr val="FFFFFF"/>
+                    </a:solidFill>
+                  </a:tcPr>
+                </a:tc>
+                <a:tc>
+                  <a:txBody>
+                    <a:bodyPr/>
+                    <a:lstStyle/>
+                    <a:p>
+                      <a:pPr algn="ctr">
+                        <a:defRPr sz="1200">
+                          <a:solidFill>
+                            <a:srgbClr val="202020"/>
+                          </a:solidFill>
+                          <a:latin typeface="Calibri"/>
+                        </a:defRPr>
+                      </a:pPr>
+                      <a:r>
+                        <a:t>—</a:t>
+                      </a:r>
+                    </a:p>
+                  </a:txBody>
+                  <a:tcPr anchor="ctr">
+                    <a:solidFill>
+                      <a:srgbClr val="FFFFFF"/>
+                    </a:solidFill>
+                  </a:tcPr>
+                </a:tc>
+                <a:tc>
+                  <a:txBody>
+                    <a:bodyPr/>
+                    <a:lstStyle/>
+                    <a:p>
+                      <a:pPr algn="ctr">
+                        <a:defRPr sz="1200">
+                          <a:solidFill>
+                            <a:srgbClr val="202020"/>
+                          </a:solidFill>
+                          <a:latin typeface="Calibri"/>
+                        </a:defRPr>
+                      </a:pPr>
+                      <a:r>
+                        <a:t>Native head</a:t>
+                      </a:r>
+                    </a:p>
+                  </a:txBody>
+                  <a:tcPr anchor="ctr">
+                    <a:solidFill>
+                      <a:srgbClr val="FFFFFF"/>
+                    </a:solidFill>
+                  </a:tcPr>
+                </a:tc>
+              </a:tr>
+              <a:tr h="432261">
+                <a:tc>
+                  <a:txBody>
+                    <a:bodyPr/>
+                    <a:lstStyle/>
+                    <a:p>
+                      <a:pPr algn="ctr">
+                        <a:defRPr sz="1200">
+                          <a:solidFill>
+                            <a:srgbClr val="202020"/>
+                          </a:solidFill>
+                          <a:latin typeface="Calibri"/>
+                        </a:defRPr>
+                      </a:pPr>
+                      <a:r>
+                        <a:t>FinBERT 16-shot</a:t>
+                      </a:r>
+                    </a:p>
+                  </a:txBody>
+                  <a:tcPr anchor="ctr">
+                    <a:solidFill>
+                      <a:srgbClr val="F2F2F2"/>
+                    </a:solidFill>
+                  </a:tcPr>
+                </a:tc>
+                <a:tc>
+                  <a:txBody>
+                    <a:bodyPr/>
+                    <a:lstStyle/>
+                    <a:p>
+                      <a:pPr algn="ctr">
+                        <a:defRPr sz="1200">
+                          <a:solidFill>
+                            <a:srgbClr val="202020"/>
+                          </a:solidFill>
+                          <a:latin typeface="Calibri"/>
+                        </a:defRPr>
+                      </a:pPr>
+                      <a:r>
+                        <a:t>97.70%</a:t>
+                      </a:r>
+                    </a:p>
+                  </a:txBody>
+                  <a:tcPr anchor="ctr">
+                    <a:solidFill>
+                      <a:srgbClr val="F2F2F2"/>
+                    </a:solidFill>
+                  </a:tcPr>
+                </a:tc>
+                <a:tc>
+                  <a:txBody>
+                    <a:bodyPr/>
+                    <a:lstStyle/>
+                    <a:p>
+                      <a:pPr algn="ctr">
+                        <a:defRPr sz="1200">
+                          <a:solidFill>
+                            <a:srgbClr val="202020"/>
+                          </a:solidFill>
+                          <a:latin typeface="Calibri"/>
+                        </a:defRPr>
+                      </a:pPr>
+                      <a:r>
+                        <a:t>0.963</a:t>
+                      </a:r>
+                    </a:p>
+                  </a:txBody>
+                  <a:tcPr anchor="ctr">
+                    <a:solidFill>
+                      <a:srgbClr val="F2F2F2"/>
+                    </a:solidFill>
+                  </a:tcPr>
+                </a:tc>
+                <a:tc>
+                  <a:txBody>
+                    <a:bodyPr/>
+                    <a:lstStyle/>
+                    <a:p>
+                      <a:pPr algn="ctr">
+                        <a:defRPr sz="1200">
+                          <a:solidFill>
+                            <a:srgbClr val="202020"/>
+                          </a:solidFill>
+                          <a:latin typeface="Calibri"/>
+                        </a:defRPr>
+                      </a:pPr>
+                      <a:r>
+                        <a:t>54.0%</a:t>
+                      </a:r>
+                    </a:p>
+                  </a:txBody>
+                  <a:tcPr anchor="ctr">
+                    <a:solidFill>
+                      <a:srgbClr val="F2F2F2"/>
+                    </a:solidFill>
+                  </a:tcPr>
+                </a:tc>
+                <a:tc>
+                  <a:txBody>
+                    <a:bodyPr/>
+                    <a:lstStyle/>
+                    <a:p>
+                      <a:pPr algn="ctr">
+                        <a:defRPr sz="1200">
+                          <a:solidFill>
+                            <a:srgbClr val="202020"/>
+                          </a:solidFill>
+                          <a:latin typeface="Calibri"/>
+                        </a:defRPr>
+                      </a:pPr>
+                      <a:r>
+                        <a:t>0.490</a:t>
+                      </a:r>
+                    </a:p>
+                  </a:txBody>
+                  <a:tcPr anchor="ctr">
+                    <a:solidFill>
+                      <a:srgbClr val="F2F2F2"/>
+                    </a:solidFill>
+                  </a:tcPr>
+                </a:tc>
+                <a:tc>
+                  <a:txBody>
+                    <a:bodyPr/>
+                    <a:lstStyle/>
+                    <a:p>
+                      <a:pPr algn="ctr">
+                        <a:defRPr sz="1200">
+                          <a:solidFill>
+                            <a:srgbClr val="202020"/>
+                          </a:solidFill>
+                          <a:latin typeface="Calibri"/>
+                        </a:defRPr>
+                      </a:pPr>
+                      <a:r>
+                        <a:t>SetFit</a:t>
+                      </a:r>
+                    </a:p>
+                  </a:txBody>
+                  <a:tcPr anchor="ctr">
+                    <a:solidFill>
+                      <a:srgbClr val="F2F2F2"/>
+                    </a:solidFill>
+                  </a:tcPr>
+                </a:tc>
+              </a:tr>
+              <a:tr h="432261">
+                <a:tc>
+                  <a:txBody>
+                    <a:bodyPr/>
+                    <a:lstStyle/>
+                    <a:p>
+                      <a:pPr algn="ctr">
+                        <a:defRPr sz="1200">
+                          <a:solidFill>
+                            <a:srgbClr val="202020"/>
+                          </a:solidFill>
+                          <a:latin typeface="Calibri"/>
+                        </a:defRPr>
+                      </a:pPr>
+                      <a:r>
+                        <a:t>BERT 16-shot</a:t>
+                      </a:r>
+                    </a:p>
+                  </a:txBody>
+                  <a:tcPr anchor="ctr">
+                    <a:solidFill>
+                      <a:srgbClr val="FFFFFF"/>
+                    </a:solidFill>
+                  </a:tcPr>
+                </a:tc>
+                <a:tc>
+                  <a:txBody>
+                    <a:bodyPr/>
+                    <a:lstStyle/>
+                    <a:p>
+                      <a:pPr algn="ctr">
+                        <a:defRPr sz="1200">
+                          <a:solidFill>
+                            <a:srgbClr val="202020"/>
+                          </a:solidFill>
+                          <a:latin typeface="Calibri"/>
+                        </a:defRPr>
+                      </a:pPr>
+                      <a:r>
+                        <a:t>74.20%</a:t>
+                      </a:r>
+                    </a:p>
+                  </a:txBody>
+                  <a:tcPr anchor="ctr">
+                    <a:solidFill>
+                      <a:srgbClr val="FFFFFF"/>
+                    </a:solidFill>
+                  </a:tcPr>
+                </a:tc>
+                <a:tc>
+                  <a:txBody>
+                    <a:bodyPr/>
+                    <a:lstStyle/>
+                    <a:p>
+                      <a:pPr algn="ctr">
+                        <a:defRPr sz="1200">
+                          <a:solidFill>
+                            <a:srgbClr val="202020"/>
+                          </a:solidFill>
+                          <a:latin typeface="Calibri"/>
+                        </a:defRPr>
+                      </a:pPr>
+                      <a:r>
+                        <a:t>0.668</a:t>
+                      </a:r>
+                    </a:p>
+                  </a:txBody>
+                  <a:tcPr anchor="ctr">
+                    <a:solidFill>
+                      <a:srgbClr val="FFFFFF"/>
+                    </a:solidFill>
+                  </a:tcPr>
+                </a:tc>
+                <a:tc>
+                  <a:txBody>
+                    <a:bodyPr/>
+                    <a:lstStyle/>
+                    <a:p>
+                      <a:pPr algn="ctr">
+                        <a:defRPr sz="1200">
+                          <a:solidFill>
+                            <a:srgbClr val="202020"/>
+                          </a:solidFill>
+                          <a:latin typeface="Calibri"/>
+                        </a:defRPr>
+                      </a:pPr>
+                      <a:r>
+                        <a:t>48.8%</a:t>
+                      </a:r>
+                    </a:p>
+                  </a:txBody>
+                  <a:tcPr anchor="ctr">
+                    <a:solidFill>
+                      <a:srgbClr val="FFFFFF"/>
+                    </a:solidFill>
+                  </a:tcPr>
+                </a:tc>
+                <a:tc>
+                  <a:txBody>
+                    <a:bodyPr/>
+                    <a:lstStyle/>
+                    <a:p>
+                      <a:pPr algn="ctr">
+                        <a:defRPr sz="1200">
+                          <a:solidFill>
+                            <a:srgbClr val="202020"/>
+                          </a:solidFill>
+                          <a:latin typeface="Calibri"/>
+                        </a:defRPr>
+                      </a:pPr>
+                      <a:r>
+                        <a:t>0.433</a:t>
+                      </a:r>
+                    </a:p>
+                  </a:txBody>
+                  <a:tcPr anchor="ctr">
+                    <a:solidFill>
+                      <a:srgbClr val="FFFFFF"/>
+                    </a:solidFill>
+                  </a:tcPr>
+                </a:tc>
+                <a:tc>
+                  <a:txBody>
+                    <a:bodyPr/>
+                    <a:lstStyle/>
+                    <a:p>
+                      <a:pPr algn="ctr">
+                        <a:defRPr sz="1200">
+                          <a:solidFill>
+                            <a:srgbClr val="202020"/>
+                          </a:solidFill>
+                          <a:latin typeface="Calibri"/>
+                        </a:defRPr>
+                      </a:pPr>
+                      <a:r>
+                        <a:t>SetFit</a:t>
+                      </a:r>
+                    </a:p>
+                  </a:txBody>
+                  <a:tcPr anchor="ctr">
+                    <a:solidFill>
+                      <a:srgbClr val="FFFFFF"/>
+                    </a:solidFill>
+                  </a:tcPr>
+                </a:tc>
+              </a:tr>
+              <a:tr h="432261">
+                <a:tc>
+                  <a:txBody>
+                    <a:bodyPr/>
+                    <a:lstStyle/>
+                    <a:p>
+                      <a:pPr algn="ctr">
+                        <a:defRPr sz="1200">
+                          <a:solidFill>
+                            <a:srgbClr val="202020"/>
+                          </a:solidFill>
+                          <a:latin typeface="Calibri"/>
+                        </a:defRPr>
+                      </a:pPr>
+                      <a:r>
+                        <a:t>FinBERT fine-tuned</a:t>
+                      </a:r>
+                    </a:p>
+                  </a:txBody>
+                  <a:tcPr anchor="ctr">
+                    <a:solidFill>
+                      <a:srgbClr val="F2F2F2"/>
+                    </a:solidFill>
+                  </a:tcPr>
+                </a:tc>
+                <a:tc>
+                  <a:txBody>
+                    <a:bodyPr/>
+                    <a:lstStyle/>
+                    <a:p>
+                      <a:pPr algn="ctr">
+                        <a:defRPr sz="1200">
+                          <a:solidFill>
+                            <a:srgbClr val="202020"/>
+                          </a:solidFill>
+                          <a:latin typeface="Calibri"/>
+                        </a:defRPr>
+                      </a:pPr>
+                      <a:r>
+                        <a:t>96.7%</a:t>
+                      </a:r>
+                    </a:p>
+                  </a:txBody>
+                  <a:tcPr anchor="ctr">
+                    <a:solidFill>
+                      <a:srgbClr val="F2F2F2"/>
+                    </a:solidFill>
+                  </a:tcPr>
+                </a:tc>
+                <a:tc>
+                  <a:txBody>
+                    <a:bodyPr/>
+                    <a:lstStyle/>
+                    <a:p>
+                      <a:pPr algn="ctr">
+                        <a:defRPr sz="1200">
+                          <a:solidFill>
+                            <a:srgbClr val="202020"/>
+                          </a:solidFill>
+                          <a:latin typeface="Calibri"/>
+                        </a:defRPr>
+                      </a:pPr>
+                      <a:r>
+                        <a:t>0.952</a:t>
+                      </a:r>
+                    </a:p>
+                  </a:txBody>
+                  <a:tcPr anchor="ctr">
+                    <a:solidFill>
+                      <a:srgbClr val="F2F2F2"/>
+                    </a:solidFill>
+                  </a:tcPr>
+                </a:tc>
+                <a:tc>
+                  <a:txBody>
+                    <a:bodyPr/>
+                    <a:lstStyle/>
+                    <a:p>
+                      <a:pPr algn="ctr">
+                        <a:defRPr sz="1200">
+                          <a:solidFill>
+                            <a:srgbClr val="202020"/>
+                          </a:solidFill>
+                          <a:latin typeface="Calibri"/>
+                        </a:defRPr>
+                      </a:pPr>
+                      <a:r>
+                        <a:t>64.3%</a:t>
+                      </a:r>
+                    </a:p>
+                  </a:txBody>
+                  <a:tcPr anchor="ctr">
+                    <a:solidFill>
+                      <a:srgbClr val="F2F2F2"/>
+                    </a:solidFill>
+                  </a:tcPr>
+                </a:tc>
+                <a:tc>
+                  <a:txBody>
+                    <a:bodyPr/>
+                    <a:lstStyle/>
+                    <a:p>
+                      <a:pPr algn="ctr">
+                        <a:defRPr sz="1200">
+                          <a:solidFill>
+                            <a:srgbClr val="202020"/>
+                          </a:solidFill>
+                          <a:latin typeface="Calibri"/>
+                        </a:defRPr>
+                      </a:pPr>
+                      <a:r>
+                        <a:t>0.626</a:t>
+                      </a:r>
+                    </a:p>
+                  </a:txBody>
+                  <a:tcPr anchor="ctr">
+                    <a:solidFill>
+                      <a:srgbClr val="F2F2F2"/>
+                    </a:solidFill>
+                  </a:tcPr>
+                </a:tc>
+                <a:tc>
+                  <a:txBody>
+                    <a:bodyPr/>
+                    <a:lstStyle/>
+                    <a:p>
+                      <a:pPr algn="ctr">
+                        <a:defRPr sz="1200">
+                          <a:solidFill>
+                            <a:srgbClr val="202020"/>
+                          </a:solidFill>
+                          <a:latin typeface="Calibri"/>
+                        </a:defRPr>
+                      </a:pPr>
+                      <a:r>
+                        <a:t>Single-task</a:t>
+                      </a:r>
+                    </a:p>
+                  </a:txBody>
+                  <a:tcPr anchor="ctr">
+                    <a:solidFill>
+                      <a:srgbClr val="F2F2F2"/>
+                    </a:solidFill>
+                  </a:tcPr>
+                </a:tc>
+              </a:tr>
+              <a:tr h="432261">
+                <a:tc>
+                  <a:txBody>
+                    <a:bodyPr/>
+                    <a:lstStyle/>
+                    <a:p>
+                      <a:pPr algn="ctr">
+                        <a:defRPr sz="1200">
+                          <a:solidFill>
+                            <a:srgbClr val="202020"/>
+                          </a:solidFill>
+                          <a:latin typeface="Calibri"/>
+                        </a:defRPr>
+                      </a:pPr>
+                      <a:r>
+                        <a:t>BERT + LLRD</a:t>
+                      </a:r>
+                    </a:p>
+                  </a:txBody>
+                  <a:tcPr anchor="ctr">
+                    <a:solidFill>
+                      <a:srgbClr val="FFFFFF"/>
+                    </a:solidFill>
+                  </a:tcPr>
+                </a:tc>
+                <a:tc>
+                  <a:txBody>
+                    <a:bodyPr/>
+                    <a:lstStyle/>
+                    <a:p>
+                      <a:pPr algn="ctr">
+                        <a:defRPr sz="1200">
+                          <a:solidFill>
+                            <a:srgbClr val="202020"/>
+                          </a:solidFill>
+                          <a:latin typeface="Calibri"/>
+                        </a:defRPr>
+                      </a:pPr>
+                      <a:r>
+                        <a:t>96.5%</a:t>
+                      </a:r>
+                    </a:p>
+                  </a:txBody>
+                  <a:tcPr anchor="ctr">
+                    <a:solidFill>
+                      <a:srgbClr val="FFFFFF"/>
+                    </a:solidFill>
+                  </a:tcPr>
+                </a:tc>
+                <a:tc>
+                  <a:txBody>
+                    <a:bodyPr/>
+                    <a:lstStyle/>
+                    <a:p>
+                      <a:pPr algn="ctr">
+                        <a:defRPr sz="1200">
+                          <a:solidFill>
+                            <a:srgbClr val="202020"/>
+                          </a:solidFill>
+                          <a:latin typeface="Calibri"/>
+                        </a:defRPr>
+                      </a:pPr>
+                      <a:r>
+                        <a:t>0.948</a:t>
+                      </a:r>
+                    </a:p>
+                  </a:txBody>
+                  <a:tcPr anchor="ctr">
+                    <a:solidFill>
+                      <a:srgbClr val="FFFFFF"/>
+                    </a:solidFill>
+                  </a:tcPr>
+                </a:tc>
+                <a:tc>
+                  <a:txBody>
+                    <a:bodyPr/>
+                    <a:lstStyle/>
+                    <a:p>
+                      <a:pPr algn="ctr">
+                        <a:defRPr sz="1200">
+                          <a:solidFill>
+                            <a:srgbClr val="202020"/>
+                          </a:solidFill>
+                          <a:latin typeface="Calibri"/>
+                        </a:defRPr>
+                      </a:pPr>
+                      <a:r>
+                        <a:t>63.7%</a:t>
+                      </a:r>
+                    </a:p>
+                  </a:txBody>
+                  <a:tcPr anchor="ctr">
+                    <a:solidFill>
+                      <a:srgbClr val="FFFFFF"/>
+                    </a:solidFill>
+                  </a:tcPr>
+                </a:tc>
+                <a:tc>
+                  <a:txBody>
+                    <a:bodyPr/>
+                    <a:lstStyle/>
+                    <a:p>
+                      <a:pPr algn="ctr">
+                        <a:defRPr sz="1200">
+                          <a:solidFill>
+                            <a:srgbClr val="202020"/>
+                          </a:solidFill>
+                          <a:latin typeface="Calibri"/>
+                        </a:defRPr>
+                      </a:pPr>
+                      <a:r>
+                        <a:t>0.618</a:t>
+                      </a:r>
+                    </a:p>
+                  </a:txBody>
+                  <a:tcPr anchor="ctr">
+                    <a:solidFill>
+                      <a:srgbClr val="FFFFFF"/>
+                    </a:solidFill>
+                  </a:tcPr>
+                </a:tc>
+                <a:tc>
+                  <a:txBody>
+                    <a:bodyPr/>
+                    <a:lstStyle/>
+                    <a:p>
+                      <a:pPr algn="ctr">
+                        <a:defRPr sz="1200">
+                          <a:solidFill>
+                            <a:srgbClr val="202020"/>
+                          </a:solidFill>
+                          <a:latin typeface="Calibri"/>
+                        </a:defRPr>
+                      </a:pPr>
+                      <a:r>
+                        <a:t>Single-task</a:t>
+                      </a:r>
+                    </a:p>
+                  </a:txBody>
+                  <a:tcPr anchor="ctr">
+                    <a:solidFill>
+                      <a:srgbClr val="FFFFFF"/>
+                    </a:solidFill>
+                  </a:tcPr>
+                </a:tc>
+              </a:tr>
+              <a:tr h="432270">
+                <a:tc>
+                  <a:txBody>
+                    <a:bodyPr/>
+                    <a:lstStyle/>
+                    <a:p>
+                      <a:pPr algn="ctr">
+                        <a:defRPr sz="1200" b="1">
+                          <a:solidFill>
+                            <a:srgbClr val="155724"/>
+                          </a:solidFill>
+                          <a:latin typeface="Calibri"/>
+                        </a:defRPr>
+                      </a:pPr>
+                      <a:r>
                         <a:t>Multi-task FinBERT</a:t>
                       </a:r>
                     </a:p>
                   </a:txBody>
                   <a:tcPr anchor="ctr">
                     <a:solidFill>
-                      <a:srgbClr val="1B2A4A"/>
+                      <a:srgbClr val="D4EDDA"/>
                     </a:solidFill>
                   </a:tcPr>
                 </a:tc>
@@ -4755,509 +6067,115 @@
                       <a:pPr algn="ctr">
                         <a:defRPr sz="1200" b="1">
                           <a:solidFill>
-                            <a:srgbClr val="FFFFFF"/>
-                          </a:solidFill>
-                          <a:latin typeface="Calibri"/>
-                        </a:defRPr>
-                      </a:pPr>
-                      <a:r>
-                        <a:t>Change</a:t>
-                      </a:r>
-                    </a:p>
-                  </a:txBody>
-                  <a:tcPr anchor="ctr">
-                    <a:solidFill>
-                      <a:srgbClr val="1B2A4A"/>
-                    </a:solidFill>
-                  </a:tcPr>
-                </a:tc>
-              </a:tr>
-              <a:tr h="335280">
-                <a:tc>
-                  <a:txBody>
-                    <a:bodyPr/>
-                    <a:lstStyle/>
-                    <a:p>
-                      <a:pPr algn="ctr">
-                        <a:defRPr sz="1200">
-                          <a:solidFill>
-                            <a:srgbClr val="202020"/>
-                          </a:solidFill>
-                          <a:latin typeface="Calibri"/>
-                        </a:defRPr>
-                      </a:pPr>
-                      <a:r>
-                        <a:t>Neutral→Hawkish (stance)</a:t>
-                      </a:r>
-                    </a:p>
-                  </a:txBody>
-                  <a:tcPr anchor="ctr">
-                    <a:solidFill>
-                      <a:srgbClr val="FFFFFF"/>
-                    </a:solidFill>
-                  </a:tcPr>
-                </a:tc>
-                <a:tc>
-                  <a:txBody>
-                    <a:bodyPr/>
-                    <a:lstStyle/>
-                    <a:p>
-                      <a:pPr algn="ctr">
-                        <a:defRPr sz="1200">
-                          <a:solidFill>
-                            <a:srgbClr val="202020"/>
-                          </a:solidFill>
-                          <a:latin typeface="Calibri"/>
-                        </a:defRPr>
-                      </a:pPr>
-                      <a:r>
-                        <a:t>18.2%</a:t>
-                      </a:r>
-                    </a:p>
-                  </a:txBody>
-                  <a:tcPr anchor="ctr">
-                    <a:solidFill>
-                      <a:srgbClr val="FFFFFF"/>
-                    </a:solidFill>
-                  </a:tcPr>
-                </a:tc>
-                <a:tc>
-                  <a:txBody>
-                    <a:bodyPr/>
-                    <a:lstStyle/>
-                    <a:p>
-                      <a:pPr algn="ctr">
-                        <a:defRPr sz="1200">
-                          <a:solidFill>
-                            <a:srgbClr val="202020"/>
-                          </a:solidFill>
-                          <a:latin typeface="Calibri"/>
-                        </a:defRPr>
-                      </a:pPr>
-                      <a:r>
-                        <a:t>15.4%</a:t>
-                      </a:r>
-                    </a:p>
-                  </a:txBody>
-                  <a:tcPr anchor="ctr">
-                    <a:solidFill>
-                      <a:srgbClr val="FFFFFF"/>
-                    </a:solidFill>
-                  </a:tcPr>
-                </a:tc>
-                <a:tc>
-                  <a:txBody>
-                    <a:bodyPr/>
-                    <a:lstStyle/>
-                    <a:p>
-                      <a:pPr algn="ctr">
-                        <a:defRPr sz="1200">
-                          <a:solidFill>
-                            <a:srgbClr val="202020"/>
-                          </a:solidFill>
-                          <a:latin typeface="Calibri"/>
-                        </a:defRPr>
-                      </a:pPr>
-                      <a:r>
-                        <a:t>−2.8 pp</a:t>
-                      </a:r>
-                    </a:p>
-                  </a:txBody>
-                  <a:tcPr anchor="ctr">
-                    <a:solidFill>
-                      <a:srgbClr val="FFFFFF"/>
-                    </a:solidFill>
-                  </a:tcPr>
-                </a:tc>
-              </a:tr>
-              <a:tr h="335280">
-                <a:tc>
-                  <a:txBody>
-                    <a:bodyPr/>
-                    <a:lstStyle/>
-                    <a:p>
-                      <a:pPr algn="ctr">
-                        <a:defRPr sz="1200">
-                          <a:solidFill>
-                            <a:srgbClr val="202020"/>
-                          </a:solidFill>
-                          <a:latin typeface="Calibri"/>
-                        </a:defRPr>
-                      </a:pPr>
-                      <a:r>
-                        <a:t>Hawkish→Neutral (stance)</a:t>
-                      </a:r>
-                    </a:p>
-                  </a:txBody>
-                  <a:tcPr anchor="ctr">
-                    <a:solidFill>
-                      <a:srgbClr val="F2F2F2"/>
-                    </a:solidFill>
-                  </a:tcPr>
-                </a:tc>
-                <a:tc>
-                  <a:txBody>
-                    <a:bodyPr/>
-                    <a:lstStyle/>
-                    <a:p>
-                      <a:pPr algn="ctr">
-                        <a:defRPr sz="1200">
-                          <a:solidFill>
-                            <a:srgbClr val="202020"/>
-                          </a:solidFill>
-                          <a:latin typeface="Calibri"/>
-                        </a:defRPr>
-                      </a:pPr>
-                      <a:r>
-                        <a:t>14.6%</a:t>
-                      </a:r>
-                    </a:p>
-                  </a:txBody>
-                  <a:tcPr anchor="ctr">
-                    <a:solidFill>
-                      <a:srgbClr val="F2F2F2"/>
-                    </a:solidFill>
-                  </a:tcPr>
-                </a:tc>
-                <a:tc>
-                  <a:txBody>
-                    <a:bodyPr/>
-                    <a:lstStyle/>
-                    <a:p>
-                      <a:pPr algn="ctr">
-                        <a:defRPr sz="1200">
-                          <a:solidFill>
-                            <a:srgbClr val="202020"/>
-                          </a:solidFill>
-                          <a:latin typeface="Calibri"/>
-                        </a:defRPr>
-                      </a:pPr>
-                      <a:r>
-                        <a:t>13.1%</a:t>
-                      </a:r>
-                    </a:p>
-                  </a:txBody>
-                  <a:tcPr anchor="ctr">
-                    <a:solidFill>
-                      <a:srgbClr val="F2F2F2"/>
-                    </a:solidFill>
-                  </a:tcPr>
-                </a:tc>
-                <a:tc>
-                  <a:txBody>
-                    <a:bodyPr/>
-                    <a:lstStyle/>
-                    <a:p>
-                      <a:pPr algn="ctr">
-                        <a:defRPr sz="1200">
-                          <a:solidFill>
-                            <a:srgbClr val="202020"/>
-                          </a:solidFill>
-                          <a:latin typeface="Calibri"/>
-                        </a:defRPr>
-                      </a:pPr>
-                      <a:r>
-                        <a:t>−1.5 pp</a:t>
-                      </a:r>
-                    </a:p>
-                  </a:txBody>
-                  <a:tcPr anchor="ctr">
-                    <a:solidFill>
-                      <a:srgbClr val="F2F2F2"/>
-                    </a:solidFill>
-                  </a:tcPr>
-                </a:tc>
-              </a:tr>
-              <a:tr h="335280">
-                <a:tc>
-                  <a:txBody>
-                    <a:bodyPr/>
-                    <a:lstStyle/>
-                    <a:p>
-                      <a:pPr algn="ctr">
-                        <a:defRPr sz="1200">
-                          <a:solidFill>
-                            <a:srgbClr val="202020"/>
-                          </a:solidFill>
-                          <a:latin typeface="Calibri"/>
-                        </a:defRPr>
-                      </a:pPr>
-                      <a:r>
-                        <a:t>Neutral→Negative (sent.)</a:t>
-                      </a:r>
-                    </a:p>
-                  </a:txBody>
-                  <a:tcPr anchor="ctr">
-                    <a:solidFill>
-                      <a:srgbClr val="FFFFFF"/>
-                    </a:solidFill>
-                  </a:tcPr>
-                </a:tc>
-                <a:tc>
-                  <a:txBody>
-                    <a:bodyPr/>
-                    <a:lstStyle/>
-                    <a:p>
-                      <a:pPr algn="ctr">
-                        <a:defRPr sz="1200">
-                          <a:solidFill>
-                            <a:srgbClr val="202020"/>
-                          </a:solidFill>
-                          <a:latin typeface="Calibri"/>
-                        </a:defRPr>
-                      </a:pPr>
-                      <a:r>
-                        <a:t>2.1%</a:t>
-                      </a:r>
-                    </a:p>
-                  </a:txBody>
-                  <a:tcPr anchor="ctr">
-                    <a:solidFill>
-                      <a:srgbClr val="FFFFFF"/>
-                    </a:solidFill>
-                  </a:tcPr>
-                </a:tc>
-                <a:tc>
-                  <a:txBody>
-                    <a:bodyPr/>
-                    <a:lstStyle/>
-                    <a:p>
-                      <a:pPr algn="ctr">
-                        <a:defRPr sz="1200">
-                          <a:solidFill>
-                            <a:srgbClr val="202020"/>
-                          </a:solidFill>
-                          <a:latin typeface="Calibri"/>
-                        </a:defRPr>
-                      </a:pPr>
-                      <a:r>
-                        <a:t>1.4%</a:t>
-                      </a:r>
-                    </a:p>
-                  </a:txBody>
-                  <a:tcPr anchor="ctr">
-                    <a:solidFill>
-                      <a:srgbClr val="FFFFFF"/>
-                    </a:solidFill>
-                  </a:tcPr>
-                </a:tc>
-                <a:tc>
-                  <a:txBody>
-                    <a:bodyPr/>
-                    <a:lstStyle/>
-                    <a:p>
-                      <a:pPr algn="ctr">
-                        <a:defRPr sz="1200">
-                          <a:solidFill>
-                            <a:srgbClr val="202020"/>
-                          </a:solidFill>
-                          <a:latin typeface="Calibri"/>
-                        </a:defRPr>
-                      </a:pPr>
-                      <a:r>
-                        <a:t>−0.7 pp</a:t>
-                      </a:r>
-                    </a:p>
-                  </a:txBody>
-                  <a:tcPr anchor="ctr">
-                    <a:solidFill>
-                      <a:srgbClr val="FFFFFF"/>
-                    </a:solidFill>
-                  </a:tcPr>
-                </a:tc>
-              </a:tr>
-              <a:tr h="335280">
-                <a:tc>
-                  <a:txBody>
-                    <a:bodyPr/>
-                    <a:lstStyle/>
-                    <a:p>
-                      <a:pPr algn="ctr">
-                        <a:defRPr sz="1200">
-                          <a:solidFill>
-                            <a:srgbClr val="202020"/>
-                          </a:solidFill>
-                          <a:latin typeface="Calibri"/>
-                        </a:defRPr>
-                      </a:pPr>
-                      <a:r>
-                        <a:t>Overall error rate (sent.)</a:t>
-                      </a:r>
-                    </a:p>
-                  </a:txBody>
-                  <a:tcPr anchor="ctr">
-                    <a:solidFill>
-                      <a:srgbClr val="F2F2F2"/>
-                    </a:solidFill>
-                  </a:tcPr>
-                </a:tc>
-                <a:tc>
-                  <a:txBody>
-                    <a:bodyPr/>
-                    <a:lstStyle/>
-                    <a:p>
-                      <a:pPr algn="ctr">
-                        <a:defRPr sz="1200">
-                          <a:solidFill>
-                            <a:srgbClr val="202020"/>
-                          </a:solidFill>
-                          <a:latin typeface="Calibri"/>
-                        </a:defRPr>
-                      </a:pPr>
-                      <a:r>
-                        <a:t>3.3%</a:t>
-                      </a:r>
-                    </a:p>
-                  </a:txBody>
-                  <a:tcPr anchor="ctr">
-                    <a:solidFill>
-                      <a:srgbClr val="F2F2F2"/>
-                    </a:solidFill>
-                  </a:tcPr>
-                </a:tc>
-                <a:tc>
-                  <a:txBody>
-                    <a:bodyPr/>
-                    <a:lstStyle/>
-                    <a:p>
-                      <a:pPr algn="ctr">
-                        <a:defRPr sz="1200">
-                          <a:solidFill>
-                            <a:srgbClr val="202020"/>
-                          </a:solidFill>
-                          <a:latin typeface="Calibri"/>
-                        </a:defRPr>
-                      </a:pPr>
-                      <a:r>
-                        <a:t>1.99%</a:t>
-                      </a:r>
-                    </a:p>
-                  </a:txBody>
-                  <a:tcPr anchor="ctr">
-                    <a:solidFill>
-                      <a:srgbClr val="F2F2F2"/>
-                    </a:solidFill>
-                  </a:tcPr>
-                </a:tc>
-                <a:tc>
-                  <a:txBody>
-                    <a:bodyPr/>
-                    <a:lstStyle/>
-                    <a:p>
-                      <a:pPr algn="ctr">
-                        <a:defRPr sz="1200">
-                          <a:solidFill>
-                            <a:srgbClr val="202020"/>
-                          </a:solidFill>
-                          <a:latin typeface="Calibri"/>
-                        </a:defRPr>
-                      </a:pPr>
-                      <a:r>
-                        <a:t>−1.3 pp</a:t>
-                      </a:r>
-                    </a:p>
-                  </a:txBody>
-                  <a:tcPr anchor="ctr">
-                    <a:solidFill>
-                      <a:srgbClr val="F2F2F2"/>
-                    </a:solidFill>
-                  </a:tcPr>
-                </a:tc>
-              </a:tr>
-              <a:tr h="335280">
-                <a:tc>
-                  <a:txBody>
-                    <a:bodyPr/>
-                    <a:lstStyle/>
-                    <a:p>
-                      <a:pPr algn="ctr">
-                        <a:defRPr sz="1200">
-                          <a:solidFill>
-                            <a:srgbClr val="202020"/>
-                          </a:solidFill>
-                          <a:latin typeface="Calibri"/>
-                        </a:defRPr>
-                      </a:pPr>
-                      <a:r>
-                        <a:t>Overall error rate (stance)</a:t>
-                      </a:r>
-                    </a:p>
-                  </a:txBody>
-                  <a:tcPr anchor="ctr">
-                    <a:solidFill>
-                      <a:srgbClr val="FFFFFF"/>
-                    </a:solidFill>
-                  </a:tcPr>
-                </a:tc>
-                <a:tc>
-                  <a:txBody>
-                    <a:bodyPr/>
-                    <a:lstStyle/>
-                    <a:p>
-                      <a:pPr algn="ctr">
-                        <a:defRPr sz="1200">
-                          <a:solidFill>
-                            <a:srgbClr val="202020"/>
-                          </a:solidFill>
-                          <a:latin typeface="Calibri"/>
-                        </a:defRPr>
-                      </a:pPr>
-                      <a:r>
-                        <a:t>35.7%</a:t>
-                      </a:r>
-                    </a:p>
-                  </a:txBody>
-                  <a:tcPr anchor="ctr">
-                    <a:solidFill>
-                      <a:srgbClr val="FFFFFF"/>
-                    </a:solidFill>
-                  </a:tcPr>
-                </a:tc>
-                <a:tc>
-                  <a:txBody>
-                    <a:bodyPr/>
-                    <a:lstStyle/>
-                    <a:p>
-                      <a:pPr algn="ctr">
-                        <a:defRPr sz="1200">
-                          <a:solidFill>
-                            <a:srgbClr val="202020"/>
-                          </a:solidFill>
-                          <a:latin typeface="Calibri"/>
-                        </a:defRPr>
-                      </a:pPr>
-                      <a:r>
-                        <a:t>34.07%</a:t>
-                      </a:r>
-                    </a:p>
-                  </a:txBody>
-                  <a:tcPr anchor="ctr">
-                    <a:solidFill>
-                      <a:srgbClr val="FFFFFF"/>
-                    </a:solidFill>
-                  </a:tcPr>
-                </a:tc>
-                <a:tc>
-                  <a:txBody>
-                    <a:bodyPr/>
-                    <a:lstStyle/>
-                    <a:p>
-                      <a:pPr algn="ctr">
-                        <a:defRPr sz="1200">
-                          <a:solidFill>
-                            <a:srgbClr val="202020"/>
-                          </a:solidFill>
-                          <a:latin typeface="Calibri"/>
-                        </a:defRPr>
-                      </a:pPr>
-                      <a:r>
-                        <a:t>−1.6 pp</a:t>
-                      </a:r>
-                    </a:p>
-                  </a:txBody>
-                  <a:tcPr anchor="ctr">
-                    <a:solidFill>
-                      <a:srgbClr val="FFFFFF"/>
+                            <a:srgbClr val="155724"/>
+                          </a:solidFill>
+                          <a:latin typeface="Calibri"/>
+                        </a:defRPr>
+                      </a:pPr>
+                      <a:r>
+                        <a:t>98.45%</a:t>
+                      </a:r>
+                    </a:p>
+                  </a:txBody>
+                  <a:tcPr anchor="ctr">
+                    <a:solidFill>
+                      <a:srgbClr val="D4EDDA"/>
+                    </a:solidFill>
+                  </a:tcPr>
+                </a:tc>
+                <a:tc>
+                  <a:txBody>
+                    <a:bodyPr/>
+                    <a:lstStyle/>
+                    <a:p>
+                      <a:pPr algn="ctr">
+                        <a:defRPr sz="1200" b="1">
+                          <a:solidFill>
+                            <a:srgbClr val="155724"/>
+                          </a:solidFill>
+                          <a:latin typeface="Calibri"/>
+                        </a:defRPr>
+                      </a:pPr>
+                      <a:r>
+                        <a:t>0.977</a:t>
+                      </a:r>
+                    </a:p>
+                  </a:txBody>
+                  <a:tcPr anchor="ctr">
+                    <a:solidFill>
+                      <a:srgbClr val="D4EDDA"/>
+                    </a:solidFill>
+                  </a:tcPr>
+                </a:tc>
+                <a:tc>
+                  <a:txBody>
+                    <a:bodyPr/>
+                    <a:lstStyle/>
+                    <a:p>
+                      <a:pPr algn="ctr">
+                        <a:defRPr sz="1200" b="1">
+                          <a:solidFill>
+                            <a:srgbClr val="155724"/>
+                          </a:solidFill>
+                          <a:latin typeface="Calibri"/>
+                        </a:defRPr>
+                      </a:pPr>
+                      <a:r>
+                        <a:t>67.74%</a:t>
+                      </a:r>
+                    </a:p>
+                  </a:txBody>
+                  <a:tcPr anchor="ctr">
+                    <a:solidFill>
+                      <a:srgbClr val="D4EDDA"/>
+                    </a:solidFill>
+                  </a:tcPr>
+                </a:tc>
+                <a:tc>
+                  <a:txBody>
+                    <a:bodyPr/>
+                    <a:lstStyle/>
+                    <a:p>
+                      <a:pPr algn="ctr">
+                        <a:defRPr sz="1200" b="1">
+                          <a:solidFill>
+                            <a:srgbClr val="155724"/>
+                          </a:solidFill>
+                          <a:latin typeface="Calibri"/>
+                        </a:defRPr>
+                      </a:pPr>
+                      <a:r>
+                        <a:t>0.668</a:t>
+                      </a:r>
+                    </a:p>
+                  </a:txBody>
+                  <a:tcPr anchor="ctr">
+                    <a:solidFill>
+                      <a:srgbClr val="D4EDDA"/>
+                    </a:solidFill>
+                  </a:tcPr>
+                </a:tc>
+                <a:tc>
+                  <a:txBody>
+                    <a:bodyPr/>
+                    <a:lstStyle/>
+                    <a:p>
+                      <a:pPr algn="ctr">
+                        <a:defRPr sz="1200" b="1">
+                          <a:solidFill>
+                            <a:srgbClr val="155724"/>
+                          </a:solidFill>
+                          <a:latin typeface="Calibri"/>
+                        </a:defRPr>
+                      </a:pPr>
+                      <a:r>
+                        <a:t>BEST</a:t>
+                      </a:r>
+                    </a:p>
+                  </a:txBody>
+                  <a:tcPr anchor="ctr">
+                    <a:solidFill>
+                      <a:srgbClr val="D4EDDA"/>
                     </a:solidFill>
                   </a:tcPr>
                 </a:tc>
@@ -5415,6 +6333,1952 @@
               </a:lnSpc>
             </a:pPr>
             <a:r>
+              <a:t>Key Findings &amp; Analysis</a:t>
+            </a:r>
+          </a:p>
+        </p:txBody>
+      </p:sp>
+      <p:sp>
+        <p:nvSpPr>
+          <p:cNvPr id="5" name="Rectangle 4"/>
+          <p:cNvSpPr/>
+          <p:nvPr/>
+        </p:nvSpPr>
+        <p:spPr>
+          <a:xfrm>
+            <a:off x="457200" y="1371600"/>
+            <a:ext cx="5394960" cy="2286000"/>
+          </a:xfrm>
+          <a:prstGeom prst="rect">
+            <a:avLst/>
+          </a:prstGeom>
+          <a:solidFill>
+            <a:srgbClr val="D6E8F7"/>
+          </a:solidFill>
+          <a:ln>
+            <a:noFill/>
+          </a:ln>
+        </p:spPr>
+        <p:style>
+          <a:lnRef idx="1">
+            <a:schemeClr val="accent1"/>
+          </a:lnRef>
+          <a:fillRef idx="3">
+            <a:schemeClr val="accent1"/>
+          </a:fillRef>
+          <a:effectRef idx="2">
+            <a:schemeClr val="accent1"/>
+          </a:effectRef>
+          <a:fontRef idx="minor">
+            <a:schemeClr val="lt1"/>
+          </a:fontRef>
+        </p:style>
+        <p:txBody>
+          <a:bodyPr rtlCol="0" anchor="ctr"/>
+          <a:lstStyle/>
+          <a:p>
+            <a:pPr algn="ctr"/>
+          </a:p>
+        </p:txBody>
+      </p:sp>
+      <p:sp>
+        <p:nvSpPr>
+          <p:cNvPr id="6" name="TextBox 5"/>
+          <p:cNvSpPr txBox="1"/>
+          <p:nvPr/>
+        </p:nvSpPr>
+        <p:spPr>
+          <a:xfrm>
+            <a:off x="640080" y="1463040"/>
+            <a:ext cx="5029200" cy="320040"/>
+          </a:xfrm>
+          <a:prstGeom prst="rect">
+            <a:avLst/>
+          </a:prstGeom>
+          <a:noFill/>
+        </p:spPr>
+        <p:txBody>
+          <a:bodyPr wrap="square">
+            <a:spAutoFit/>
+          </a:bodyPr>
+          <a:lstStyle/>
+          <a:p>
+            <a:pPr algn="l">
+              <a:spcAft>
+                <a:spcPts val="200"/>
+              </a:spcAft>
+              <a:defRPr sz="1700" b="1">
+                <a:solidFill>
+                  <a:srgbClr val="1B2A4A"/>
+                </a:solidFill>
+                <a:latin typeface="Calibri"/>
+              </a:defRPr>
+              <a:lnSpc>
+                <a:spcPct val="114999"/>
+              </a:lnSpc>
+            </a:pPr>
+            <a:r>
+              <a:t>Domain Pre-training Is Essential</a:t>
+            </a:r>
+          </a:p>
+        </p:txBody>
+      </p:sp>
+      <p:sp>
+        <p:nvSpPr>
+          <p:cNvPr id="7" name="TextBox 6"/>
+          <p:cNvSpPr txBox="1"/>
+          <p:nvPr/>
+        </p:nvSpPr>
+        <p:spPr>
+          <a:xfrm>
+            <a:off x="640080" y="1828800"/>
+            <a:ext cx="5029200" cy="1645920"/>
+          </a:xfrm>
+          <a:prstGeom prst="rect">
+            <a:avLst/>
+          </a:prstGeom>
+          <a:noFill/>
+        </p:spPr>
+        <p:txBody>
+          <a:bodyPr wrap="square">
+            <a:spAutoFit/>
+          </a:bodyPr>
+          <a:lstStyle/>
+          <a:p>
+            <a:pPr algn="l">
+              <a:spcAft>
+                <a:spcPts val="400"/>
+              </a:spcAft>
+              <a:defRPr sz="1200" b="0">
+                <a:solidFill>
+                  <a:srgbClr val="202020"/>
+                </a:solidFill>
+                <a:latin typeface="Calibri"/>
+              </a:defRPr>
+              <a:lnSpc>
+                <a:spcPct val="130000"/>
+              </a:lnSpc>
+            </a:pPr>
+            <a:r>
+              <a:t>• FinBERT few-shot (97.7%) &gt;&gt; BERT few-shot (74.2%) on sentiment (+23.5 pp)</a:t>
+            </a:r>
+          </a:p>
+          <a:p>
+            <a:pPr algn="l">
+              <a:spcAft>
+                <a:spcPts val="400"/>
+              </a:spcAft>
+              <a:defRPr sz="1200" b="0">
+                <a:solidFill>
+                  <a:srgbClr val="202020"/>
+                </a:solidFill>
+                <a:latin typeface="Calibri"/>
+              </a:defRPr>
+              <a:lnSpc>
+                <a:spcPct val="130000"/>
+              </a:lnSpc>
+            </a:pPr>
+            <a:r>
+              <a:t>• Financial vocabulary and phrase semantics are encoded during MLM pre-training</a:t>
+            </a:r>
+          </a:p>
+          <a:p>
+            <a:pPr algn="l">
+              <a:spcAft>
+                <a:spcPts val="400"/>
+              </a:spcAft>
+              <a:defRPr sz="1200" b="0">
+                <a:solidFill>
+                  <a:srgbClr val="202020"/>
+                </a:solidFill>
+                <a:latin typeface="Calibri"/>
+              </a:defRPr>
+              <a:lnSpc>
+                <a:spcPct val="130000"/>
+              </a:lnSpc>
+            </a:pPr>
+            <a:r>
+              <a:t>• General BERT treats 'volatility', 'bearish' as neutral tokens</a:t>
+            </a:r>
+          </a:p>
+        </p:txBody>
+      </p:sp>
+      <p:sp>
+        <p:nvSpPr>
+          <p:cNvPr id="8" name="Rectangle 7"/>
+          <p:cNvSpPr/>
+          <p:nvPr/>
+        </p:nvSpPr>
+        <p:spPr>
+          <a:xfrm>
+            <a:off x="6126480" y="1371600"/>
+            <a:ext cx="5394960" cy="2286000"/>
+          </a:xfrm>
+          <a:prstGeom prst="rect">
+            <a:avLst/>
+          </a:prstGeom>
+          <a:solidFill>
+            <a:srgbClr val="D6E8F7"/>
+          </a:solidFill>
+          <a:ln>
+            <a:noFill/>
+          </a:ln>
+        </p:spPr>
+        <p:style>
+          <a:lnRef idx="1">
+            <a:schemeClr val="accent1"/>
+          </a:lnRef>
+          <a:fillRef idx="3">
+            <a:schemeClr val="accent1"/>
+          </a:fillRef>
+          <a:effectRef idx="2">
+            <a:schemeClr val="accent1"/>
+          </a:effectRef>
+          <a:fontRef idx="minor">
+            <a:schemeClr val="lt1"/>
+          </a:fontRef>
+        </p:style>
+        <p:txBody>
+          <a:bodyPr rtlCol="0" anchor="ctr"/>
+          <a:lstStyle/>
+          <a:p>
+            <a:pPr algn="ctr"/>
+          </a:p>
+        </p:txBody>
+      </p:sp>
+      <p:sp>
+        <p:nvSpPr>
+          <p:cNvPr id="9" name="TextBox 8"/>
+          <p:cNvSpPr txBox="1"/>
+          <p:nvPr/>
+        </p:nvSpPr>
+        <p:spPr>
+          <a:xfrm>
+            <a:off x="6309360" y="1463040"/>
+            <a:ext cx="5029200" cy="320040"/>
+          </a:xfrm>
+          <a:prstGeom prst="rect">
+            <a:avLst/>
+          </a:prstGeom>
+          <a:noFill/>
+        </p:spPr>
+        <p:txBody>
+          <a:bodyPr wrap="square">
+            <a:spAutoFit/>
+          </a:bodyPr>
+          <a:lstStyle/>
+          <a:p>
+            <a:pPr algn="l">
+              <a:spcAft>
+                <a:spcPts val="200"/>
+              </a:spcAft>
+              <a:defRPr sz="1700" b="1">
+                <a:solidFill>
+                  <a:srgbClr val="1B2A4A"/>
+                </a:solidFill>
+                <a:latin typeface="Calibri"/>
+              </a:defRPr>
+              <a:lnSpc>
+                <a:spcPct val="114999"/>
+              </a:lnSpc>
+            </a:pPr>
+            <a:r>
+              <a:t>Multi-task Learning Benefits Both Tasks</a:t>
+            </a:r>
+          </a:p>
+        </p:txBody>
+      </p:sp>
+      <p:sp>
+        <p:nvSpPr>
+          <p:cNvPr id="10" name="TextBox 9"/>
+          <p:cNvSpPr txBox="1"/>
+          <p:nvPr/>
+        </p:nvSpPr>
+        <p:spPr>
+          <a:xfrm>
+            <a:off x="6309360" y="1828800"/>
+            <a:ext cx="5029200" cy="1645920"/>
+          </a:xfrm>
+          <a:prstGeom prst="rect">
+            <a:avLst/>
+          </a:prstGeom>
+          <a:noFill/>
+        </p:spPr>
+        <p:txBody>
+          <a:bodyPr wrap="square">
+            <a:spAutoFit/>
+          </a:bodyPr>
+          <a:lstStyle/>
+          <a:p>
+            <a:pPr algn="l">
+              <a:spcAft>
+                <a:spcPts val="400"/>
+              </a:spcAft>
+              <a:defRPr sz="1200" b="0">
+                <a:solidFill>
+                  <a:srgbClr val="202020"/>
+                </a:solidFill>
+                <a:latin typeface="Calibri"/>
+              </a:defRPr>
+              <a:lnSpc>
+                <a:spcPct val="130000"/>
+              </a:lnSpc>
+            </a:pPr>
+            <a:r>
+              <a:t>• Shared representations act as an inductive bias / regulariser</a:t>
+            </a:r>
+          </a:p>
+          <a:p>
+            <a:pPr algn="l">
+              <a:spcAft>
+                <a:spcPts val="400"/>
+              </a:spcAft>
+              <a:defRPr sz="1200" b="0">
+                <a:solidFill>
+                  <a:srgbClr val="202020"/>
+                </a:solidFill>
+                <a:latin typeface="Calibri"/>
+              </a:defRPr>
+              <a:lnSpc>
+                <a:spcPct val="130000"/>
+              </a:lnSpc>
+            </a:pPr>
+            <a:r>
+              <a:t>• Sentiment head learns stance-relevant features (and vice versa)</a:t>
+            </a:r>
+          </a:p>
+          <a:p>
+            <a:pPr algn="l">
+              <a:spcAft>
+                <a:spcPts val="400"/>
+              </a:spcAft>
+              <a:defRPr sz="1200" b="0">
+                <a:solidFill>
+                  <a:srgbClr val="202020"/>
+                </a:solidFill>
+                <a:latin typeface="Calibri"/>
+              </a:defRPr>
+              <a:lnSpc>
+                <a:spcPct val="130000"/>
+              </a:lnSpc>
+            </a:pPr>
+            <a:r>
+              <a:t>• Best combined performance: 98.45% sentiment, 67.74% stance</a:t>
+            </a:r>
+          </a:p>
+        </p:txBody>
+      </p:sp>
+      <p:sp>
+        <p:nvSpPr>
+          <p:cNvPr id="11" name="Rectangle 10"/>
+          <p:cNvSpPr/>
+          <p:nvPr/>
+        </p:nvSpPr>
+        <p:spPr>
+          <a:xfrm>
+            <a:off x="457200" y="3931920"/>
+            <a:ext cx="5394960" cy="2286000"/>
+          </a:xfrm>
+          <a:prstGeom prst="rect">
+            <a:avLst/>
+          </a:prstGeom>
+          <a:solidFill>
+            <a:srgbClr val="D6E8F7"/>
+          </a:solidFill>
+          <a:ln>
+            <a:noFill/>
+          </a:ln>
+        </p:spPr>
+        <p:style>
+          <a:lnRef idx="1">
+            <a:schemeClr val="accent1"/>
+          </a:lnRef>
+          <a:fillRef idx="3">
+            <a:schemeClr val="accent1"/>
+          </a:fillRef>
+          <a:effectRef idx="2">
+            <a:schemeClr val="accent1"/>
+          </a:effectRef>
+          <a:fontRef idx="minor">
+            <a:schemeClr val="lt1"/>
+          </a:fontRef>
+        </p:style>
+        <p:txBody>
+          <a:bodyPr rtlCol="0" anchor="ctr"/>
+          <a:lstStyle/>
+          <a:p>
+            <a:pPr algn="ctr"/>
+          </a:p>
+        </p:txBody>
+      </p:sp>
+      <p:sp>
+        <p:nvSpPr>
+          <p:cNvPr id="12" name="TextBox 11"/>
+          <p:cNvSpPr txBox="1"/>
+          <p:nvPr/>
+        </p:nvSpPr>
+        <p:spPr>
+          <a:xfrm>
+            <a:off x="640080" y="4023360"/>
+            <a:ext cx="5029200" cy="320040"/>
+          </a:xfrm>
+          <a:prstGeom prst="rect">
+            <a:avLst/>
+          </a:prstGeom>
+          <a:noFill/>
+        </p:spPr>
+        <p:txBody>
+          <a:bodyPr wrap="square">
+            <a:spAutoFit/>
+          </a:bodyPr>
+          <a:lstStyle/>
+          <a:p>
+            <a:pPr algn="l">
+              <a:spcAft>
+                <a:spcPts val="200"/>
+              </a:spcAft>
+              <a:defRPr sz="1700" b="1">
+                <a:solidFill>
+                  <a:srgbClr val="1B2A4A"/>
+                </a:solidFill>
+                <a:latin typeface="Calibri"/>
+              </a:defRPr>
+              <a:lnSpc>
+                <a:spcPct val="114999"/>
+              </a:lnSpc>
+            </a:pPr>
+            <a:r>
+              <a:t>Stance Is Inherently Harder</a:t>
+            </a:r>
+          </a:p>
+        </p:txBody>
+      </p:sp>
+      <p:sp>
+        <p:nvSpPr>
+          <p:cNvPr id="13" name="TextBox 12"/>
+          <p:cNvSpPr txBox="1"/>
+          <p:nvPr/>
+        </p:nvSpPr>
+        <p:spPr>
+          <a:xfrm>
+            <a:off x="640080" y="4389120"/>
+            <a:ext cx="5029200" cy="1645920"/>
+          </a:xfrm>
+          <a:prstGeom prst="rect">
+            <a:avLst/>
+          </a:prstGeom>
+          <a:noFill/>
+        </p:spPr>
+        <p:txBody>
+          <a:bodyPr wrap="square">
+            <a:spAutoFit/>
+          </a:bodyPr>
+          <a:lstStyle/>
+          <a:p>
+            <a:pPr algn="l">
+              <a:spcAft>
+                <a:spcPts val="400"/>
+              </a:spcAft>
+              <a:defRPr sz="1200" b="0">
+                <a:solidFill>
+                  <a:srgbClr val="202020"/>
+                </a:solidFill>
+                <a:latin typeface="Calibri"/>
+              </a:defRPr>
+              <a:lnSpc>
+                <a:spcPct val="130000"/>
+              </a:lnSpc>
+            </a:pPr>
+            <a:r>
+              <a:t>• Best stance accuracy: 67.74% vs. 98.45% sentiment</a:t>
+            </a:r>
+          </a:p>
+          <a:p>
+            <a:pPr algn="l">
+              <a:spcAft>
+                <a:spcPts val="400"/>
+              </a:spcAft>
+              <a:defRPr sz="1200" b="0">
+                <a:solidFill>
+                  <a:srgbClr val="202020"/>
+                </a:solidFill>
+                <a:latin typeface="Calibri"/>
+              </a:defRPr>
+              <a:lnSpc>
+                <a:spcPct val="130000"/>
+              </a:lnSpc>
+            </a:pPr>
+            <a:r>
+              <a:t>• Subtle, hedged policy language: 'may consider adjusting' → ambiguous</a:t>
+            </a:r>
+          </a:p>
+          <a:p>
+            <a:pPr algn="l">
+              <a:spcAft>
+                <a:spcPts val="400"/>
+              </a:spcAft>
+              <a:defRPr sz="1200" b="0">
+                <a:solidFill>
+                  <a:srgbClr val="202020"/>
+                </a:solidFill>
+                <a:latin typeface="Calibri"/>
+              </a:defRPr>
+              <a:lnSpc>
+                <a:spcPct val="130000"/>
+              </a:lnSpc>
+            </a:pPr>
+            <a:r>
+              <a:t>• Class imbalance: neutral ~50% dominates; dovish underrepresented</a:t>
+            </a:r>
+          </a:p>
+        </p:txBody>
+      </p:sp>
+      <p:sp>
+        <p:nvSpPr>
+          <p:cNvPr id="14" name="Rectangle 13"/>
+          <p:cNvSpPr/>
+          <p:nvPr/>
+        </p:nvSpPr>
+        <p:spPr>
+          <a:xfrm>
+            <a:off x="6126480" y="3931920"/>
+            <a:ext cx="5394960" cy="2286000"/>
+          </a:xfrm>
+          <a:prstGeom prst="rect">
+            <a:avLst/>
+          </a:prstGeom>
+          <a:solidFill>
+            <a:srgbClr val="D6E8F7"/>
+          </a:solidFill>
+          <a:ln>
+            <a:noFill/>
+          </a:ln>
+        </p:spPr>
+        <p:style>
+          <a:lnRef idx="1">
+            <a:schemeClr val="accent1"/>
+          </a:lnRef>
+          <a:fillRef idx="3">
+            <a:schemeClr val="accent1"/>
+          </a:fillRef>
+          <a:effectRef idx="2">
+            <a:schemeClr val="accent1"/>
+          </a:effectRef>
+          <a:fontRef idx="minor">
+            <a:schemeClr val="lt1"/>
+          </a:fontRef>
+        </p:style>
+        <p:txBody>
+          <a:bodyPr rtlCol="0" anchor="ctr"/>
+          <a:lstStyle/>
+          <a:p>
+            <a:pPr algn="ctr"/>
+          </a:p>
+        </p:txBody>
+      </p:sp>
+      <p:sp>
+        <p:nvSpPr>
+          <p:cNvPr id="15" name="TextBox 14"/>
+          <p:cNvSpPr txBox="1"/>
+          <p:nvPr/>
+        </p:nvSpPr>
+        <p:spPr>
+          <a:xfrm>
+            <a:off x="6309360" y="4023360"/>
+            <a:ext cx="5029200" cy="320040"/>
+          </a:xfrm>
+          <a:prstGeom prst="rect">
+            <a:avLst/>
+          </a:prstGeom>
+          <a:noFill/>
+        </p:spPr>
+        <p:txBody>
+          <a:bodyPr wrap="square">
+            <a:spAutoFit/>
+          </a:bodyPr>
+          <a:lstStyle/>
+          <a:p>
+            <a:pPr algn="l">
+              <a:spcAft>
+                <a:spcPts val="200"/>
+              </a:spcAft>
+              <a:defRPr sz="1700" b="1">
+                <a:solidFill>
+                  <a:srgbClr val="1B2A4A"/>
+                </a:solidFill>
+                <a:latin typeface="Calibri"/>
+              </a:defRPr>
+              <a:lnSpc>
+                <a:spcPct val="114999"/>
+              </a:lnSpc>
+            </a:pPr>
+            <a:r>
+              <a:t>Error Patterns</a:t>
+            </a:r>
+          </a:p>
+        </p:txBody>
+      </p:sp>
+      <p:sp>
+        <p:nvSpPr>
+          <p:cNvPr id="16" name="TextBox 15"/>
+          <p:cNvSpPr txBox="1"/>
+          <p:nvPr/>
+        </p:nvSpPr>
+        <p:spPr>
+          <a:xfrm>
+            <a:off x="6309360" y="4389120"/>
+            <a:ext cx="5029200" cy="1645920"/>
+          </a:xfrm>
+          <a:prstGeom prst="rect">
+            <a:avLst/>
+          </a:prstGeom>
+          <a:noFill/>
+        </p:spPr>
+        <p:txBody>
+          <a:bodyPr wrap="square">
+            <a:spAutoFit/>
+          </a:bodyPr>
+          <a:lstStyle/>
+          <a:p>
+            <a:pPr algn="l">
+              <a:spcAft>
+                <a:spcPts val="400"/>
+              </a:spcAft>
+              <a:defRPr sz="1200" b="0">
+                <a:solidFill>
+                  <a:srgbClr val="202020"/>
+                </a:solidFill>
+                <a:latin typeface="Calibri"/>
+              </a:defRPr>
+              <a:lnSpc>
+                <a:spcPct val="130000"/>
+              </a:lnSpc>
+            </a:pPr>
+            <a:r>
+              <a:t>• Most common confusion: neutral ↔ hawkish (stance)</a:t>
+            </a:r>
+          </a:p>
+          <a:p>
+            <a:pPr algn="l">
+              <a:spcAft>
+                <a:spcPts val="400"/>
+              </a:spcAft>
+              <a:defRPr sz="1200" b="0">
+                <a:solidFill>
+                  <a:srgbClr val="202020"/>
+                </a:solidFill>
+                <a:latin typeface="Calibri"/>
+              </a:defRPr>
+              <a:lnSpc>
+                <a:spcPct val="130000"/>
+              </a:lnSpc>
+            </a:pPr>
+            <a:r>
+              <a:t>• Dovish least represented → lowest per-class recall</a:t>
+            </a:r>
+          </a:p>
+          <a:p>
+            <a:pPr algn="l">
+              <a:spcAft>
+                <a:spcPts val="400"/>
+              </a:spcAft>
+              <a:defRPr sz="1200" b="0">
+                <a:solidFill>
+                  <a:srgbClr val="202020"/>
+                </a:solidFill>
+                <a:latin typeface="Calibri"/>
+              </a:defRPr>
+              <a:lnSpc>
+                <a:spcPct val="130000"/>
+              </a:lnSpc>
+            </a:pPr>
+            <a:r>
+              <a:t>• Sentiment errors rare; mostly neutral/negative boundary</a:t>
+            </a:r>
+          </a:p>
+        </p:txBody>
+      </p:sp>
+    </p:spTree>
+  </p:cSld>
+  <p:clrMapOvr>
+    <a:masterClrMapping/>
+  </p:clrMapOvr>
+</p:sld>
+</file>
+
+<file path=ppt/slides/slide13.xml><?xml version="1.0" encoding="utf-8"?>
+<p:sld xmlns:a="http://schemas.openxmlformats.org/drawingml/2006/main" xmlns:p="http://schemas.openxmlformats.org/presentationml/2006/main" xmlns:r="http://schemas.openxmlformats.org/officeDocument/2006/relationships">
+  <p:cSld>
+    <p:bg>
+      <p:bgPr>
+        <a:solidFill>
+          <a:srgbClr val="FFFFFF"/>
+        </a:solidFill>
+        <a:effectLst/>
+      </p:bgPr>
+    </p:bg>
+    <p:spTree>
+      <p:nvGrpSpPr>
+        <p:cNvPr id="1" name=""/>
+        <p:cNvGrpSpPr/>
+        <p:nvPr/>
+      </p:nvGrpSpPr>
+      <p:grpSpPr/>
+      <p:sp>
+        <p:nvSpPr>
+          <p:cNvPr id="2" name="Rectangle 1"/>
+          <p:cNvSpPr/>
+          <p:nvPr/>
+        </p:nvSpPr>
+        <p:spPr>
+          <a:xfrm>
+            <a:off x="0" y="0"/>
+            <a:ext cx="12191695" cy="1051560"/>
+          </a:xfrm>
+          <a:prstGeom prst="rect">
+            <a:avLst/>
+          </a:prstGeom>
+          <a:solidFill>
+            <a:srgbClr val="1B2A4A"/>
+          </a:solidFill>
+          <a:ln>
+            <a:noFill/>
+          </a:ln>
+        </p:spPr>
+        <p:style>
+          <a:lnRef idx="1">
+            <a:schemeClr val="accent1"/>
+          </a:lnRef>
+          <a:fillRef idx="3">
+            <a:schemeClr val="accent1"/>
+          </a:fillRef>
+          <a:effectRef idx="2">
+            <a:schemeClr val="accent1"/>
+          </a:effectRef>
+          <a:fontRef idx="minor">
+            <a:schemeClr val="lt1"/>
+          </a:fontRef>
+        </p:style>
+        <p:txBody>
+          <a:bodyPr rtlCol="0" anchor="ctr"/>
+          <a:lstStyle/>
+          <a:p>
+            <a:pPr algn="ctr"/>
+          </a:p>
+        </p:txBody>
+      </p:sp>
+      <p:sp>
+        <p:nvSpPr>
+          <p:cNvPr id="3" name="Rectangle 2"/>
+          <p:cNvSpPr/>
+          <p:nvPr/>
+        </p:nvSpPr>
+        <p:spPr>
+          <a:xfrm>
+            <a:off x="0" y="1051560"/>
+            <a:ext cx="12191695" cy="54864"/>
+          </a:xfrm>
+          <a:prstGeom prst="rect">
+            <a:avLst/>
+          </a:prstGeom>
+          <a:solidFill>
+            <a:srgbClr val="E8A838"/>
+          </a:solidFill>
+          <a:ln>
+            <a:noFill/>
+          </a:ln>
+        </p:spPr>
+        <p:style>
+          <a:lnRef idx="1">
+            <a:schemeClr val="accent1"/>
+          </a:lnRef>
+          <a:fillRef idx="3">
+            <a:schemeClr val="accent1"/>
+          </a:fillRef>
+          <a:effectRef idx="2">
+            <a:schemeClr val="accent1"/>
+          </a:effectRef>
+          <a:fontRef idx="minor">
+            <a:schemeClr val="lt1"/>
+          </a:fontRef>
+        </p:style>
+        <p:txBody>
+          <a:bodyPr rtlCol="0" anchor="ctr"/>
+          <a:lstStyle/>
+          <a:p>
+            <a:pPr algn="ctr"/>
+          </a:p>
+        </p:txBody>
+      </p:sp>
+      <p:sp>
+        <p:nvSpPr>
+          <p:cNvPr id="4" name="TextBox 3"/>
+          <p:cNvSpPr txBox="1"/>
+          <p:nvPr/>
+        </p:nvSpPr>
+        <p:spPr>
+          <a:xfrm>
+            <a:off x="548640" y="182880"/>
+            <a:ext cx="10972800" cy="640080"/>
+          </a:xfrm>
+          <a:prstGeom prst="rect">
+            <a:avLst/>
+          </a:prstGeom>
+          <a:noFill/>
+        </p:spPr>
+        <p:txBody>
+          <a:bodyPr wrap="square">
+            <a:spAutoFit/>
+          </a:bodyPr>
+          <a:lstStyle/>
+          <a:p>
+            <a:pPr algn="l">
+              <a:spcAft>
+                <a:spcPts val="200"/>
+              </a:spcAft>
+              <a:defRPr sz="3000" b="1">
+                <a:solidFill>
+                  <a:srgbClr val="FFFFFF"/>
+                </a:solidFill>
+                <a:latin typeface="Calibri"/>
+              </a:defRPr>
+              <a:lnSpc>
+                <a:spcPct val="114999"/>
+              </a:lnSpc>
+            </a:pPr>
+            <a:r>
+              <a:t>Error Analysis</a:t>
+            </a:r>
+          </a:p>
+        </p:txBody>
+      </p:sp>
+      <p:sp>
+        <p:nvSpPr>
+          <p:cNvPr id="5" name="TextBox 4"/>
+          <p:cNvSpPr txBox="1"/>
+          <p:nvPr/>
+        </p:nvSpPr>
+        <p:spPr>
+          <a:xfrm>
+            <a:off x="457200" y="1371600"/>
+            <a:ext cx="5486400" cy="365760"/>
+          </a:xfrm>
+          <a:prstGeom prst="rect">
+            <a:avLst/>
+          </a:prstGeom>
+          <a:noFill/>
+        </p:spPr>
+        <p:txBody>
+          <a:bodyPr wrap="square">
+            <a:spAutoFit/>
+          </a:bodyPr>
+          <a:lstStyle/>
+          <a:p>
+            <a:pPr algn="l">
+              <a:spcAft>
+                <a:spcPts val="200"/>
+              </a:spcAft>
+              <a:defRPr sz="2000" b="1">
+                <a:solidFill>
+                  <a:srgbClr val="1B2A4A"/>
+                </a:solidFill>
+                <a:latin typeface="Calibri"/>
+              </a:defRPr>
+              <a:lnSpc>
+                <a:spcPct val="114999"/>
+              </a:lnSpc>
+            </a:pPr>
+            <a:r>
+              <a:t>Stance Classification Errors</a:t>
+            </a:r>
+          </a:p>
+        </p:txBody>
+      </p:sp>
+      <p:sp>
+        <p:nvSpPr>
+          <p:cNvPr id="6" name="TextBox 5"/>
+          <p:cNvSpPr txBox="1"/>
+          <p:nvPr/>
+        </p:nvSpPr>
+        <p:spPr>
+          <a:xfrm>
+            <a:off x="457200" y="1783080"/>
+            <a:ext cx="5303520" cy="2103120"/>
+          </a:xfrm>
+          <a:prstGeom prst="rect">
+            <a:avLst/>
+          </a:prstGeom>
+          <a:noFill/>
+        </p:spPr>
+        <p:txBody>
+          <a:bodyPr wrap="square">
+            <a:spAutoFit/>
+          </a:bodyPr>
+          <a:lstStyle/>
+          <a:p>
+            <a:pPr algn="l">
+              <a:spcAft>
+                <a:spcPts val="400"/>
+              </a:spcAft>
+              <a:defRPr sz="1400" b="0">
+                <a:solidFill>
+                  <a:srgbClr val="202020"/>
+                </a:solidFill>
+                <a:latin typeface="Calibri"/>
+              </a:defRPr>
+              <a:lnSpc>
+                <a:spcPct val="130000"/>
+              </a:lnSpc>
+            </a:pPr>
+            <a:r>
+              <a:t>• Neutral ↔ Hawkish: most frequent confusion pair</a:t>
+            </a:r>
+          </a:p>
+          <a:p>
+            <a:pPr algn="l">
+              <a:spcAft>
+                <a:spcPts val="400"/>
+              </a:spcAft>
+              <a:defRPr sz="1400" b="0">
+                <a:solidFill>
+                  <a:srgbClr val="202020"/>
+                </a:solidFill>
+                <a:latin typeface="Calibri"/>
+              </a:defRPr>
+              <a:lnSpc>
+                <a:spcPct val="130000"/>
+              </a:lnSpc>
+            </a:pPr>
+            <a:r>
+              <a:t>• "Mixed signal" sentences containing both tightening and easing cues</a:t>
+            </a:r>
+          </a:p>
+          <a:p>
+            <a:pPr algn="l">
+              <a:spcAft>
+                <a:spcPts val="400"/>
+              </a:spcAft>
+              <a:defRPr sz="1400" b="0">
+                <a:solidFill>
+                  <a:srgbClr val="202020"/>
+                </a:solidFill>
+                <a:latin typeface="Calibri"/>
+              </a:defRPr>
+              <a:lnSpc>
+                <a:spcPct val="130000"/>
+              </a:lnSpc>
+            </a:pPr>
+            <a:r>
+              <a:t>• Hedged language: 'could', 'might', 'may consider' blurs stance</a:t>
+            </a:r>
+          </a:p>
+          <a:p>
+            <a:pPr algn="l">
+              <a:spcAft>
+                <a:spcPts val="400"/>
+              </a:spcAft>
+              <a:defRPr sz="1400" b="0">
+                <a:solidFill>
+                  <a:srgbClr val="202020"/>
+                </a:solidFill>
+                <a:latin typeface="Calibri"/>
+              </a:defRPr>
+              <a:lnSpc>
+                <a:spcPct val="130000"/>
+              </a:lnSpc>
+            </a:pPr>
+            <a:r>
+              <a:t>• Conditional statements: hawkish action under dovish framing</a:t>
+            </a:r>
+          </a:p>
+          <a:p>
+            <a:pPr algn="l">
+              <a:spcAft>
+                <a:spcPts val="400"/>
+              </a:spcAft>
+              <a:defRPr sz="1400" b="0">
+                <a:solidFill>
+                  <a:srgbClr val="202020"/>
+                </a:solidFill>
+                <a:latin typeface="Calibri"/>
+              </a:defRPr>
+              <a:lnSpc>
+                <a:spcPct val="130000"/>
+              </a:lnSpc>
+            </a:pPr>
+            <a:r>
+              <a:t>• Forward guidance vs. current assessment confusion</a:t>
+            </a:r>
+          </a:p>
+        </p:txBody>
+      </p:sp>
+      <p:sp>
+        <p:nvSpPr>
+          <p:cNvPr id="7" name="TextBox 6"/>
+          <p:cNvSpPr txBox="1"/>
+          <p:nvPr/>
+        </p:nvSpPr>
+        <p:spPr>
+          <a:xfrm>
+            <a:off x="6400800" y="1371600"/>
+            <a:ext cx="5303520" cy="365760"/>
+          </a:xfrm>
+          <a:prstGeom prst="rect">
+            <a:avLst/>
+          </a:prstGeom>
+          <a:noFill/>
+        </p:spPr>
+        <p:txBody>
+          <a:bodyPr wrap="square">
+            <a:spAutoFit/>
+          </a:bodyPr>
+          <a:lstStyle/>
+          <a:p>
+            <a:pPr algn="l">
+              <a:spcAft>
+                <a:spcPts val="200"/>
+              </a:spcAft>
+              <a:defRPr sz="2000" b="1">
+                <a:solidFill>
+                  <a:srgbClr val="1B2A4A"/>
+                </a:solidFill>
+                <a:latin typeface="Calibri"/>
+              </a:defRPr>
+              <a:lnSpc>
+                <a:spcPct val="114999"/>
+              </a:lnSpc>
+            </a:pPr>
+            <a:r>
+              <a:t>Sentiment Classification Errors</a:t>
+            </a:r>
+          </a:p>
+        </p:txBody>
+      </p:sp>
+      <p:sp>
+        <p:nvSpPr>
+          <p:cNvPr id="8" name="TextBox 7"/>
+          <p:cNvSpPr txBox="1"/>
+          <p:nvPr/>
+        </p:nvSpPr>
+        <p:spPr>
+          <a:xfrm>
+            <a:off x="6400800" y="1783080"/>
+            <a:ext cx="5303520" cy="2103120"/>
+          </a:xfrm>
+          <a:prstGeom prst="rect">
+            <a:avLst/>
+          </a:prstGeom>
+          <a:noFill/>
+        </p:spPr>
+        <p:txBody>
+          <a:bodyPr wrap="square">
+            <a:spAutoFit/>
+          </a:bodyPr>
+          <a:lstStyle/>
+          <a:p>
+            <a:pPr algn="l">
+              <a:spcAft>
+                <a:spcPts val="400"/>
+              </a:spcAft>
+              <a:defRPr sz="1400" b="0">
+                <a:solidFill>
+                  <a:srgbClr val="202020"/>
+                </a:solidFill>
+                <a:latin typeface="Calibri"/>
+              </a:defRPr>
+              <a:lnSpc>
+                <a:spcPct val="130000"/>
+              </a:lnSpc>
+            </a:pPr>
+            <a:r>
+              <a:t>• Errors are rare (&lt;2% for multi-task FinBERT)</a:t>
+            </a:r>
+          </a:p>
+          <a:p>
+            <a:pPr algn="l">
+              <a:spcAft>
+                <a:spcPts val="400"/>
+              </a:spcAft>
+              <a:defRPr sz="1400" b="0">
+                <a:solidFill>
+                  <a:srgbClr val="202020"/>
+                </a:solidFill>
+                <a:latin typeface="Calibri"/>
+              </a:defRPr>
+              <a:lnSpc>
+                <a:spcPct val="130000"/>
+              </a:lnSpc>
+            </a:pPr>
+            <a:r>
+              <a:t>• Most errors at neutral/negative boundary</a:t>
+            </a:r>
+          </a:p>
+          <a:p>
+            <a:pPr algn="l">
+              <a:spcAft>
+                <a:spcPts val="400"/>
+              </a:spcAft>
+              <a:defRPr sz="1400" b="0">
+                <a:solidFill>
+                  <a:srgbClr val="202020"/>
+                </a:solidFill>
+                <a:latin typeface="Calibri"/>
+              </a:defRPr>
+              <a:lnSpc>
+                <a:spcPct val="130000"/>
+              </a:lnSpc>
+            </a:pPr>
+            <a:r>
+              <a:t>• Financial idioms: 'limited upside' = negative, not neutral</a:t>
+            </a:r>
+          </a:p>
+          <a:p>
+            <a:pPr algn="l">
+              <a:spcAft>
+                <a:spcPts val="400"/>
+              </a:spcAft>
+              <a:defRPr sz="1400" b="0">
+                <a:solidFill>
+                  <a:srgbClr val="202020"/>
+                </a:solidFill>
+                <a:latin typeface="Calibri"/>
+              </a:defRPr>
+              <a:lnSpc>
+                <a:spcPct val="130000"/>
+              </a:lnSpc>
+            </a:pPr>
+            <a:r>
+              <a:t>• Comparative statements sometimes misclassified</a:t>
+            </a:r>
+          </a:p>
+          <a:p>
+            <a:pPr algn="l">
+              <a:spcAft>
+                <a:spcPts val="400"/>
+              </a:spcAft>
+              <a:defRPr sz="1400" b="0">
+                <a:solidFill>
+                  <a:srgbClr val="202020"/>
+                </a:solidFill>
+                <a:latin typeface="Calibri"/>
+              </a:defRPr>
+              <a:lnSpc>
+                <a:spcPct val="130000"/>
+              </a:lnSpc>
+            </a:pPr>
+            <a:r>
+              <a:t>• Multi-task reduces ambiguous-boundary errors</a:t>
+            </a:r>
+          </a:p>
+        </p:txBody>
+      </p:sp>
+      <p:sp>
+        <p:nvSpPr>
+          <p:cNvPr id="9" name="TextBox 8"/>
+          <p:cNvSpPr txBox="1"/>
+          <p:nvPr/>
+        </p:nvSpPr>
+        <p:spPr>
+          <a:xfrm>
+            <a:off x="457200" y="4114800"/>
+            <a:ext cx="11247120" cy="365760"/>
+          </a:xfrm>
+          <a:prstGeom prst="rect">
+            <a:avLst/>
+          </a:prstGeom>
+          <a:noFill/>
+        </p:spPr>
+        <p:txBody>
+          <a:bodyPr wrap="square">
+            <a:spAutoFit/>
+          </a:bodyPr>
+          <a:lstStyle/>
+          <a:p>
+            <a:pPr algn="l">
+              <a:spcAft>
+                <a:spcPts val="200"/>
+              </a:spcAft>
+              <a:defRPr sz="2000" b="1">
+                <a:solidFill>
+                  <a:srgbClr val="1B2A4A"/>
+                </a:solidFill>
+                <a:latin typeface="Calibri"/>
+              </a:defRPr>
+              <a:lnSpc>
+                <a:spcPct val="114999"/>
+              </a:lnSpc>
+            </a:pPr>
+            <a:r>
+              <a:t>Multi-task Effect on Error Reduction</a:t>
+            </a:r>
+          </a:p>
+        </p:txBody>
+      </p:sp>
+      <p:graphicFrame>
+        <p:nvGraphicFramePr>
+          <p:cNvPr id="10" name="Table 9"/>
+          <p:cNvGraphicFramePr>
+            <a:graphicFrameLocks noGrp="1"/>
+          </p:cNvGraphicFramePr>
+          <p:nvPr/>
+        </p:nvGraphicFramePr>
+        <p:xfrm>
+          <a:off x="457200" y="4572000"/>
+          <a:ext cx="11247120" cy="2011680"/>
+        </p:xfrm>
+        <a:graphic>
+          <a:graphicData uri="http://schemas.openxmlformats.org/drawingml/2006/table">
+            <a:tbl>
+              <a:tblPr firstRow="1" bandRow="1">
+                <a:tableStyleId>{5C22544A-7EE6-4342-B048-85BDC9FD1C3A}</a:tableStyleId>
+              </a:tblPr>
+              <a:tblGrid>
+                <a:gridCol w="3200400"/>
+                <a:gridCol w="2560320"/>
+                <a:gridCol w="2560320"/>
+                <a:gridCol w="2926080"/>
+              </a:tblGrid>
+              <a:tr h="335280">
+                <a:tc>
+                  <a:txBody>
+                    <a:bodyPr/>
+                    <a:lstStyle/>
+                    <a:p>
+                      <a:pPr algn="ctr">
+                        <a:defRPr sz="1200" b="1">
+                          <a:solidFill>
+                            <a:srgbClr val="FFFFFF"/>
+                          </a:solidFill>
+                          <a:latin typeface="Calibri"/>
+                        </a:defRPr>
+                      </a:pPr>
+                      <a:r>
+                        <a:t>Error Type</a:t>
+                      </a:r>
+                    </a:p>
+                  </a:txBody>
+                  <a:tcPr anchor="ctr">
+                    <a:solidFill>
+                      <a:srgbClr val="1B2A4A"/>
+                    </a:solidFill>
+                  </a:tcPr>
+                </a:tc>
+                <a:tc>
+                  <a:txBody>
+                    <a:bodyPr/>
+                    <a:lstStyle/>
+                    <a:p>
+                      <a:pPr algn="ctr">
+                        <a:defRPr sz="1200" b="1">
+                          <a:solidFill>
+                            <a:srgbClr val="FFFFFF"/>
+                          </a:solidFill>
+                          <a:latin typeface="Calibri"/>
+                        </a:defRPr>
+                      </a:pPr>
+                      <a:r>
+                        <a:t>Single-task FinBERT</a:t>
+                      </a:r>
+                    </a:p>
+                  </a:txBody>
+                  <a:tcPr anchor="ctr">
+                    <a:solidFill>
+                      <a:srgbClr val="1B2A4A"/>
+                    </a:solidFill>
+                  </a:tcPr>
+                </a:tc>
+                <a:tc>
+                  <a:txBody>
+                    <a:bodyPr/>
+                    <a:lstStyle/>
+                    <a:p>
+                      <a:pPr algn="ctr">
+                        <a:defRPr sz="1200" b="1">
+                          <a:solidFill>
+                            <a:srgbClr val="FFFFFF"/>
+                          </a:solidFill>
+                          <a:latin typeface="Calibri"/>
+                        </a:defRPr>
+                      </a:pPr>
+                      <a:r>
+                        <a:t>Multi-task FinBERT</a:t>
+                      </a:r>
+                    </a:p>
+                  </a:txBody>
+                  <a:tcPr anchor="ctr">
+                    <a:solidFill>
+                      <a:srgbClr val="1B2A4A"/>
+                    </a:solidFill>
+                  </a:tcPr>
+                </a:tc>
+                <a:tc>
+                  <a:txBody>
+                    <a:bodyPr/>
+                    <a:lstStyle/>
+                    <a:p>
+                      <a:pPr algn="ctr">
+                        <a:defRPr sz="1200" b="1">
+                          <a:solidFill>
+                            <a:srgbClr val="FFFFFF"/>
+                          </a:solidFill>
+                          <a:latin typeface="Calibri"/>
+                        </a:defRPr>
+                      </a:pPr>
+                      <a:r>
+                        <a:t>Change</a:t>
+                      </a:r>
+                    </a:p>
+                  </a:txBody>
+                  <a:tcPr anchor="ctr">
+                    <a:solidFill>
+                      <a:srgbClr val="1B2A4A"/>
+                    </a:solidFill>
+                  </a:tcPr>
+                </a:tc>
+              </a:tr>
+              <a:tr h="335280">
+                <a:tc>
+                  <a:txBody>
+                    <a:bodyPr/>
+                    <a:lstStyle/>
+                    <a:p>
+                      <a:pPr algn="ctr">
+                        <a:defRPr sz="1200">
+                          <a:solidFill>
+                            <a:srgbClr val="202020"/>
+                          </a:solidFill>
+                          <a:latin typeface="Calibri"/>
+                        </a:defRPr>
+                      </a:pPr>
+                      <a:r>
+                        <a:t>Neutral→Hawkish (stance)</a:t>
+                      </a:r>
+                    </a:p>
+                  </a:txBody>
+                  <a:tcPr anchor="ctr">
+                    <a:solidFill>
+                      <a:srgbClr val="FFFFFF"/>
+                    </a:solidFill>
+                  </a:tcPr>
+                </a:tc>
+                <a:tc>
+                  <a:txBody>
+                    <a:bodyPr/>
+                    <a:lstStyle/>
+                    <a:p>
+                      <a:pPr algn="ctr">
+                        <a:defRPr sz="1200">
+                          <a:solidFill>
+                            <a:srgbClr val="202020"/>
+                          </a:solidFill>
+                          <a:latin typeface="Calibri"/>
+                        </a:defRPr>
+                      </a:pPr>
+                      <a:r>
+                        <a:t>18.2%</a:t>
+                      </a:r>
+                    </a:p>
+                  </a:txBody>
+                  <a:tcPr anchor="ctr">
+                    <a:solidFill>
+                      <a:srgbClr val="FFFFFF"/>
+                    </a:solidFill>
+                  </a:tcPr>
+                </a:tc>
+                <a:tc>
+                  <a:txBody>
+                    <a:bodyPr/>
+                    <a:lstStyle/>
+                    <a:p>
+                      <a:pPr algn="ctr">
+                        <a:defRPr sz="1200">
+                          <a:solidFill>
+                            <a:srgbClr val="202020"/>
+                          </a:solidFill>
+                          <a:latin typeface="Calibri"/>
+                        </a:defRPr>
+                      </a:pPr>
+                      <a:r>
+                        <a:t>15.4%</a:t>
+                      </a:r>
+                    </a:p>
+                  </a:txBody>
+                  <a:tcPr anchor="ctr">
+                    <a:solidFill>
+                      <a:srgbClr val="FFFFFF"/>
+                    </a:solidFill>
+                  </a:tcPr>
+                </a:tc>
+                <a:tc>
+                  <a:txBody>
+                    <a:bodyPr/>
+                    <a:lstStyle/>
+                    <a:p>
+                      <a:pPr algn="ctr">
+                        <a:defRPr sz="1200">
+                          <a:solidFill>
+                            <a:srgbClr val="202020"/>
+                          </a:solidFill>
+                          <a:latin typeface="Calibri"/>
+                        </a:defRPr>
+                      </a:pPr>
+                      <a:r>
+                        <a:t>−2.8 pp</a:t>
+                      </a:r>
+                    </a:p>
+                  </a:txBody>
+                  <a:tcPr anchor="ctr">
+                    <a:solidFill>
+                      <a:srgbClr val="FFFFFF"/>
+                    </a:solidFill>
+                  </a:tcPr>
+                </a:tc>
+              </a:tr>
+              <a:tr h="335280">
+                <a:tc>
+                  <a:txBody>
+                    <a:bodyPr/>
+                    <a:lstStyle/>
+                    <a:p>
+                      <a:pPr algn="ctr">
+                        <a:defRPr sz="1200">
+                          <a:solidFill>
+                            <a:srgbClr val="202020"/>
+                          </a:solidFill>
+                          <a:latin typeface="Calibri"/>
+                        </a:defRPr>
+                      </a:pPr>
+                      <a:r>
+                        <a:t>Hawkish→Neutral (stance)</a:t>
+                      </a:r>
+                    </a:p>
+                  </a:txBody>
+                  <a:tcPr anchor="ctr">
+                    <a:solidFill>
+                      <a:srgbClr val="F2F2F2"/>
+                    </a:solidFill>
+                  </a:tcPr>
+                </a:tc>
+                <a:tc>
+                  <a:txBody>
+                    <a:bodyPr/>
+                    <a:lstStyle/>
+                    <a:p>
+                      <a:pPr algn="ctr">
+                        <a:defRPr sz="1200">
+                          <a:solidFill>
+                            <a:srgbClr val="202020"/>
+                          </a:solidFill>
+                          <a:latin typeface="Calibri"/>
+                        </a:defRPr>
+                      </a:pPr>
+                      <a:r>
+                        <a:t>14.6%</a:t>
+                      </a:r>
+                    </a:p>
+                  </a:txBody>
+                  <a:tcPr anchor="ctr">
+                    <a:solidFill>
+                      <a:srgbClr val="F2F2F2"/>
+                    </a:solidFill>
+                  </a:tcPr>
+                </a:tc>
+                <a:tc>
+                  <a:txBody>
+                    <a:bodyPr/>
+                    <a:lstStyle/>
+                    <a:p>
+                      <a:pPr algn="ctr">
+                        <a:defRPr sz="1200">
+                          <a:solidFill>
+                            <a:srgbClr val="202020"/>
+                          </a:solidFill>
+                          <a:latin typeface="Calibri"/>
+                        </a:defRPr>
+                      </a:pPr>
+                      <a:r>
+                        <a:t>13.1%</a:t>
+                      </a:r>
+                    </a:p>
+                  </a:txBody>
+                  <a:tcPr anchor="ctr">
+                    <a:solidFill>
+                      <a:srgbClr val="F2F2F2"/>
+                    </a:solidFill>
+                  </a:tcPr>
+                </a:tc>
+                <a:tc>
+                  <a:txBody>
+                    <a:bodyPr/>
+                    <a:lstStyle/>
+                    <a:p>
+                      <a:pPr algn="ctr">
+                        <a:defRPr sz="1200">
+                          <a:solidFill>
+                            <a:srgbClr val="202020"/>
+                          </a:solidFill>
+                          <a:latin typeface="Calibri"/>
+                        </a:defRPr>
+                      </a:pPr>
+                      <a:r>
+                        <a:t>−1.5 pp</a:t>
+                      </a:r>
+                    </a:p>
+                  </a:txBody>
+                  <a:tcPr anchor="ctr">
+                    <a:solidFill>
+                      <a:srgbClr val="F2F2F2"/>
+                    </a:solidFill>
+                  </a:tcPr>
+                </a:tc>
+              </a:tr>
+              <a:tr h="335280">
+                <a:tc>
+                  <a:txBody>
+                    <a:bodyPr/>
+                    <a:lstStyle/>
+                    <a:p>
+                      <a:pPr algn="ctr">
+                        <a:defRPr sz="1200">
+                          <a:solidFill>
+                            <a:srgbClr val="202020"/>
+                          </a:solidFill>
+                          <a:latin typeface="Calibri"/>
+                        </a:defRPr>
+                      </a:pPr>
+                      <a:r>
+                        <a:t>Neutral→Negative (sent.)</a:t>
+                      </a:r>
+                    </a:p>
+                  </a:txBody>
+                  <a:tcPr anchor="ctr">
+                    <a:solidFill>
+                      <a:srgbClr val="FFFFFF"/>
+                    </a:solidFill>
+                  </a:tcPr>
+                </a:tc>
+                <a:tc>
+                  <a:txBody>
+                    <a:bodyPr/>
+                    <a:lstStyle/>
+                    <a:p>
+                      <a:pPr algn="ctr">
+                        <a:defRPr sz="1200">
+                          <a:solidFill>
+                            <a:srgbClr val="202020"/>
+                          </a:solidFill>
+                          <a:latin typeface="Calibri"/>
+                        </a:defRPr>
+                      </a:pPr>
+                      <a:r>
+                        <a:t>2.1%</a:t>
+                      </a:r>
+                    </a:p>
+                  </a:txBody>
+                  <a:tcPr anchor="ctr">
+                    <a:solidFill>
+                      <a:srgbClr val="FFFFFF"/>
+                    </a:solidFill>
+                  </a:tcPr>
+                </a:tc>
+                <a:tc>
+                  <a:txBody>
+                    <a:bodyPr/>
+                    <a:lstStyle/>
+                    <a:p>
+                      <a:pPr algn="ctr">
+                        <a:defRPr sz="1200">
+                          <a:solidFill>
+                            <a:srgbClr val="202020"/>
+                          </a:solidFill>
+                          <a:latin typeface="Calibri"/>
+                        </a:defRPr>
+                      </a:pPr>
+                      <a:r>
+                        <a:t>1.4%</a:t>
+                      </a:r>
+                    </a:p>
+                  </a:txBody>
+                  <a:tcPr anchor="ctr">
+                    <a:solidFill>
+                      <a:srgbClr val="FFFFFF"/>
+                    </a:solidFill>
+                  </a:tcPr>
+                </a:tc>
+                <a:tc>
+                  <a:txBody>
+                    <a:bodyPr/>
+                    <a:lstStyle/>
+                    <a:p>
+                      <a:pPr algn="ctr">
+                        <a:defRPr sz="1200">
+                          <a:solidFill>
+                            <a:srgbClr val="202020"/>
+                          </a:solidFill>
+                          <a:latin typeface="Calibri"/>
+                        </a:defRPr>
+                      </a:pPr>
+                      <a:r>
+                        <a:t>−0.7 pp</a:t>
+                      </a:r>
+                    </a:p>
+                  </a:txBody>
+                  <a:tcPr anchor="ctr">
+                    <a:solidFill>
+                      <a:srgbClr val="FFFFFF"/>
+                    </a:solidFill>
+                  </a:tcPr>
+                </a:tc>
+              </a:tr>
+              <a:tr h="335280">
+                <a:tc>
+                  <a:txBody>
+                    <a:bodyPr/>
+                    <a:lstStyle/>
+                    <a:p>
+                      <a:pPr algn="ctr">
+                        <a:defRPr sz="1200">
+                          <a:solidFill>
+                            <a:srgbClr val="202020"/>
+                          </a:solidFill>
+                          <a:latin typeface="Calibri"/>
+                        </a:defRPr>
+                      </a:pPr>
+                      <a:r>
+                        <a:t>Overall error rate (sent.)</a:t>
+                      </a:r>
+                    </a:p>
+                  </a:txBody>
+                  <a:tcPr anchor="ctr">
+                    <a:solidFill>
+                      <a:srgbClr val="F2F2F2"/>
+                    </a:solidFill>
+                  </a:tcPr>
+                </a:tc>
+                <a:tc>
+                  <a:txBody>
+                    <a:bodyPr/>
+                    <a:lstStyle/>
+                    <a:p>
+                      <a:pPr algn="ctr">
+                        <a:defRPr sz="1200">
+                          <a:solidFill>
+                            <a:srgbClr val="202020"/>
+                          </a:solidFill>
+                          <a:latin typeface="Calibri"/>
+                        </a:defRPr>
+                      </a:pPr>
+                      <a:r>
+                        <a:t>3.3%</a:t>
+                      </a:r>
+                    </a:p>
+                  </a:txBody>
+                  <a:tcPr anchor="ctr">
+                    <a:solidFill>
+                      <a:srgbClr val="F2F2F2"/>
+                    </a:solidFill>
+                  </a:tcPr>
+                </a:tc>
+                <a:tc>
+                  <a:txBody>
+                    <a:bodyPr/>
+                    <a:lstStyle/>
+                    <a:p>
+                      <a:pPr algn="ctr">
+                        <a:defRPr sz="1200">
+                          <a:solidFill>
+                            <a:srgbClr val="202020"/>
+                          </a:solidFill>
+                          <a:latin typeface="Calibri"/>
+                        </a:defRPr>
+                      </a:pPr>
+                      <a:r>
+                        <a:t>1.99%</a:t>
+                      </a:r>
+                    </a:p>
+                  </a:txBody>
+                  <a:tcPr anchor="ctr">
+                    <a:solidFill>
+                      <a:srgbClr val="F2F2F2"/>
+                    </a:solidFill>
+                  </a:tcPr>
+                </a:tc>
+                <a:tc>
+                  <a:txBody>
+                    <a:bodyPr/>
+                    <a:lstStyle/>
+                    <a:p>
+                      <a:pPr algn="ctr">
+                        <a:defRPr sz="1200">
+                          <a:solidFill>
+                            <a:srgbClr val="202020"/>
+                          </a:solidFill>
+                          <a:latin typeface="Calibri"/>
+                        </a:defRPr>
+                      </a:pPr>
+                      <a:r>
+                        <a:t>−1.3 pp</a:t>
+                      </a:r>
+                    </a:p>
+                  </a:txBody>
+                  <a:tcPr anchor="ctr">
+                    <a:solidFill>
+                      <a:srgbClr val="F2F2F2"/>
+                    </a:solidFill>
+                  </a:tcPr>
+                </a:tc>
+              </a:tr>
+              <a:tr h="335280">
+                <a:tc>
+                  <a:txBody>
+                    <a:bodyPr/>
+                    <a:lstStyle/>
+                    <a:p>
+                      <a:pPr algn="ctr">
+                        <a:defRPr sz="1200">
+                          <a:solidFill>
+                            <a:srgbClr val="202020"/>
+                          </a:solidFill>
+                          <a:latin typeface="Calibri"/>
+                        </a:defRPr>
+                      </a:pPr>
+                      <a:r>
+                        <a:t>Overall error rate (stance)</a:t>
+                      </a:r>
+                    </a:p>
+                  </a:txBody>
+                  <a:tcPr anchor="ctr">
+                    <a:solidFill>
+                      <a:srgbClr val="FFFFFF"/>
+                    </a:solidFill>
+                  </a:tcPr>
+                </a:tc>
+                <a:tc>
+                  <a:txBody>
+                    <a:bodyPr/>
+                    <a:lstStyle/>
+                    <a:p>
+                      <a:pPr algn="ctr">
+                        <a:defRPr sz="1200">
+                          <a:solidFill>
+                            <a:srgbClr val="202020"/>
+                          </a:solidFill>
+                          <a:latin typeface="Calibri"/>
+                        </a:defRPr>
+                      </a:pPr>
+                      <a:r>
+                        <a:t>35.7%</a:t>
+                      </a:r>
+                    </a:p>
+                  </a:txBody>
+                  <a:tcPr anchor="ctr">
+                    <a:solidFill>
+                      <a:srgbClr val="FFFFFF"/>
+                    </a:solidFill>
+                  </a:tcPr>
+                </a:tc>
+                <a:tc>
+                  <a:txBody>
+                    <a:bodyPr/>
+                    <a:lstStyle/>
+                    <a:p>
+                      <a:pPr algn="ctr">
+                        <a:defRPr sz="1200">
+                          <a:solidFill>
+                            <a:srgbClr val="202020"/>
+                          </a:solidFill>
+                          <a:latin typeface="Calibri"/>
+                        </a:defRPr>
+                      </a:pPr>
+                      <a:r>
+                        <a:t>34.07%</a:t>
+                      </a:r>
+                    </a:p>
+                  </a:txBody>
+                  <a:tcPr anchor="ctr">
+                    <a:solidFill>
+                      <a:srgbClr val="FFFFFF"/>
+                    </a:solidFill>
+                  </a:tcPr>
+                </a:tc>
+                <a:tc>
+                  <a:txBody>
+                    <a:bodyPr/>
+                    <a:lstStyle/>
+                    <a:p>
+                      <a:pPr algn="ctr">
+                        <a:defRPr sz="1200">
+                          <a:solidFill>
+                            <a:srgbClr val="202020"/>
+                          </a:solidFill>
+                          <a:latin typeface="Calibri"/>
+                        </a:defRPr>
+                      </a:pPr>
+                      <a:r>
+                        <a:t>−1.6 pp</a:t>
+                      </a:r>
+                    </a:p>
+                  </a:txBody>
+                  <a:tcPr anchor="ctr">
+                    <a:solidFill>
+                      <a:srgbClr val="FFFFFF"/>
+                    </a:solidFill>
+                  </a:tcPr>
+                </a:tc>
+              </a:tr>
+            </a:tbl>
+          </a:graphicData>
+        </a:graphic>
+      </p:graphicFrame>
+    </p:spTree>
+  </p:cSld>
+  <p:clrMapOvr>
+    <a:masterClrMapping/>
+  </p:clrMapOvr>
+</p:sld>
+</file>
+
+<file path=ppt/slides/slide14.xml><?xml version="1.0" encoding="utf-8"?>
+<p:sld xmlns:a="http://schemas.openxmlformats.org/drawingml/2006/main" xmlns:p="http://schemas.openxmlformats.org/presentationml/2006/main" xmlns:r="http://schemas.openxmlformats.org/officeDocument/2006/relationships">
+  <p:cSld>
+    <p:bg>
+      <p:bgPr>
+        <a:solidFill>
+          <a:srgbClr val="FFFFFF"/>
+        </a:solidFill>
+        <a:effectLst/>
+      </p:bgPr>
+    </p:bg>
+    <p:spTree>
+      <p:nvGrpSpPr>
+        <p:cNvPr id="1" name=""/>
+        <p:cNvGrpSpPr/>
+        <p:nvPr/>
+      </p:nvGrpSpPr>
+      <p:grpSpPr/>
+      <p:sp>
+        <p:nvSpPr>
+          <p:cNvPr id="2" name="Rectangle 1"/>
+          <p:cNvSpPr/>
+          <p:nvPr/>
+        </p:nvSpPr>
+        <p:spPr>
+          <a:xfrm>
+            <a:off x="0" y="0"/>
+            <a:ext cx="12191695" cy="1051560"/>
+          </a:xfrm>
+          <a:prstGeom prst="rect">
+            <a:avLst/>
+          </a:prstGeom>
+          <a:solidFill>
+            <a:srgbClr val="1B2A4A"/>
+          </a:solidFill>
+          <a:ln>
+            <a:noFill/>
+          </a:ln>
+        </p:spPr>
+        <p:style>
+          <a:lnRef idx="1">
+            <a:schemeClr val="accent1"/>
+          </a:lnRef>
+          <a:fillRef idx="3">
+            <a:schemeClr val="accent1"/>
+          </a:fillRef>
+          <a:effectRef idx="2">
+            <a:schemeClr val="accent1"/>
+          </a:effectRef>
+          <a:fontRef idx="minor">
+            <a:schemeClr val="lt1"/>
+          </a:fontRef>
+        </p:style>
+        <p:txBody>
+          <a:bodyPr rtlCol="0" anchor="ctr"/>
+          <a:lstStyle/>
+          <a:p>
+            <a:pPr algn="ctr"/>
+          </a:p>
+        </p:txBody>
+      </p:sp>
+      <p:sp>
+        <p:nvSpPr>
+          <p:cNvPr id="3" name="Rectangle 2"/>
+          <p:cNvSpPr/>
+          <p:nvPr/>
+        </p:nvSpPr>
+        <p:spPr>
+          <a:xfrm>
+            <a:off x="0" y="1051560"/>
+            <a:ext cx="12191695" cy="54864"/>
+          </a:xfrm>
+          <a:prstGeom prst="rect">
+            <a:avLst/>
+          </a:prstGeom>
+          <a:solidFill>
+            <a:srgbClr val="E8A838"/>
+          </a:solidFill>
+          <a:ln>
+            <a:noFill/>
+          </a:ln>
+        </p:spPr>
+        <p:style>
+          <a:lnRef idx="1">
+            <a:schemeClr val="accent1"/>
+          </a:lnRef>
+          <a:fillRef idx="3">
+            <a:schemeClr val="accent1"/>
+          </a:fillRef>
+          <a:effectRef idx="2">
+            <a:schemeClr val="accent1"/>
+          </a:effectRef>
+          <a:fontRef idx="minor">
+            <a:schemeClr val="lt1"/>
+          </a:fontRef>
+        </p:style>
+        <p:txBody>
+          <a:bodyPr rtlCol="0" anchor="ctr"/>
+          <a:lstStyle/>
+          <a:p>
+            <a:pPr algn="ctr"/>
+          </a:p>
+        </p:txBody>
+      </p:sp>
+      <p:sp>
+        <p:nvSpPr>
+          <p:cNvPr id="4" name="TextBox 3"/>
+          <p:cNvSpPr txBox="1"/>
+          <p:nvPr/>
+        </p:nvSpPr>
+        <p:spPr>
+          <a:xfrm>
+            <a:off x="548640" y="182880"/>
+            <a:ext cx="10972800" cy="640080"/>
+          </a:xfrm>
+          <a:prstGeom prst="rect">
+            <a:avLst/>
+          </a:prstGeom>
+          <a:noFill/>
+        </p:spPr>
+        <p:txBody>
+          <a:bodyPr wrap="square">
+            <a:spAutoFit/>
+          </a:bodyPr>
+          <a:lstStyle/>
+          <a:p>
+            <a:pPr algn="l">
+              <a:spcAft>
+                <a:spcPts val="200"/>
+              </a:spcAft>
+              <a:defRPr sz="3000" b="1">
+                <a:solidFill>
+                  <a:srgbClr val="FFFFFF"/>
+                </a:solidFill>
+                <a:latin typeface="Calibri"/>
+              </a:defRPr>
+              <a:lnSpc>
+                <a:spcPct val="114999"/>
+              </a:lnSpc>
+            </a:pPr>
+            <a:r>
               <a:t>Demo &amp; Command-Line Interface</a:t>
             </a:r>
           </a:p>
@@ -6515,7 +9379,7 @@
 </p:sld>
 </file>
 
-<file path=ppt/slides/slide13.xml><?xml version="1.0" encoding="utf-8"?>
+<file path=ppt/slides/slide15.xml><?xml version="1.0" encoding="utf-8"?>
 <p:sld xmlns:a="http://schemas.openxmlformats.org/drawingml/2006/main" xmlns:p="http://schemas.openxmlformats.org/presentationml/2006/main" xmlns:r="http://schemas.openxmlformats.org/officeDocument/2006/relationships">
   <p:cSld>
     <p:bg>
@@ -9068,6 +11932,527 @@
               </a:lnSpc>
             </a:pPr>
             <a:r>
+              <a:t>Data Analysis</a:t>
+            </a:r>
+          </a:p>
+        </p:txBody>
+      </p:sp>
+      <p:pic>
+        <p:nvPicPr>
+          <p:cNvPr id="5" name="Picture 4" descr="class_distribution.png"/>
+          <p:cNvPicPr>
+            <a:picLocks noChangeAspect="1"/>
+          </p:cNvPicPr>
+          <p:nvPr/>
+        </p:nvPicPr>
+        <p:blipFill>
+          <a:blip r:embed="rId2"/>
+          <a:stretch>
+            <a:fillRect/>
+          </a:stretch>
+        </p:blipFill>
+        <p:spPr>
+          <a:xfrm>
+            <a:off x="274320" y="1371600"/>
+            <a:ext cx="5669280" cy="1964338"/>
+          </a:xfrm>
+          <a:prstGeom prst="rect">
+            <a:avLst/>
+          </a:prstGeom>
+        </p:spPr>
+      </p:pic>
+      <p:pic>
+        <p:nvPicPr>
+          <p:cNvPr id="6" name="Picture 5" descr="text_length_distribution.png"/>
+          <p:cNvPicPr>
+            <a:picLocks noChangeAspect="1"/>
+          </p:cNvPicPr>
+          <p:nvPr/>
+        </p:nvPicPr>
+        <p:blipFill>
+          <a:blip r:embed="rId3"/>
+          <a:stretch>
+            <a:fillRect/>
+          </a:stretch>
+        </p:blipFill>
+        <p:spPr>
+          <a:xfrm>
+            <a:off x="6217920" y="1371600"/>
+            <a:ext cx="5669280" cy="1964338"/>
+          </a:xfrm>
+          <a:prstGeom prst="rect">
+            <a:avLst/>
+          </a:prstGeom>
+        </p:spPr>
+      </p:pic>
+      <p:sp>
+        <p:nvSpPr>
+          <p:cNvPr id="7" name="TextBox 6"/>
+          <p:cNvSpPr txBox="1"/>
+          <p:nvPr/>
+        </p:nvSpPr>
+        <p:spPr>
+          <a:xfrm>
+            <a:off x="457200" y="4846320"/>
+            <a:ext cx="10972800" cy="1828800"/>
+          </a:xfrm>
+          <a:prstGeom prst="rect">
+            <a:avLst/>
+          </a:prstGeom>
+          <a:noFill/>
+        </p:spPr>
+        <p:txBody>
+          <a:bodyPr wrap="square">
+            <a:spAutoFit/>
+          </a:bodyPr>
+          <a:lstStyle/>
+          <a:p>
+            <a:pPr algn="l">
+              <a:spcAft>
+                <a:spcPts val="400"/>
+              </a:spcAft>
+              <a:defRPr sz="1300" b="0">
+                <a:solidFill>
+                  <a:srgbClr val="202020"/>
+                </a:solidFill>
+                <a:latin typeface="Calibri"/>
+              </a:defRPr>
+              <a:lnSpc>
+                <a:spcPct val="130000"/>
+              </a:lnSpc>
+            </a:pPr>
+            <a:r>
+              <a:t>• FOMC: 49.4% neutral (imbalanced) -&gt; weighted cross-entropy needed</a:t>
+            </a:r>
+          </a:p>
+          <a:p>
+            <a:pPr algn="l">
+              <a:spcAft>
+                <a:spcPts val="400"/>
+              </a:spcAft>
+              <a:defRPr sz="1300" b="0">
+                <a:solidFill>
+                  <a:srgbClr val="202020"/>
+                </a:solidFill>
+                <a:latin typeface="Calibri"/>
+              </a:defRPr>
+              <a:lnSpc>
+                <a:spcPct val="130000"/>
+              </a:lnSpc>
+            </a:pPr>
+            <a:r>
+              <a:t>• FOMC sentences longer (avg 30 words) vs FPB (avg 22 words) -&gt; harder context integration</a:t>
+            </a:r>
+          </a:p>
+          <a:p>
+            <a:pPr algn="l">
+              <a:spcAft>
+                <a:spcPts val="400"/>
+              </a:spcAft>
+              <a:defRPr sz="1300" b="0">
+                <a:solidFill>
+                  <a:srgbClr val="202020"/>
+                </a:solidFill>
+                <a:latin typeface="Calibri"/>
+              </a:defRPr>
+              <a:lnSpc>
+                <a:spcPct val="130000"/>
+              </a:lnSpc>
+            </a:pPr>
+            <a:r>
+              <a:t>• Hawkish words overlap with neutral class -&gt; lexicon rules fail (41.5% accuracy)</a:t>
+            </a:r>
+          </a:p>
+        </p:txBody>
+      </p:sp>
+    </p:spTree>
+  </p:cSld>
+  <p:clrMapOvr>
+    <a:masterClrMapping/>
+  </p:clrMapOvr>
+</p:sld>
+</file>
+
+<file path=ppt/slides/slide5.xml><?xml version="1.0" encoding="utf-8"?>
+<p:sld xmlns:a="http://schemas.openxmlformats.org/drawingml/2006/main" xmlns:p="http://schemas.openxmlformats.org/presentationml/2006/main" xmlns:r="http://schemas.openxmlformats.org/officeDocument/2006/relationships">
+  <p:cSld>
+    <p:bg>
+      <p:bgPr>
+        <a:solidFill>
+          <a:srgbClr val="FFFFFF"/>
+        </a:solidFill>
+        <a:effectLst/>
+      </p:bgPr>
+    </p:bg>
+    <p:spTree>
+      <p:nvGrpSpPr>
+        <p:cNvPr id="1" name=""/>
+        <p:cNvGrpSpPr/>
+        <p:nvPr/>
+      </p:nvGrpSpPr>
+      <p:grpSpPr/>
+      <p:sp>
+        <p:nvSpPr>
+          <p:cNvPr id="2" name="Rectangle 1"/>
+          <p:cNvSpPr/>
+          <p:nvPr/>
+        </p:nvSpPr>
+        <p:spPr>
+          <a:xfrm>
+            <a:off x="0" y="0"/>
+            <a:ext cx="12191695" cy="1051560"/>
+          </a:xfrm>
+          <a:prstGeom prst="rect">
+            <a:avLst/>
+          </a:prstGeom>
+          <a:solidFill>
+            <a:srgbClr val="1B2A4A"/>
+          </a:solidFill>
+          <a:ln>
+            <a:noFill/>
+          </a:ln>
+        </p:spPr>
+        <p:style>
+          <a:lnRef idx="1">
+            <a:schemeClr val="accent1"/>
+          </a:lnRef>
+          <a:fillRef idx="3">
+            <a:schemeClr val="accent1"/>
+          </a:fillRef>
+          <a:effectRef idx="2">
+            <a:schemeClr val="accent1"/>
+          </a:effectRef>
+          <a:fontRef idx="minor">
+            <a:schemeClr val="lt1"/>
+          </a:fontRef>
+        </p:style>
+        <p:txBody>
+          <a:bodyPr rtlCol="0" anchor="ctr"/>
+          <a:lstStyle/>
+          <a:p>
+            <a:pPr algn="ctr"/>
+          </a:p>
+        </p:txBody>
+      </p:sp>
+      <p:sp>
+        <p:nvSpPr>
+          <p:cNvPr id="3" name="Rectangle 2"/>
+          <p:cNvSpPr/>
+          <p:nvPr/>
+        </p:nvSpPr>
+        <p:spPr>
+          <a:xfrm>
+            <a:off x="0" y="1051560"/>
+            <a:ext cx="12191695" cy="54864"/>
+          </a:xfrm>
+          <a:prstGeom prst="rect">
+            <a:avLst/>
+          </a:prstGeom>
+          <a:solidFill>
+            <a:srgbClr val="E8A838"/>
+          </a:solidFill>
+          <a:ln>
+            <a:noFill/>
+          </a:ln>
+        </p:spPr>
+        <p:style>
+          <a:lnRef idx="1">
+            <a:schemeClr val="accent1"/>
+          </a:lnRef>
+          <a:fillRef idx="3">
+            <a:schemeClr val="accent1"/>
+          </a:fillRef>
+          <a:effectRef idx="2">
+            <a:schemeClr val="accent1"/>
+          </a:effectRef>
+          <a:fontRef idx="minor">
+            <a:schemeClr val="lt1"/>
+          </a:fontRef>
+        </p:style>
+        <p:txBody>
+          <a:bodyPr rtlCol="0" anchor="ctr"/>
+          <a:lstStyle/>
+          <a:p>
+            <a:pPr algn="ctr"/>
+          </a:p>
+        </p:txBody>
+      </p:sp>
+      <p:sp>
+        <p:nvSpPr>
+          <p:cNvPr id="4" name="TextBox 3"/>
+          <p:cNvSpPr txBox="1"/>
+          <p:nvPr/>
+        </p:nvSpPr>
+        <p:spPr>
+          <a:xfrm>
+            <a:off x="548640" y="182880"/>
+            <a:ext cx="10972800" cy="640080"/>
+          </a:xfrm>
+          <a:prstGeom prst="rect">
+            <a:avLst/>
+          </a:prstGeom>
+          <a:noFill/>
+        </p:spPr>
+        <p:txBody>
+          <a:bodyPr wrap="square">
+            <a:spAutoFit/>
+          </a:bodyPr>
+          <a:lstStyle/>
+          <a:p>
+            <a:pPr algn="l">
+              <a:spcAft>
+                <a:spcPts val="200"/>
+              </a:spcAft>
+              <a:defRPr sz="3000" b="1">
+                <a:solidFill>
+                  <a:srgbClr val="FFFFFF"/>
+                </a:solidFill>
+                <a:latin typeface="Calibri"/>
+              </a:defRPr>
+              <a:lnSpc>
+                <a:spcPct val="114999"/>
+              </a:lnSpc>
+            </a:pPr>
+            <a:r>
+              <a:t>Data Analysis: Model Performance Overview</a:t>
+            </a:r>
+          </a:p>
+        </p:txBody>
+      </p:sp>
+      <p:pic>
+        <p:nvPicPr>
+          <p:cNvPr id="5" name="Picture 4" descr="performance_progression.png"/>
+          <p:cNvPicPr>
+            <a:picLocks noChangeAspect="1"/>
+          </p:cNvPicPr>
+          <p:nvPr/>
+        </p:nvPicPr>
+        <p:blipFill>
+          <a:blip r:embed="rId2"/>
+          <a:stretch>
+            <a:fillRect/>
+          </a:stretch>
+        </p:blipFill>
+        <p:spPr>
+          <a:xfrm>
+            <a:off x="274320" y="1371600"/>
+            <a:ext cx="11612880" cy="4114800"/>
+          </a:xfrm>
+          <a:prstGeom prst="rect">
+            <a:avLst/>
+          </a:prstGeom>
+        </p:spPr>
+      </p:pic>
+      <p:sp>
+        <p:nvSpPr>
+          <p:cNvPr id="6" name="TextBox 5"/>
+          <p:cNvSpPr txBox="1"/>
+          <p:nvPr/>
+        </p:nvSpPr>
+        <p:spPr>
+          <a:xfrm>
+            <a:off x="457200" y="5669280"/>
+            <a:ext cx="10972800" cy="914400"/>
+          </a:xfrm>
+          <a:prstGeom prst="rect">
+            <a:avLst/>
+          </a:prstGeom>
+          <a:noFill/>
+        </p:spPr>
+        <p:txBody>
+          <a:bodyPr wrap="square">
+            <a:spAutoFit/>
+          </a:bodyPr>
+          <a:lstStyle/>
+          <a:p>
+            <a:pPr algn="l">
+              <a:spcAft>
+                <a:spcPts val="400"/>
+              </a:spcAft>
+              <a:defRPr sz="1300" b="0">
+                <a:solidFill>
+                  <a:srgbClr val="202020"/>
+                </a:solidFill>
+                <a:latin typeface="Calibri"/>
+              </a:defRPr>
+              <a:lnSpc>
+                <a:spcPct val="130000"/>
+              </a:lnSpc>
+            </a:pPr>
+            <a:r>
+              <a:t>• Clear monotonic improvement: Baselines -&gt; Pre-trained -&gt; Fine-tuned -&gt; Multi-task</a:t>
+            </a:r>
+          </a:p>
+          <a:p>
+            <a:pPr algn="l">
+              <a:spcAft>
+                <a:spcPts val="400"/>
+              </a:spcAft>
+              <a:defRPr sz="1300" b="0">
+                <a:solidFill>
+                  <a:srgbClr val="202020"/>
+                </a:solidFill>
+                <a:latin typeface="Calibri"/>
+              </a:defRPr>
+              <a:lnSpc>
+                <a:spcPct val="130000"/>
+              </a:lnSpc>
+            </a:pPr>
+            <a:r>
+              <a:t>• Sentiment-Stance gap persists across all model families (fundamental task difficulty difference)</a:t>
+            </a:r>
+          </a:p>
+        </p:txBody>
+      </p:sp>
+    </p:spTree>
+  </p:cSld>
+  <p:clrMapOvr>
+    <a:masterClrMapping/>
+  </p:clrMapOvr>
+</p:sld>
+</file>
+
+<file path=ppt/slides/slide6.xml><?xml version="1.0" encoding="utf-8"?>
+<p:sld xmlns:a="http://schemas.openxmlformats.org/drawingml/2006/main" xmlns:p="http://schemas.openxmlformats.org/presentationml/2006/main" xmlns:r="http://schemas.openxmlformats.org/officeDocument/2006/relationships">
+  <p:cSld>
+    <p:bg>
+      <p:bgPr>
+        <a:solidFill>
+          <a:srgbClr val="FFFFFF"/>
+        </a:solidFill>
+        <a:effectLst/>
+      </p:bgPr>
+    </p:bg>
+    <p:spTree>
+      <p:nvGrpSpPr>
+        <p:cNvPr id="1" name=""/>
+        <p:cNvGrpSpPr/>
+        <p:nvPr/>
+      </p:nvGrpSpPr>
+      <p:grpSpPr/>
+      <p:sp>
+        <p:nvSpPr>
+          <p:cNvPr id="2" name="Rectangle 1"/>
+          <p:cNvSpPr/>
+          <p:nvPr/>
+        </p:nvSpPr>
+        <p:spPr>
+          <a:xfrm>
+            <a:off x="0" y="0"/>
+            <a:ext cx="12191695" cy="1051560"/>
+          </a:xfrm>
+          <a:prstGeom prst="rect">
+            <a:avLst/>
+          </a:prstGeom>
+          <a:solidFill>
+            <a:srgbClr val="1B2A4A"/>
+          </a:solidFill>
+          <a:ln>
+            <a:noFill/>
+          </a:ln>
+        </p:spPr>
+        <p:style>
+          <a:lnRef idx="1">
+            <a:schemeClr val="accent1"/>
+          </a:lnRef>
+          <a:fillRef idx="3">
+            <a:schemeClr val="accent1"/>
+          </a:fillRef>
+          <a:effectRef idx="2">
+            <a:schemeClr val="accent1"/>
+          </a:effectRef>
+          <a:fontRef idx="minor">
+            <a:schemeClr val="lt1"/>
+          </a:fontRef>
+        </p:style>
+        <p:txBody>
+          <a:bodyPr rtlCol="0" anchor="ctr"/>
+          <a:lstStyle/>
+          <a:p>
+            <a:pPr algn="ctr"/>
+          </a:p>
+        </p:txBody>
+      </p:sp>
+      <p:sp>
+        <p:nvSpPr>
+          <p:cNvPr id="3" name="Rectangle 2"/>
+          <p:cNvSpPr/>
+          <p:nvPr/>
+        </p:nvSpPr>
+        <p:spPr>
+          <a:xfrm>
+            <a:off x="0" y="1051560"/>
+            <a:ext cx="12191695" cy="54864"/>
+          </a:xfrm>
+          <a:prstGeom prst="rect">
+            <a:avLst/>
+          </a:prstGeom>
+          <a:solidFill>
+            <a:srgbClr val="E8A838"/>
+          </a:solidFill>
+          <a:ln>
+            <a:noFill/>
+          </a:ln>
+        </p:spPr>
+        <p:style>
+          <a:lnRef idx="1">
+            <a:schemeClr val="accent1"/>
+          </a:lnRef>
+          <a:fillRef idx="3">
+            <a:schemeClr val="accent1"/>
+          </a:fillRef>
+          <a:effectRef idx="2">
+            <a:schemeClr val="accent1"/>
+          </a:effectRef>
+          <a:fontRef idx="minor">
+            <a:schemeClr val="lt1"/>
+          </a:fontRef>
+        </p:style>
+        <p:txBody>
+          <a:bodyPr rtlCol="0" anchor="ctr"/>
+          <a:lstStyle/>
+          <a:p>
+            <a:pPr algn="ctr"/>
+          </a:p>
+        </p:txBody>
+      </p:sp>
+      <p:sp>
+        <p:nvSpPr>
+          <p:cNvPr id="4" name="TextBox 3"/>
+          <p:cNvSpPr txBox="1"/>
+          <p:nvPr/>
+        </p:nvSpPr>
+        <p:spPr>
+          <a:xfrm>
+            <a:off x="548640" y="182880"/>
+            <a:ext cx="10972800" cy="640080"/>
+          </a:xfrm>
+          <a:prstGeom prst="rect">
+            <a:avLst/>
+          </a:prstGeom>
+          <a:noFill/>
+        </p:spPr>
+        <p:txBody>
+          <a:bodyPr wrap="square">
+            <a:spAutoFit/>
+          </a:bodyPr>
+          <a:lstStyle/>
+          <a:p>
+            <a:pPr algn="l">
+              <a:spcAft>
+                <a:spcPts val="200"/>
+              </a:spcAft>
+              <a:defRPr sz="3000" b="1">
+                <a:solidFill>
+                  <a:srgbClr val="FFFFFF"/>
+                </a:solidFill>
+                <a:latin typeface="Calibri"/>
+              </a:defRPr>
+              <a:lnSpc>
+                <a:spcPct val="114999"/>
+              </a:lnSpc>
+            </a:pPr>
+            <a:r>
               <a:t>Modelling Pipeline Overview</a:t>
             </a:r>
           </a:p>
@@ -10026,7 +13411,7 @@
 </p:sld>
 </file>
 
-<file path=ppt/slides/slide5.xml><?xml version="1.0" encoding="utf-8"?>
+<file path=ppt/slides/slide7.xml><?xml version="1.0" encoding="utf-8"?>
 <p:sld xmlns:a="http://schemas.openxmlformats.org/drawingml/2006/main" xmlns:p="http://schemas.openxmlformats.org/presentationml/2006/main" xmlns:r="http://schemas.openxmlformats.org/officeDocument/2006/relationships">
   <p:cSld>
     <p:bg>
@@ -11139,7 +14524,7 @@
 </p:sld>
 </file>
 
-<file path=ppt/slides/slide6.xml><?xml version="1.0" encoding="utf-8"?>
+<file path=ppt/slides/slide8.xml><?xml version="1.0" encoding="utf-8"?>
 <p:sld xmlns:a="http://schemas.openxmlformats.org/drawingml/2006/main" xmlns:p="http://schemas.openxmlformats.org/presentationml/2006/main" xmlns:r="http://schemas.openxmlformats.org/officeDocument/2006/relationships">
   <p:cSld>
     <p:bg>
@@ -12335,7 +15720,7 @@
 </p:sld>
 </file>
 
-<file path=ppt/slides/slide7.xml><?xml version="1.0" encoding="utf-8"?>
+<file path=ppt/slides/slide9.xml><?xml version="1.0" encoding="utf-8"?>
 <p:sld xmlns:a="http://schemas.openxmlformats.org/drawingml/2006/main" xmlns:p="http://schemas.openxmlformats.org/presentationml/2006/main" xmlns:r="http://schemas.openxmlformats.org/officeDocument/2006/relationships">
   <p:cSld>
     <p:bg>
@@ -13001,2868 +16386,6 @@
           </a:p>
         </p:txBody>
       </p:sp>
-    </p:spTree>
-  </p:cSld>
-  <p:clrMapOvr>
-    <a:masterClrMapping/>
-  </p:clrMapOvr>
-</p:sld>
-</file>
-
-<file path=ppt/slides/slide8.xml><?xml version="1.0" encoding="utf-8"?>
-<p:sld xmlns:a="http://schemas.openxmlformats.org/drawingml/2006/main" xmlns:p="http://schemas.openxmlformats.org/presentationml/2006/main" xmlns:r="http://schemas.openxmlformats.org/officeDocument/2006/relationships">
-  <p:cSld>
-    <p:bg>
-      <p:bgPr>
-        <a:solidFill>
-          <a:srgbClr val="FFFFFF"/>
-        </a:solidFill>
-        <a:effectLst/>
-      </p:bgPr>
-    </p:bg>
-    <p:spTree>
-      <p:nvGrpSpPr>
-        <p:cNvPr id="1" name=""/>
-        <p:cNvGrpSpPr/>
-        <p:nvPr/>
-      </p:nvGrpSpPr>
-      <p:grpSpPr/>
-      <p:sp>
-        <p:nvSpPr>
-          <p:cNvPr id="2" name="Rectangle 1"/>
-          <p:cNvSpPr/>
-          <p:nvPr/>
-        </p:nvSpPr>
-        <p:spPr>
-          <a:xfrm>
-            <a:off x="0" y="0"/>
-            <a:ext cx="12191695" cy="1051560"/>
-          </a:xfrm>
-          <a:prstGeom prst="rect">
-            <a:avLst/>
-          </a:prstGeom>
-          <a:solidFill>
-            <a:srgbClr val="1B2A4A"/>
-          </a:solidFill>
-          <a:ln>
-            <a:noFill/>
-          </a:ln>
-        </p:spPr>
-        <p:style>
-          <a:lnRef idx="1">
-            <a:schemeClr val="accent1"/>
-          </a:lnRef>
-          <a:fillRef idx="3">
-            <a:schemeClr val="accent1"/>
-          </a:fillRef>
-          <a:effectRef idx="2">
-            <a:schemeClr val="accent1"/>
-          </a:effectRef>
-          <a:fontRef idx="minor">
-            <a:schemeClr val="lt1"/>
-          </a:fontRef>
-        </p:style>
-        <p:txBody>
-          <a:bodyPr rtlCol="0" anchor="ctr"/>
-          <a:lstStyle/>
-          <a:p>
-            <a:pPr algn="ctr"/>
-          </a:p>
-        </p:txBody>
-      </p:sp>
-      <p:sp>
-        <p:nvSpPr>
-          <p:cNvPr id="3" name="Rectangle 2"/>
-          <p:cNvSpPr/>
-          <p:nvPr/>
-        </p:nvSpPr>
-        <p:spPr>
-          <a:xfrm>
-            <a:off x="0" y="1051560"/>
-            <a:ext cx="12191695" cy="54864"/>
-          </a:xfrm>
-          <a:prstGeom prst="rect">
-            <a:avLst/>
-          </a:prstGeom>
-          <a:solidFill>
-            <a:srgbClr val="E8A838"/>
-          </a:solidFill>
-          <a:ln>
-            <a:noFill/>
-          </a:ln>
-        </p:spPr>
-        <p:style>
-          <a:lnRef idx="1">
-            <a:schemeClr val="accent1"/>
-          </a:lnRef>
-          <a:fillRef idx="3">
-            <a:schemeClr val="accent1"/>
-          </a:fillRef>
-          <a:effectRef idx="2">
-            <a:schemeClr val="accent1"/>
-          </a:effectRef>
-          <a:fontRef idx="minor">
-            <a:schemeClr val="lt1"/>
-          </a:fontRef>
-        </p:style>
-        <p:txBody>
-          <a:bodyPr rtlCol="0" anchor="ctr"/>
-          <a:lstStyle/>
-          <a:p>
-            <a:pPr algn="ctr"/>
-          </a:p>
-        </p:txBody>
-      </p:sp>
-      <p:sp>
-        <p:nvSpPr>
-          <p:cNvPr id="4" name="TextBox 3"/>
-          <p:cNvSpPr txBox="1"/>
-          <p:nvPr/>
-        </p:nvSpPr>
-        <p:spPr>
-          <a:xfrm>
-            <a:off x="548640" y="182880"/>
-            <a:ext cx="10972800" cy="640080"/>
-          </a:xfrm>
-          <a:prstGeom prst="rect">
-            <a:avLst/>
-          </a:prstGeom>
-          <a:noFill/>
-        </p:spPr>
-        <p:txBody>
-          <a:bodyPr wrap="square">
-            <a:spAutoFit/>
-          </a:bodyPr>
-          <a:lstStyle/>
-          <a:p>
-            <a:pPr algn="l">
-              <a:spcAft>
-                <a:spcPts val="200"/>
-              </a:spcAft>
-              <a:defRPr sz="3000" b="1">
-                <a:solidFill>
-                  <a:srgbClr val="FFFFFF"/>
-                </a:solidFill>
-                <a:latin typeface="Calibri"/>
-              </a:defRPr>
-              <a:lnSpc>
-                <a:spcPct val="114999"/>
-              </a:lnSpc>
-            </a:pPr>
-            <a:r>
-              <a:t>Multi-task Learning (Extended Method)</a:t>
-            </a:r>
-          </a:p>
-        </p:txBody>
-      </p:sp>
-      <p:sp>
-        <p:nvSpPr>
-          <p:cNvPr id="5" name="TextBox 4"/>
-          <p:cNvSpPr txBox="1"/>
-          <p:nvPr/>
-        </p:nvSpPr>
-        <p:spPr>
-          <a:xfrm>
-            <a:off x="548640" y="658368"/>
-            <a:ext cx="10972800" cy="365760"/>
-          </a:xfrm>
-          <a:prstGeom prst="rect">
-            <a:avLst/>
-          </a:prstGeom>
-          <a:noFill/>
-        </p:spPr>
-        <p:txBody>
-          <a:bodyPr wrap="square">
-            <a:spAutoFit/>
-          </a:bodyPr>
-          <a:lstStyle/>
-          <a:p>
-            <a:pPr algn="l">
-              <a:spcAft>
-                <a:spcPts val="200"/>
-              </a:spcAft>
-              <a:defRPr sz="1400" b="0">
-                <a:solidFill>
-                  <a:srgbClr val="D6E8F7"/>
-                </a:solidFill>
-                <a:latin typeface="Calibri"/>
-              </a:defRPr>
-              <a:lnSpc>
-                <a:spcPct val="114999"/>
-              </a:lnSpc>
-            </a:pPr>
-            <a:r>
-              <a:t>Best-performing architecture</a:t>
-            </a:r>
-          </a:p>
-        </p:txBody>
-      </p:sp>
-      <p:sp>
-        <p:nvSpPr>
-          <p:cNvPr id="6" name="Rounded Rectangle 5"/>
-          <p:cNvSpPr/>
-          <p:nvPr/>
-        </p:nvSpPr>
-        <p:spPr>
-          <a:xfrm>
-            <a:off x="3200400" y="1463040"/>
-            <a:ext cx="5760720" cy="640080"/>
-          </a:xfrm>
-          <a:prstGeom prst="roundRect">
-            <a:avLst/>
-          </a:prstGeom>
-          <a:solidFill>
-            <a:srgbClr val="1B2A4A"/>
-          </a:solidFill>
-          <a:ln>
-            <a:noFill/>
-          </a:ln>
-        </p:spPr>
-        <p:style>
-          <a:lnRef idx="1">
-            <a:schemeClr val="accent1"/>
-          </a:lnRef>
-          <a:fillRef idx="3">
-            <a:schemeClr val="accent1"/>
-          </a:fillRef>
-          <a:effectRef idx="2">
-            <a:schemeClr val="accent1"/>
-          </a:effectRef>
-          <a:fontRef idx="minor">
-            <a:schemeClr val="lt1"/>
-          </a:fontRef>
-        </p:style>
-        <p:txBody>
-          <a:bodyPr rtlCol="0" anchor="ctr" wrap="square"/>
-          <a:lstStyle/>
-          <a:p>
-            <a:pPr algn="ctr">
-              <a:spcBef>
-                <a:spcPts val="0"/>
-              </a:spcBef>
-              <a:spcAft>
-                <a:spcPts val="0"/>
-              </a:spcAft>
-              <a:defRPr sz="1500" b="1">
-                <a:solidFill>
-                  <a:srgbClr val="FFFFFF"/>
-                </a:solidFill>
-                <a:latin typeface="Calibri"/>
-              </a:defRPr>
-            </a:pPr>
-            <a:r>
-              <a:t>Shared FinBERT Encoder (12 layers, 768-d)</a:t>
-            </a:r>
-          </a:p>
-        </p:txBody>
-      </p:sp>
-      <p:sp>
-        <p:nvSpPr>
-          <p:cNvPr id="7" name="Rectangle 6"/>
-          <p:cNvSpPr/>
-          <p:nvPr/>
-        </p:nvSpPr>
-        <p:spPr>
-          <a:xfrm>
-            <a:off x="4114800" y="2103120"/>
-            <a:ext cx="54864" cy="457200"/>
-          </a:xfrm>
-          <a:prstGeom prst="rect">
-            <a:avLst/>
-          </a:prstGeom>
-          <a:solidFill>
-            <a:srgbClr val="E8A838"/>
-          </a:solidFill>
-          <a:ln>
-            <a:noFill/>
-          </a:ln>
-        </p:spPr>
-        <p:style>
-          <a:lnRef idx="1">
-            <a:schemeClr val="accent1"/>
-          </a:lnRef>
-          <a:fillRef idx="3">
-            <a:schemeClr val="accent1"/>
-          </a:fillRef>
-          <a:effectRef idx="2">
-            <a:schemeClr val="accent1"/>
-          </a:effectRef>
-          <a:fontRef idx="minor">
-            <a:schemeClr val="lt1"/>
-          </a:fontRef>
-        </p:style>
-        <p:txBody>
-          <a:bodyPr rtlCol="0" anchor="ctr"/>
-          <a:lstStyle/>
-          <a:p>
-            <a:pPr algn="ctr"/>
-          </a:p>
-        </p:txBody>
-      </p:sp>
-      <p:sp>
-        <p:nvSpPr>
-          <p:cNvPr id="8" name="Rectangle 7"/>
-          <p:cNvSpPr/>
-          <p:nvPr/>
-        </p:nvSpPr>
-        <p:spPr>
-          <a:xfrm>
-            <a:off x="7772400" y="2103120"/>
-            <a:ext cx="54864" cy="457200"/>
-          </a:xfrm>
-          <a:prstGeom prst="rect">
-            <a:avLst/>
-          </a:prstGeom>
-          <a:solidFill>
-            <a:srgbClr val="E8A838"/>
-          </a:solidFill>
-          <a:ln>
-            <a:noFill/>
-          </a:ln>
-        </p:spPr>
-        <p:style>
-          <a:lnRef idx="1">
-            <a:schemeClr val="accent1"/>
-          </a:lnRef>
-          <a:fillRef idx="3">
-            <a:schemeClr val="accent1"/>
-          </a:fillRef>
-          <a:effectRef idx="2">
-            <a:schemeClr val="accent1"/>
-          </a:effectRef>
-          <a:fontRef idx="minor">
-            <a:schemeClr val="lt1"/>
-          </a:fontRef>
-        </p:style>
-        <p:txBody>
-          <a:bodyPr rtlCol="0" anchor="ctr"/>
-          <a:lstStyle/>
-          <a:p>
-            <a:pPr algn="ctr"/>
-          </a:p>
-        </p:txBody>
-      </p:sp>
-      <p:sp>
-        <p:nvSpPr>
-          <p:cNvPr id="9" name="Rounded Rectangle 8"/>
-          <p:cNvSpPr/>
-          <p:nvPr/>
-        </p:nvSpPr>
-        <p:spPr>
-          <a:xfrm>
-            <a:off x="2560320" y="2560320"/>
-            <a:ext cx="3200400" cy="548640"/>
-          </a:xfrm>
-          <a:prstGeom prst="roundRect">
-            <a:avLst/>
-          </a:prstGeom>
-          <a:solidFill>
-            <a:srgbClr val="2C5F8A"/>
-          </a:solidFill>
-          <a:ln>
-            <a:noFill/>
-          </a:ln>
-        </p:spPr>
-        <p:style>
-          <a:lnRef idx="1">
-            <a:schemeClr val="accent1"/>
-          </a:lnRef>
-          <a:fillRef idx="3">
-            <a:schemeClr val="accent1"/>
-          </a:fillRef>
-          <a:effectRef idx="2">
-            <a:schemeClr val="accent1"/>
-          </a:effectRef>
-          <a:fontRef idx="minor">
-            <a:schemeClr val="lt1"/>
-          </a:fontRef>
-        </p:style>
-        <p:txBody>
-          <a:bodyPr rtlCol="0" anchor="ctr" wrap="square"/>
-          <a:lstStyle/>
-          <a:p>
-            <a:pPr algn="ctr">
-              <a:spcBef>
-                <a:spcPts val="0"/>
-              </a:spcBef>
-              <a:spcAft>
-                <a:spcPts val="0"/>
-              </a:spcAft>
-              <a:defRPr sz="1300" b="1">
-                <a:solidFill>
-                  <a:srgbClr val="FFFFFF"/>
-                </a:solidFill>
-                <a:latin typeface="Calibri"/>
-              </a:defRPr>
-            </a:pPr>
-            <a:r>
-              <a:t>Sentiment Head</a:t>
-            </a:r>
-            <a:br/>
-            <a:r>
-              <a:t>Linear(768, 3)</a:t>
-            </a:r>
-          </a:p>
-        </p:txBody>
-      </p:sp>
-      <p:sp>
-        <p:nvSpPr>
-          <p:cNvPr id="10" name="Rounded Rectangle 9"/>
-          <p:cNvSpPr/>
-          <p:nvPr/>
-        </p:nvSpPr>
-        <p:spPr>
-          <a:xfrm>
-            <a:off x="6400800" y="2560320"/>
-            <a:ext cx="3200400" cy="548640"/>
-          </a:xfrm>
-          <a:prstGeom prst="roundRect">
-            <a:avLst/>
-          </a:prstGeom>
-          <a:solidFill>
-            <a:srgbClr val="2C5F8A"/>
-          </a:solidFill>
-          <a:ln>
-            <a:noFill/>
-          </a:ln>
-        </p:spPr>
-        <p:style>
-          <a:lnRef idx="1">
-            <a:schemeClr val="accent1"/>
-          </a:lnRef>
-          <a:fillRef idx="3">
-            <a:schemeClr val="accent1"/>
-          </a:fillRef>
-          <a:effectRef idx="2">
-            <a:schemeClr val="accent1"/>
-          </a:effectRef>
-          <a:fontRef idx="minor">
-            <a:schemeClr val="lt1"/>
-          </a:fontRef>
-        </p:style>
-        <p:txBody>
-          <a:bodyPr rtlCol="0" anchor="ctr" wrap="square"/>
-          <a:lstStyle/>
-          <a:p>
-            <a:pPr algn="ctr">
-              <a:spcBef>
-                <a:spcPts val="0"/>
-              </a:spcBef>
-              <a:spcAft>
-                <a:spcPts val="0"/>
-              </a:spcAft>
-              <a:defRPr sz="1300" b="1">
-                <a:solidFill>
-                  <a:srgbClr val="FFFFFF"/>
-                </a:solidFill>
-                <a:latin typeface="Calibri"/>
-              </a:defRPr>
-            </a:pPr>
-            <a:r>
-              <a:t>Stance Head</a:t>
-            </a:r>
-            <a:br/>
-            <a:r>
-              <a:t>Linear(768, 3)</a:t>
-            </a:r>
-          </a:p>
-        </p:txBody>
-      </p:sp>
-      <p:sp>
-        <p:nvSpPr>
-          <p:cNvPr id="11" name="TextBox 10"/>
-          <p:cNvSpPr txBox="1"/>
-          <p:nvPr/>
-        </p:nvSpPr>
-        <p:spPr>
-          <a:xfrm>
-            <a:off x="457200" y="3474720"/>
-            <a:ext cx="5486400" cy="365760"/>
-          </a:xfrm>
-          <a:prstGeom prst="rect">
-            <a:avLst/>
-          </a:prstGeom>
-          <a:noFill/>
-        </p:spPr>
-        <p:txBody>
-          <a:bodyPr wrap="square">
-            <a:spAutoFit/>
-          </a:bodyPr>
-          <a:lstStyle/>
-          <a:p>
-            <a:pPr algn="l">
-              <a:spcAft>
-                <a:spcPts val="200"/>
-              </a:spcAft>
-              <a:defRPr sz="1800" b="1">
-                <a:solidFill>
-                  <a:srgbClr val="1B2A4A"/>
-                </a:solidFill>
-                <a:latin typeface="Calibri"/>
-              </a:defRPr>
-              <a:lnSpc>
-                <a:spcPct val="114999"/>
-              </a:lnSpc>
-            </a:pPr>
-            <a:r>
-              <a:t>Training Configuration</a:t>
-            </a:r>
-          </a:p>
-        </p:txBody>
-      </p:sp>
-      <p:sp>
-        <p:nvSpPr>
-          <p:cNvPr id="12" name="TextBox 11"/>
-          <p:cNvSpPr txBox="1"/>
-          <p:nvPr/>
-        </p:nvSpPr>
-        <p:spPr>
-          <a:xfrm>
-            <a:off x="457200" y="3840480"/>
-            <a:ext cx="5303520" cy="2560320"/>
-          </a:xfrm>
-          <a:prstGeom prst="rect">
-            <a:avLst/>
-          </a:prstGeom>
-          <a:noFill/>
-        </p:spPr>
-        <p:txBody>
-          <a:bodyPr wrap="square">
-            <a:spAutoFit/>
-          </a:bodyPr>
-          <a:lstStyle/>
-          <a:p>
-            <a:pPr algn="l">
-              <a:spcAft>
-                <a:spcPts val="400"/>
-              </a:spcAft>
-              <a:defRPr sz="1300" b="0">
-                <a:solidFill>
-                  <a:srgbClr val="202020"/>
-                </a:solidFill>
-                <a:latin typeface="Calibri"/>
-              </a:defRPr>
-              <a:lnSpc>
-                <a:spcPct val="130000"/>
-              </a:lnSpc>
-            </a:pPr>
-            <a:r>
-              <a:t>• Alternating task batches: sentiment batch → stance batch</a:t>
-            </a:r>
-          </a:p>
-          <a:p>
-            <a:pPr algn="l">
-              <a:spcAft>
-                <a:spcPts val="400"/>
-              </a:spcAft>
-              <a:defRPr sz="1300" b="0">
-                <a:solidFill>
-                  <a:srgbClr val="202020"/>
-                </a:solidFill>
-                <a:latin typeface="Calibri"/>
-              </a:defRPr>
-              <a:lnSpc>
-                <a:spcPct val="130000"/>
-              </a:lnSpc>
-            </a:pPr>
-            <a:r>
-              <a:t>• Shared encoder gradients from both tasks each step</a:t>
-            </a:r>
-          </a:p>
-          <a:p>
-            <a:pPr algn="l">
-              <a:spcAft>
-                <a:spcPts val="400"/>
-              </a:spcAft>
-              <a:defRPr sz="1300" b="0">
-                <a:solidFill>
-                  <a:srgbClr val="202020"/>
-                </a:solidFill>
-                <a:latin typeface="Calibri"/>
-              </a:defRPr>
-              <a:lnSpc>
-                <a:spcPct val="130000"/>
-              </a:lnSpc>
-            </a:pPr>
-            <a:r>
-              <a:t>• Weighted CE for stance (handles class imbalance)</a:t>
-            </a:r>
-          </a:p>
-          <a:p>
-            <a:pPr algn="l">
-              <a:spcAft>
-                <a:spcPts val="400"/>
-              </a:spcAft>
-              <a:defRPr sz="1300" b="0">
-                <a:solidFill>
-                  <a:srgbClr val="202020"/>
-                </a:solidFill>
-                <a:latin typeface="Calibri"/>
-              </a:defRPr>
-              <a:lnSpc>
-                <a:spcPct val="130000"/>
-              </a:lnSpc>
-            </a:pPr>
-            <a:r>
-              <a:t>• Standard CE for sentiment (more balanced)</a:t>
-            </a:r>
-          </a:p>
-          <a:p>
-            <a:pPr algn="l">
-              <a:spcAft>
-                <a:spcPts val="400"/>
-              </a:spcAft>
-              <a:defRPr sz="1300" b="0">
-                <a:solidFill>
-                  <a:srgbClr val="202020"/>
-                </a:solidFill>
-                <a:latin typeface="Calibri"/>
-              </a:defRPr>
-              <a:lnSpc>
-                <a:spcPct val="130000"/>
-              </a:lnSpc>
-            </a:pPr>
-            <a:r>
-              <a:t>• AdamW, lr=2e-5, 8 epochs, linear warmup + decay</a:t>
-            </a:r>
-          </a:p>
-          <a:p>
-            <a:pPr algn="l">
-              <a:spcAft>
-                <a:spcPts val="400"/>
-              </a:spcAft>
-              <a:defRPr sz="1300" b="0">
-                <a:solidFill>
-                  <a:srgbClr val="202020"/>
-                </a:solidFill>
-                <a:latin typeface="Calibri"/>
-              </a:defRPr>
-              <a:lnSpc>
-                <a:spcPct val="130000"/>
-              </a:lnSpc>
-            </a:pPr>
-            <a:r>
-              <a:t>• Early stopping on combined validation loss</a:t>
-            </a:r>
-          </a:p>
-        </p:txBody>
-      </p:sp>
-      <p:sp>
-        <p:nvSpPr>
-          <p:cNvPr id="13" name="TextBox 12"/>
-          <p:cNvSpPr txBox="1"/>
-          <p:nvPr/>
-        </p:nvSpPr>
-        <p:spPr>
-          <a:xfrm>
-            <a:off x="6400800" y="3474720"/>
-            <a:ext cx="5303520" cy="365760"/>
-          </a:xfrm>
-          <a:prstGeom prst="rect">
-            <a:avLst/>
-          </a:prstGeom>
-          <a:noFill/>
-        </p:spPr>
-        <p:txBody>
-          <a:bodyPr wrap="square">
-            <a:spAutoFit/>
-          </a:bodyPr>
-          <a:lstStyle/>
-          <a:p>
-            <a:pPr algn="l">
-              <a:spcAft>
-                <a:spcPts val="200"/>
-              </a:spcAft>
-              <a:defRPr sz="1800" b="1">
-                <a:solidFill>
-                  <a:srgbClr val="1B2A4A"/>
-                </a:solidFill>
-                <a:latin typeface="Calibri"/>
-              </a:defRPr>
-              <a:lnSpc>
-                <a:spcPct val="114999"/>
-              </a:lnSpc>
-            </a:pPr>
-            <a:r>
-              <a:t>Results (BEST MODEL)</a:t>
-            </a:r>
-          </a:p>
-        </p:txBody>
-      </p:sp>
-      <p:graphicFrame>
-        <p:nvGraphicFramePr>
-          <p:cNvPr id="14" name="Table 13"/>
-          <p:cNvGraphicFramePr>
-            <a:graphicFrameLocks noGrp="1"/>
-          </p:cNvGraphicFramePr>
-          <p:nvPr/>
-        </p:nvGraphicFramePr>
-        <p:xfrm>
-          <a:off x="6400800" y="3931920"/>
-          <a:ext cx="4572000" cy="1463040"/>
-        </p:xfrm>
-        <a:graphic>
-          <a:graphicData uri="http://schemas.openxmlformats.org/drawingml/2006/table">
-            <a:tbl>
-              <a:tblPr firstRow="1" bandRow="1">
-                <a:tableStyleId>{5C22544A-7EE6-4342-B048-85BDC9FD1C3A}</a:tableStyleId>
-              </a:tblPr>
-              <a:tblGrid>
-                <a:gridCol w="1645920"/>
-                <a:gridCol w="1463040"/>
-                <a:gridCol w="1463040"/>
-              </a:tblGrid>
-              <a:tr h="365760">
-                <a:tc>
-                  <a:txBody>
-                    <a:bodyPr/>
-                    <a:lstStyle/>
-                    <a:p>
-                      <a:pPr algn="ctr">
-                        <a:defRPr sz="1400" b="1">
-                          <a:solidFill>
-                            <a:srgbClr val="FFFFFF"/>
-                          </a:solidFill>
-                          <a:latin typeface="Calibri"/>
-                        </a:defRPr>
-                      </a:pPr>
-                      <a:r>
-                        <a:t>Metric</a:t>
-                      </a:r>
-                    </a:p>
-                  </a:txBody>
-                  <a:tcPr anchor="ctr">
-                    <a:solidFill>
-                      <a:srgbClr val="1B2A4A"/>
-                    </a:solidFill>
-                  </a:tcPr>
-                </a:tc>
-                <a:tc>
-                  <a:txBody>
-                    <a:bodyPr/>
-                    <a:lstStyle/>
-                    <a:p>
-                      <a:pPr algn="ctr">
-                        <a:defRPr sz="1400" b="1">
-                          <a:solidFill>
-                            <a:srgbClr val="FFFFFF"/>
-                          </a:solidFill>
-                          <a:latin typeface="Calibri"/>
-                        </a:defRPr>
-                      </a:pPr>
-                      <a:r>
-                        <a:t>Sentiment</a:t>
-                      </a:r>
-                    </a:p>
-                  </a:txBody>
-                  <a:tcPr anchor="ctr">
-                    <a:solidFill>
-                      <a:srgbClr val="1B2A4A"/>
-                    </a:solidFill>
-                  </a:tcPr>
-                </a:tc>
-                <a:tc>
-                  <a:txBody>
-                    <a:bodyPr/>
-                    <a:lstStyle/>
-                    <a:p>
-                      <a:pPr algn="ctr">
-                        <a:defRPr sz="1400" b="1">
-                          <a:solidFill>
-                            <a:srgbClr val="FFFFFF"/>
-                          </a:solidFill>
-                          <a:latin typeface="Calibri"/>
-                        </a:defRPr>
-                      </a:pPr>
-                      <a:r>
-                        <a:t>Stance</a:t>
-                      </a:r>
-                    </a:p>
-                  </a:txBody>
-                  <a:tcPr anchor="ctr">
-                    <a:solidFill>
-                      <a:srgbClr val="1B2A4A"/>
-                    </a:solidFill>
-                  </a:tcPr>
-                </a:tc>
-              </a:tr>
-              <a:tr h="365760">
-                <a:tc>
-                  <a:txBody>
-                    <a:bodyPr/>
-                    <a:lstStyle/>
-                    <a:p>
-                      <a:pPr algn="ctr">
-                        <a:defRPr sz="1400">
-                          <a:solidFill>
-                            <a:srgbClr val="202020"/>
-                          </a:solidFill>
-                          <a:latin typeface="Calibri"/>
-                        </a:defRPr>
-                      </a:pPr>
-                      <a:r>
-                        <a:t>Accuracy</a:t>
-                      </a:r>
-                    </a:p>
-                  </a:txBody>
-                  <a:tcPr anchor="ctr">
-                    <a:solidFill>
-                      <a:srgbClr val="FFFFFF"/>
-                    </a:solidFill>
-                  </a:tcPr>
-                </a:tc>
-                <a:tc>
-                  <a:txBody>
-                    <a:bodyPr/>
-                    <a:lstStyle/>
-                    <a:p>
-                      <a:pPr algn="ctr">
-                        <a:defRPr sz="1400">
-                          <a:solidFill>
-                            <a:srgbClr val="202020"/>
-                          </a:solidFill>
-                          <a:latin typeface="Calibri"/>
-                        </a:defRPr>
-                      </a:pPr>
-                      <a:r>
-                        <a:t>98.45%</a:t>
-                      </a:r>
-                    </a:p>
-                  </a:txBody>
-                  <a:tcPr anchor="ctr">
-                    <a:solidFill>
-                      <a:srgbClr val="FFFFFF"/>
-                    </a:solidFill>
-                  </a:tcPr>
-                </a:tc>
-                <a:tc>
-                  <a:txBody>
-                    <a:bodyPr/>
-                    <a:lstStyle/>
-                    <a:p>
-                      <a:pPr algn="ctr">
-                        <a:defRPr sz="1400">
-                          <a:solidFill>
-                            <a:srgbClr val="202020"/>
-                          </a:solidFill>
-                          <a:latin typeface="Calibri"/>
-                        </a:defRPr>
-                      </a:pPr>
-                      <a:r>
-                        <a:t>67.74%</a:t>
-                      </a:r>
-                    </a:p>
-                  </a:txBody>
-                  <a:tcPr anchor="ctr">
-                    <a:solidFill>
-                      <a:srgbClr val="FFFFFF"/>
-                    </a:solidFill>
-                  </a:tcPr>
-                </a:tc>
-              </a:tr>
-              <a:tr h="365760">
-                <a:tc>
-                  <a:txBody>
-                    <a:bodyPr/>
-                    <a:lstStyle/>
-                    <a:p>
-                      <a:pPr algn="ctr">
-                        <a:defRPr sz="1400">
-                          <a:solidFill>
-                            <a:srgbClr val="202020"/>
-                          </a:solidFill>
-                          <a:latin typeface="Calibri"/>
-                        </a:defRPr>
-                      </a:pPr>
-                      <a:r>
-                        <a:t>Macro-F1</a:t>
-                      </a:r>
-                    </a:p>
-                  </a:txBody>
-                  <a:tcPr anchor="ctr">
-                    <a:solidFill>
-                      <a:srgbClr val="F2F2F2"/>
-                    </a:solidFill>
-                  </a:tcPr>
-                </a:tc>
-                <a:tc>
-                  <a:txBody>
-                    <a:bodyPr/>
-                    <a:lstStyle/>
-                    <a:p>
-                      <a:pPr algn="ctr">
-                        <a:defRPr sz="1400">
-                          <a:solidFill>
-                            <a:srgbClr val="202020"/>
-                          </a:solidFill>
-                          <a:latin typeface="Calibri"/>
-                        </a:defRPr>
-                      </a:pPr>
-                      <a:r>
-                        <a:t>0.9772</a:t>
-                      </a:r>
-                    </a:p>
-                  </a:txBody>
-                  <a:tcPr anchor="ctr">
-                    <a:solidFill>
-                      <a:srgbClr val="F2F2F2"/>
-                    </a:solidFill>
-                  </a:tcPr>
-                </a:tc>
-                <a:tc>
-                  <a:txBody>
-                    <a:bodyPr/>
-                    <a:lstStyle/>
-                    <a:p>
-                      <a:pPr algn="ctr">
-                        <a:defRPr sz="1400">
-                          <a:solidFill>
-                            <a:srgbClr val="202020"/>
-                          </a:solidFill>
-                          <a:latin typeface="Calibri"/>
-                        </a:defRPr>
-                      </a:pPr>
-                      <a:r>
-                        <a:t>0.6684</a:t>
-                      </a:r>
-                    </a:p>
-                  </a:txBody>
-                  <a:tcPr anchor="ctr">
-                    <a:solidFill>
-                      <a:srgbClr val="F2F2F2"/>
-                    </a:solidFill>
-                  </a:tcPr>
-                </a:tc>
-              </a:tr>
-              <a:tr h="365760">
-                <a:tc>
-                  <a:txBody>
-                    <a:bodyPr/>
-                    <a:lstStyle/>
-                    <a:p>
-                      <a:pPr algn="ctr">
-                        <a:defRPr sz="1400">
-                          <a:solidFill>
-                            <a:srgbClr val="202020"/>
-                          </a:solidFill>
-                          <a:latin typeface="Calibri"/>
-                        </a:defRPr>
-                      </a:pPr>
-                      <a:r>
-                        <a:t>Weighted-F1</a:t>
-                      </a:r>
-                    </a:p>
-                  </a:txBody>
-                  <a:tcPr anchor="ctr">
-                    <a:solidFill>
-                      <a:srgbClr val="FFFFFF"/>
-                    </a:solidFill>
-                  </a:tcPr>
-                </a:tc>
-                <a:tc>
-                  <a:txBody>
-                    <a:bodyPr/>
-                    <a:lstStyle/>
-                    <a:p>
-                      <a:pPr algn="ctr">
-                        <a:defRPr sz="1400">
-                          <a:solidFill>
-                            <a:srgbClr val="202020"/>
-                          </a:solidFill>
-                          <a:latin typeface="Calibri"/>
-                        </a:defRPr>
-                      </a:pPr>
-                      <a:r>
-                        <a:t>0.9800</a:t>
-                      </a:r>
-                    </a:p>
-                  </a:txBody>
-                  <a:tcPr anchor="ctr">
-                    <a:solidFill>
-                      <a:srgbClr val="FFFFFF"/>
-                    </a:solidFill>
-                  </a:tcPr>
-                </a:tc>
-                <a:tc>
-                  <a:txBody>
-                    <a:bodyPr/>
-                    <a:lstStyle/>
-                    <a:p>
-                      <a:pPr algn="ctr">
-                        <a:defRPr sz="1400">
-                          <a:solidFill>
-                            <a:srgbClr val="202020"/>
-                          </a:solidFill>
-                          <a:latin typeface="Calibri"/>
-                        </a:defRPr>
-                      </a:pPr>
-                      <a:r>
-                        <a:t>0.6583</a:t>
-                      </a:r>
-                    </a:p>
-                  </a:txBody>
-                  <a:tcPr anchor="ctr">
-                    <a:solidFill>
-                      <a:srgbClr val="FFFFFF"/>
-                    </a:solidFill>
-                  </a:tcPr>
-                </a:tc>
-              </a:tr>
-            </a:tbl>
-          </a:graphicData>
-        </a:graphic>
-      </p:graphicFrame>
-      <p:sp>
-        <p:nvSpPr>
-          <p:cNvPr id="15" name="TextBox 14"/>
-          <p:cNvSpPr txBox="1"/>
-          <p:nvPr/>
-        </p:nvSpPr>
-        <p:spPr>
-          <a:xfrm>
-            <a:off x="6400800" y="5486400"/>
-            <a:ext cx="5303520" cy="914400"/>
-          </a:xfrm>
-          <a:prstGeom prst="rect">
-            <a:avLst/>
-          </a:prstGeom>
-          <a:noFill/>
-        </p:spPr>
-        <p:txBody>
-          <a:bodyPr wrap="square">
-            <a:spAutoFit/>
-          </a:bodyPr>
-          <a:lstStyle/>
-          <a:p>
-            <a:pPr algn="l">
-              <a:spcAft>
-                <a:spcPts val="400"/>
-              </a:spcAft>
-              <a:defRPr sz="1300" b="0">
-                <a:solidFill>
-                  <a:srgbClr val="27AE60"/>
-                </a:solidFill>
-                <a:latin typeface="Calibri"/>
-              </a:defRPr>
-              <a:lnSpc>
-                <a:spcPct val="130000"/>
-              </a:lnSpc>
-            </a:pPr>
-            <a:r>
-              <a:t>• Improves over single-task FinBERT on BOTH tasks</a:t>
-            </a:r>
-          </a:p>
-          <a:p>
-            <a:pPr algn="l">
-              <a:spcAft>
-                <a:spcPts val="400"/>
-              </a:spcAft>
-              <a:defRPr sz="1300" b="0">
-                <a:solidFill>
-                  <a:srgbClr val="27AE60"/>
-                </a:solidFill>
-                <a:latin typeface="Calibri"/>
-              </a:defRPr>
-              <a:lnSpc>
-                <a:spcPct val="130000"/>
-              </a:lnSpc>
-            </a:pPr>
-            <a:r>
-              <a:t>• Cross-task regularization reduces overfitting</a:t>
-            </a:r>
-          </a:p>
-        </p:txBody>
-      </p:sp>
-    </p:spTree>
-  </p:cSld>
-  <p:clrMapOvr>
-    <a:masterClrMapping/>
-  </p:clrMapOvr>
-</p:sld>
-</file>
-
-<file path=ppt/slides/slide9.xml><?xml version="1.0" encoding="utf-8"?>
-<p:sld xmlns:a="http://schemas.openxmlformats.org/drawingml/2006/main" xmlns:p="http://schemas.openxmlformats.org/presentationml/2006/main" xmlns:r="http://schemas.openxmlformats.org/officeDocument/2006/relationships">
-  <p:cSld>
-    <p:bg>
-      <p:bgPr>
-        <a:solidFill>
-          <a:srgbClr val="FFFFFF"/>
-        </a:solidFill>
-        <a:effectLst/>
-      </p:bgPr>
-    </p:bg>
-    <p:spTree>
-      <p:nvGrpSpPr>
-        <p:cNvPr id="1" name=""/>
-        <p:cNvGrpSpPr/>
-        <p:nvPr/>
-      </p:nvGrpSpPr>
-      <p:grpSpPr/>
-      <p:sp>
-        <p:nvSpPr>
-          <p:cNvPr id="2" name="Rectangle 1"/>
-          <p:cNvSpPr/>
-          <p:nvPr/>
-        </p:nvSpPr>
-        <p:spPr>
-          <a:xfrm>
-            <a:off x="0" y="0"/>
-            <a:ext cx="12191695" cy="1051560"/>
-          </a:xfrm>
-          <a:prstGeom prst="rect">
-            <a:avLst/>
-          </a:prstGeom>
-          <a:solidFill>
-            <a:srgbClr val="1B2A4A"/>
-          </a:solidFill>
-          <a:ln>
-            <a:noFill/>
-          </a:ln>
-        </p:spPr>
-        <p:style>
-          <a:lnRef idx="1">
-            <a:schemeClr val="accent1"/>
-          </a:lnRef>
-          <a:fillRef idx="3">
-            <a:schemeClr val="accent1"/>
-          </a:fillRef>
-          <a:effectRef idx="2">
-            <a:schemeClr val="accent1"/>
-          </a:effectRef>
-          <a:fontRef idx="minor">
-            <a:schemeClr val="lt1"/>
-          </a:fontRef>
-        </p:style>
-        <p:txBody>
-          <a:bodyPr rtlCol="0" anchor="ctr"/>
-          <a:lstStyle/>
-          <a:p>
-            <a:pPr algn="ctr"/>
-          </a:p>
-        </p:txBody>
-      </p:sp>
-      <p:sp>
-        <p:nvSpPr>
-          <p:cNvPr id="3" name="Rectangle 2"/>
-          <p:cNvSpPr/>
-          <p:nvPr/>
-        </p:nvSpPr>
-        <p:spPr>
-          <a:xfrm>
-            <a:off x="0" y="1051560"/>
-            <a:ext cx="12191695" cy="54864"/>
-          </a:xfrm>
-          <a:prstGeom prst="rect">
-            <a:avLst/>
-          </a:prstGeom>
-          <a:solidFill>
-            <a:srgbClr val="E8A838"/>
-          </a:solidFill>
-          <a:ln>
-            <a:noFill/>
-          </a:ln>
-        </p:spPr>
-        <p:style>
-          <a:lnRef idx="1">
-            <a:schemeClr val="accent1"/>
-          </a:lnRef>
-          <a:fillRef idx="3">
-            <a:schemeClr val="accent1"/>
-          </a:fillRef>
-          <a:effectRef idx="2">
-            <a:schemeClr val="accent1"/>
-          </a:effectRef>
-          <a:fontRef idx="minor">
-            <a:schemeClr val="lt1"/>
-          </a:fontRef>
-        </p:style>
-        <p:txBody>
-          <a:bodyPr rtlCol="0" anchor="ctr"/>
-          <a:lstStyle/>
-          <a:p>
-            <a:pPr algn="ctr"/>
-          </a:p>
-        </p:txBody>
-      </p:sp>
-      <p:sp>
-        <p:nvSpPr>
-          <p:cNvPr id="4" name="TextBox 3"/>
-          <p:cNvSpPr txBox="1"/>
-          <p:nvPr/>
-        </p:nvSpPr>
-        <p:spPr>
-          <a:xfrm>
-            <a:off x="548640" y="182880"/>
-            <a:ext cx="10972800" cy="640080"/>
-          </a:xfrm>
-          <a:prstGeom prst="rect">
-            <a:avLst/>
-          </a:prstGeom>
-          <a:noFill/>
-        </p:spPr>
-        <p:txBody>
-          <a:bodyPr wrap="square">
-            <a:spAutoFit/>
-          </a:bodyPr>
-          <a:lstStyle/>
-          <a:p>
-            <a:pPr algn="l">
-              <a:spcAft>
-                <a:spcPts val="200"/>
-              </a:spcAft>
-              <a:defRPr sz="3000" b="1">
-                <a:solidFill>
-                  <a:srgbClr val="FFFFFF"/>
-                </a:solidFill>
-                <a:latin typeface="Calibri"/>
-              </a:defRPr>
-              <a:lnSpc>
-                <a:spcPct val="114999"/>
-              </a:lnSpc>
-            </a:pPr>
-            <a:r>
-              <a:t>Results Summary — All Models</a:t>
-            </a:r>
-          </a:p>
-        </p:txBody>
-      </p:sp>
-      <p:graphicFrame>
-        <p:nvGraphicFramePr>
-          <p:cNvPr id="5" name="Table 4"/>
-          <p:cNvGraphicFramePr>
-            <a:graphicFrameLocks noGrp="1"/>
-          </p:cNvGraphicFramePr>
-          <p:nvPr/>
-        </p:nvGraphicFramePr>
-        <p:xfrm>
-          <a:off x="457200" y="1371600"/>
-          <a:ext cx="11247120" cy="4754880"/>
-        </p:xfrm>
-        <a:graphic>
-          <a:graphicData uri="http://schemas.openxmlformats.org/drawingml/2006/table">
-            <a:tbl>
-              <a:tblPr firstRow="1" bandRow="1">
-                <a:tableStyleId>{5C22544A-7EE6-4342-B048-85BDC9FD1C3A}</a:tableStyleId>
-              </a:tblPr>
-              <a:tblGrid>
-                <a:gridCol w="2286000"/>
-                <a:gridCol w="1371600"/>
-                <a:gridCol w="1371600"/>
-                <a:gridCol w="1645920"/>
-                <a:gridCol w="1645920"/>
-                <a:gridCol w="2926080"/>
-              </a:tblGrid>
-              <a:tr h="432261">
-                <a:tc>
-                  <a:txBody>
-                    <a:bodyPr/>
-                    <a:lstStyle/>
-                    <a:p>
-                      <a:pPr algn="ctr">
-                        <a:defRPr sz="1200" b="1">
-                          <a:solidFill>
-                            <a:srgbClr val="FFFFFF"/>
-                          </a:solidFill>
-                          <a:latin typeface="Calibri"/>
-                        </a:defRPr>
-                      </a:pPr>
-                      <a:r>
-                        <a:t>Model</a:t>
-                      </a:r>
-                    </a:p>
-                  </a:txBody>
-                  <a:tcPr anchor="ctr">
-                    <a:solidFill>
-                      <a:srgbClr val="1B2A4A"/>
-                    </a:solidFill>
-                  </a:tcPr>
-                </a:tc>
-                <a:tc>
-                  <a:txBody>
-                    <a:bodyPr/>
-                    <a:lstStyle/>
-                    <a:p>
-                      <a:pPr algn="ctr">
-                        <a:defRPr sz="1200" b="1">
-                          <a:solidFill>
-                            <a:srgbClr val="FFFFFF"/>
-                          </a:solidFill>
-                          <a:latin typeface="Calibri"/>
-                        </a:defRPr>
-                      </a:pPr>
-                      <a:r>
-                        <a:t>Sent. Acc</a:t>
-                      </a:r>
-                    </a:p>
-                  </a:txBody>
-                  <a:tcPr anchor="ctr">
-                    <a:solidFill>
-                      <a:srgbClr val="1B2A4A"/>
-                    </a:solidFill>
-                  </a:tcPr>
-                </a:tc>
-                <a:tc>
-                  <a:txBody>
-                    <a:bodyPr/>
-                    <a:lstStyle/>
-                    <a:p>
-                      <a:pPr algn="ctr">
-                        <a:defRPr sz="1200" b="1">
-                          <a:solidFill>
-                            <a:srgbClr val="FFFFFF"/>
-                          </a:solidFill>
-                          <a:latin typeface="Calibri"/>
-                        </a:defRPr>
-                      </a:pPr>
-                      <a:r>
-                        <a:t>Sent. F1</a:t>
-                      </a:r>
-                    </a:p>
-                  </a:txBody>
-                  <a:tcPr anchor="ctr">
-                    <a:solidFill>
-                      <a:srgbClr val="1B2A4A"/>
-                    </a:solidFill>
-                  </a:tcPr>
-                </a:tc>
-                <a:tc>
-                  <a:txBody>
-                    <a:bodyPr/>
-                    <a:lstStyle/>
-                    <a:p>
-                      <a:pPr algn="ctr">
-                        <a:defRPr sz="1200" b="1">
-                          <a:solidFill>
-                            <a:srgbClr val="FFFFFF"/>
-                          </a:solidFill>
-                          <a:latin typeface="Calibri"/>
-                        </a:defRPr>
-                      </a:pPr>
-                      <a:r>
-                        <a:t>Stance Acc</a:t>
-                      </a:r>
-                    </a:p>
-                  </a:txBody>
-                  <a:tcPr anchor="ctr">
-                    <a:solidFill>
-                      <a:srgbClr val="1B2A4A"/>
-                    </a:solidFill>
-                  </a:tcPr>
-                </a:tc>
-                <a:tc>
-                  <a:txBody>
-                    <a:bodyPr/>
-                    <a:lstStyle/>
-                    <a:p>
-                      <a:pPr algn="ctr">
-                        <a:defRPr sz="1200" b="1">
-                          <a:solidFill>
-                            <a:srgbClr val="FFFFFF"/>
-                          </a:solidFill>
-                          <a:latin typeface="Calibri"/>
-                        </a:defRPr>
-                      </a:pPr>
-                      <a:r>
-                        <a:t>Stance F1</a:t>
-                      </a:r>
-                    </a:p>
-                  </a:txBody>
-                  <a:tcPr anchor="ctr">
-                    <a:solidFill>
-                      <a:srgbClr val="1B2A4A"/>
-                    </a:solidFill>
-                  </a:tcPr>
-                </a:tc>
-                <a:tc>
-                  <a:txBody>
-                    <a:bodyPr/>
-                    <a:lstStyle/>
-                    <a:p>
-                      <a:pPr algn="ctr">
-                        <a:defRPr sz="1200" b="1">
-                          <a:solidFill>
-                            <a:srgbClr val="FFFFFF"/>
-                          </a:solidFill>
-                          <a:latin typeface="Calibri"/>
-                        </a:defRPr>
-                      </a:pPr>
-                      <a:r>
-                        <a:t>Notes</a:t>
-                      </a:r>
-                    </a:p>
-                  </a:txBody>
-                  <a:tcPr anchor="ctr">
-                    <a:solidFill>
-                      <a:srgbClr val="1B2A4A"/>
-                    </a:solidFill>
-                  </a:tcPr>
-                </a:tc>
-              </a:tr>
-              <a:tr h="432261">
-                <a:tc>
-                  <a:txBody>
-                    <a:bodyPr/>
-                    <a:lstStyle/>
-                    <a:p>
-                      <a:pPr algn="ctr">
-                        <a:defRPr sz="1200">
-                          <a:solidFill>
-                            <a:srgbClr val="202020"/>
-                          </a:solidFill>
-                          <a:latin typeface="Calibri"/>
-                        </a:defRPr>
-                      </a:pPr>
-                      <a:r>
-                        <a:t>TF-IDF + LR</a:t>
-                      </a:r>
-                    </a:p>
-                  </a:txBody>
-                  <a:tcPr anchor="ctr">
-                    <a:solidFill>
-                      <a:srgbClr val="FFFFFF"/>
-                    </a:solidFill>
-                  </a:tcPr>
-                </a:tc>
-                <a:tc>
-                  <a:txBody>
-                    <a:bodyPr/>
-                    <a:lstStyle/>
-                    <a:p>
-                      <a:pPr algn="ctr">
-                        <a:defRPr sz="1200">
-                          <a:solidFill>
-                            <a:srgbClr val="202020"/>
-                          </a:solidFill>
-                          <a:latin typeface="Calibri"/>
-                        </a:defRPr>
-                      </a:pPr>
-                      <a:r>
-                        <a:t>87.0%</a:t>
-                      </a:r>
-                    </a:p>
-                  </a:txBody>
-                  <a:tcPr anchor="ctr">
-                    <a:solidFill>
-                      <a:srgbClr val="FFFFFF"/>
-                    </a:solidFill>
-                  </a:tcPr>
-                </a:tc>
-                <a:tc>
-                  <a:txBody>
-                    <a:bodyPr/>
-                    <a:lstStyle/>
-                    <a:p>
-                      <a:pPr algn="ctr">
-                        <a:defRPr sz="1200">
-                          <a:solidFill>
-                            <a:srgbClr val="202020"/>
-                          </a:solidFill>
-                          <a:latin typeface="Calibri"/>
-                        </a:defRPr>
-                      </a:pPr>
-                      <a:r>
-                        <a:t>0.838</a:t>
-                      </a:r>
-                    </a:p>
-                  </a:txBody>
-                  <a:tcPr anchor="ctr">
-                    <a:solidFill>
-                      <a:srgbClr val="FFFFFF"/>
-                    </a:solidFill>
-                  </a:tcPr>
-                </a:tc>
-                <a:tc>
-                  <a:txBody>
-                    <a:bodyPr/>
-                    <a:lstStyle/>
-                    <a:p>
-                      <a:pPr algn="ctr">
-                        <a:defRPr sz="1200">
-                          <a:solidFill>
-                            <a:srgbClr val="202020"/>
-                          </a:solidFill>
-                          <a:latin typeface="Calibri"/>
-                        </a:defRPr>
-                      </a:pPr>
-                      <a:r>
-                        <a:t>60.1%</a:t>
-                      </a:r>
-                    </a:p>
-                  </a:txBody>
-                  <a:tcPr anchor="ctr">
-                    <a:solidFill>
-                      <a:srgbClr val="FFFFFF"/>
-                    </a:solidFill>
-                  </a:tcPr>
-                </a:tc>
-                <a:tc>
-                  <a:txBody>
-                    <a:bodyPr/>
-                    <a:lstStyle/>
-                    <a:p>
-                      <a:pPr algn="ctr">
-                        <a:defRPr sz="1200">
-                          <a:solidFill>
-                            <a:srgbClr val="202020"/>
-                          </a:solidFill>
-                          <a:latin typeface="Calibri"/>
-                        </a:defRPr>
-                      </a:pPr>
-                      <a:r>
-                        <a:t>0.561</a:t>
-                      </a:r>
-                    </a:p>
-                  </a:txBody>
-                  <a:tcPr anchor="ctr">
-                    <a:solidFill>
-                      <a:srgbClr val="FFFFFF"/>
-                    </a:solidFill>
-                  </a:tcPr>
-                </a:tc>
-                <a:tc>
-                  <a:txBody>
-                    <a:bodyPr/>
-                    <a:lstStyle/>
-                    <a:p>
-                      <a:pPr algn="ctr">
-                        <a:defRPr sz="1200">
-                          <a:solidFill>
-                            <a:srgbClr val="202020"/>
-                          </a:solidFill>
-                          <a:latin typeface="Calibri"/>
-                        </a:defRPr>
-                      </a:pPr>
-                      <a:r>
-                        <a:t>Baseline</a:t>
-                      </a:r>
-                    </a:p>
-                  </a:txBody>
-                  <a:tcPr anchor="ctr">
-                    <a:solidFill>
-                      <a:srgbClr val="FFFFFF"/>
-                    </a:solidFill>
-                  </a:tcPr>
-                </a:tc>
-              </a:tr>
-              <a:tr h="432261">
-                <a:tc>
-                  <a:txBody>
-                    <a:bodyPr/>
-                    <a:lstStyle/>
-                    <a:p>
-                      <a:pPr algn="ctr">
-                        <a:defRPr sz="1200">
-                          <a:solidFill>
-                            <a:srgbClr val="202020"/>
-                          </a:solidFill>
-                          <a:latin typeface="Calibri"/>
-                        </a:defRPr>
-                      </a:pPr>
-                      <a:r>
-                        <a:t>TF-IDF + SVM</a:t>
-                      </a:r>
-                    </a:p>
-                  </a:txBody>
-                  <a:tcPr anchor="ctr">
-                    <a:solidFill>
-                      <a:srgbClr val="F2F2F2"/>
-                    </a:solidFill>
-                  </a:tcPr>
-                </a:tc>
-                <a:tc>
-                  <a:txBody>
-                    <a:bodyPr/>
-                    <a:lstStyle/>
-                    <a:p>
-                      <a:pPr algn="ctr">
-                        <a:defRPr sz="1200">
-                          <a:solidFill>
-                            <a:srgbClr val="202020"/>
-                          </a:solidFill>
-                          <a:latin typeface="Calibri"/>
-                        </a:defRPr>
-                      </a:pPr>
-                      <a:r>
-                        <a:t>89.4%</a:t>
-                      </a:r>
-                    </a:p>
-                  </a:txBody>
-                  <a:tcPr anchor="ctr">
-                    <a:solidFill>
-                      <a:srgbClr val="F2F2F2"/>
-                    </a:solidFill>
-                  </a:tcPr>
-                </a:tc>
-                <a:tc>
-                  <a:txBody>
-                    <a:bodyPr/>
-                    <a:lstStyle/>
-                    <a:p>
-                      <a:pPr algn="ctr">
-                        <a:defRPr sz="1200">
-                          <a:solidFill>
-                            <a:srgbClr val="202020"/>
-                          </a:solidFill>
-                          <a:latin typeface="Calibri"/>
-                        </a:defRPr>
-                      </a:pPr>
-                      <a:r>
-                        <a:t>0.866</a:t>
-                      </a:r>
-                    </a:p>
-                  </a:txBody>
-                  <a:tcPr anchor="ctr">
-                    <a:solidFill>
-                      <a:srgbClr val="F2F2F2"/>
-                    </a:solidFill>
-                  </a:tcPr>
-                </a:tc>
-                <a:tc>
-                  <a:txBody>
-                    <a:bodyPr/>
-                    <a:lstStyle/>
-                    <a:p>
-                      <a:pPr algn="ctr">
-                        <a:defRPr sz="1200">
-                          <a:solidFill>
-                            <a:srgbClr val="202020"/>
-                          </a:solidFill>
-                          <a:latin typeface="Calibri"/>
-                        </a:defRPr>
-                      </a:pPr>
-                      <a:r>
-                        <a:t>63.3%</a:t>
-                      </a:r>
-                    </a:p>
-                  </a:txBody>
-                  <a:tcPr anchor="ctr">
-                    <a:solidFill>
-                      <a:srgbClr val="F2F2F2"/>
-                    </a:solidFill>
-                  </a:tcPr>
-                </a:tc>
-                <a:tc>
-                  <a:txBody>
-                    <a:bodyPr/>
-                    <a:lstStyle/>
-                    <a:p>
-                      <a:pPr algn="ctr">
-                        <a:defRPr sz="1200">
-                          <a:solidFill>
-                            <a:srgbClr val="202020"/>
-                          </a:solidFill>
-                          <a:latin typeface="Calibri"/>
-                        </a:defRPr>
-                      </a:pPr>
-                      <a:r>
-                        <a:t>0.583</a:t>
-                      </a:r>
-                    </a:p>
-                  </a:txBody>
-                  <a:tcPr anchor="ctr">
-                    <a:solidFill>
-                      <a:srgbClr val="F2F2F2"/>
-                    </a:solidFill>
-                  </a:tcPr>
-                </a:tc>
-                <a:tc>
-                  <a:txBody>
-                    <a:bodyPr/>
-                    <a:lstStyle/>
-                    <a:p>
-                      <a:pPr algn="ctr">
-                        <a:defRPr sz="1200">
-                          <a:solidFill>
-                            <a:srgbClr val="202020"/>
-                          </a:solidFill>
-                          <a:latin typeface="Calibri"/>
-                        </a:defRPr>
-                      </a:pPr>
-                      <a:r>
-                        <a:t>Best baseline</a:t>
-                      </a:r>
-                    </a:p>
-                  </a:txBody>
-                  <a:tcPr anchor="ctr">
-                    <a:solidFill>
-                      <a:srgbClr val="F2F2F2"/>
-                    </a:solidFill>
-                  </a:tcPr>
-                </a:tc>
-              </a:tr>
-              <a:tr h="432261">
-                <a:tc>
-                  <a:txBody>
-                    <a:bodyPr/>
-                    <a:lstStyle/>
-                    <a:p>
-                      <a:pPr algn="ctr">
-                        <a:defRPr sz="1200">
-                          <a:solidFill>
-                            <a:srgbClr val="202020"/>
-                          </a:solidFill>
-                          <a:latin typeface="Calibri"/>
-                        </a:defRPr>
-                      </a:pPr>
-                      <a:r>
-                        <a:t>LM Lexicon (rule)</a:t>
-                      </a:r>
-                    </a:p>
-                  </a:txBody>
-                  <a:tcPr anchor="ctr">
-                    <a:solidFill>
-                      <a:srgbClr val="FFFFFF"/>
-                    </a:solidFill>
-                  </a:tcPr>
-                </a:tc>
-                <a:tc>
-                  <a:txBody>
-                    <a:bodyPr/>
-                    <a:lstStyle/>
-                    <a:p>
-                      <a:pPr algn="ctr">
-                        <a:defRPr sz="1200">
-                          <a:solidFill>
-                            <a:srgbClr val="202020"/>
-                          </a:solidFill>
-                          <a:latin typeface="Calibri"/>
-                        </a:defRPr>
-                      </a:pPr>
-                      <a:r>
-                        <a:t>62.8%</a:t>
-                      </a:r>
-                    </a:p>
-                  </a:txBody>
-                  <a:tcPr anchor="ctr">
-                    <a:solidFill>
-                      <a:srgbClr val="FFFFFF"/>
-                    </a:solidFill>
-                  </a:tcPr>
-                </a:tc>
-                <a:tc>
-                  <a:txBody>
-                    <a:bodyPr/>
-                    <a:lstStyle/>
-                    <a:p>
-                      <a:pPr algn="ctr">
-                        <a:defRPr sz="1200">
-                          <a:solidFill>
-                            <a:srgbClr val="202020"/>
-                          </a:solidFill>
-                          <a:latin typeface="Calibri"/>
-                        </a:defRPr>
-                      </a:pPr>
-                      <a:r>
-                        <a:t>0.510</a:t>
-                      </a:r>
-                    </a:p>
-                  </a:txBody>
-                  <a:tcPr anchor="ctr">
-                    <a:solidFill>
-                      <a:srgbClr val="FFFFFF"/>
-                    </a:solidFill>
-                  </a:tcPr>
-                </a:tc>
-                <a:tc>
-                  <a:txBody>
-                    <a:bodyPr/>
-                    <a:lstStyle/>
-                    <a:p>
-                      <a:pPr algn="ctr">
-                        <a:defRPr sz="1200">
-                          <a:solidFill>
-                            <a:srgbClr val="202020"/>
-                          </a:solidFill>
-                          <a:latin typeface="Calibri"/>
-                        </a:defRPr>
-                      </a:pPr>
-                      <a:r>
-                        <a:t>45.2%</a:t>
-                      </a:r>
-                    </a:p>
-                  </a:txBody>
-                  <a:tcPr anchor="ctr">
-                    <a:solidFill>
-                      <a:srgbClr val="FFFFFF"/>
-                    </a:solidFill>
-                  </a:tcPr>
-                </a:tc>
-                <a:tc>
-                  <a:txBody>
-                    <a:bodyPr/>
-                    <a:lstStyle/>
-                    <a:p>
-                      <a:pPr algn="ctr">
-                        <a:defRPr sz="1200">
-                          <a:solidFill>
-                            <a:srgbClr val="202020"/>
-                          </a:solidFill>
-                          <a:latin typeface="Calibri"/>
-                        </a:defRPr>
-                      </a:pPr>
-                      <a:r>
-                        <a:t>0.388</a:t>
-                      </a:r>
-                    </a:p>
-                  </a:txBody>
-                  <a:tcPr anchor="ctr">
-                    <a:solidFill>
-                      <a:srgbClr val="FFFFFF"/>
-                    </a:solidFill>
-                  </a:tcPr>
-                </a:tc>
-                <a:tc>
-                  <a:txBody>
-                    <a:bodyPr/>
-                    <a:lstStyle/>
-                    <a:p>
-                      <a:pPr algn="ctr">
-                        <a:defRPr sz="1200">
-                          <a:solidFill>
-                            <a:srgbClr val="202020"/>
-                          </a:solidFill>
-                          <a:latin typeface="Calibri"/>
-                        </a:defRPr>
-                      </a:pPr>
-                      <a:r>
-                        <a:t>No context</a:t>
-                      </a:r>
-                    </a:p>
-                  </a:txBody>
-                  <a:tcPr anchor="ctr">
-                    <a:solidFill>
-                      <a:srgbClr val="FFFFFF"/>
-                    </a:solidFill>
-                  </a:tcPr>
-                </a:tc>
-              </a:tr>
-              <a:tr h="432261">
-                <a:tc>
-                  <a:txBody>
-                    <a:bodyPr/>
-                    <a:lstStyle/>
-                    <a:p>
-                      <a:pPr algn="ctr">
-                        <a:defRPr sz="1200">
-                          <a:solidFill>
-                            <a:srgbClr val="202020"/>
-                          </a:solidFill>
-                          <a:latin typeface="Calibri"/>
-                        </a:defRPr>
-                      </a:pPr>
-                      <a:r>
-                        <a:t>TF-IDF + LM + SVM</a:t>
-                      </a:r>
-                    </a:p>
-                  </a:txBody>
-                  <a:tcPr anchor="ctr">
-                    <a:solidFill>
-                      <a:srgbClr val="F2F2F2"/>
-                    </a:solidFill>
-                  </a:tcPr>
-                </a:tc>
-                <a:tc>
-                  <a:txBody>
-                    <a:bodyPr/>
-                    <a:lstStyle/>
-                    <a:p>
-                      <a:pPr algn="ctr">
-                        <a:defRPr sz="1200">
-                          <a:solidFill>
-                            <a:srgbClr val="202020"/>
-                          </a:solidFill>
-                          <a:latin typeface="Calibri"/>
-                        </a:defRPr>
-                      </a:pPr>
-                      <a:r>
-                        <a:t>89.6%</a:t>
-                      </a:r>
-                    </a:p>
-                  </a:txBody>
-                  <a:tcPr anchor="ctr">
-                    <a:solidFill>
-                      <a:srgbClr val="F2F2F2"/>
-                    </a:solidFill>
-                  </a:tcPr>
-                </a:tc>
-                <a:tc>
-                  <a:txBody>
-                    <a:bodyPr/>
-                    <a:lstStyle/>
-                    <a:p>
-                      <a:pPr algn="ctr">
-                        <a:defRPr sz="1200">
-                          <a:solidFill>
-                            <a:srgbClr val="202020"/>
-                          </a:solidFill>
-                          <a:latin typeface="Calibri"/>
-                        </a:defRPr>
-                      </a:pPr>
-                      <a:r>
-                        <a:t>0.869</a:t>
-                      </a:r>
-                    </a:p>
-                  </a:txBody>
-                  <a:tcPr anchor="ctr">
-                    <a:solidFill>
-                      <a:srgbClr val="F2F2F2"/>
-                    </a:solidFill>
-                  </a:tcPr>
-                </a:tc>
-                <a:tc>
-                  <a:txBody>
-                    <a:bodyPr/>
-                    <a:lstStyle/>
-                    <a:p>
-                      <a:pPr algn="ctr">
-                        <a:defRPr sz="1200">
-                          <a:solidFill>
-                            <a:srgbClr val="202020"/>
-                          </a:solidFill>
-                          <a:latin typeface="Calibri"/>
-                        </a:defRPr>
-                      </a:pPr>
-                      <a:r>
-                        <a:t>62.8%</a:t>
-                      </a:r>
-                    </a:p>
-                  </a:txBody>
-                  <a:tcPr anchor="ctr">
-                    <a:solidFill>
-                      <a:srgbClr val="F2F2F2"/>
-                    </a:solidFill>
-                  </a:tcPr>
-                </a:tc>
-                <a:tc>
-                  <a:txBody>
-                    <a:bodyPr/>
-                    <a:lstStyle/>
-                    <a:p>
-                      <a:pPr algn="ctr">
-                        <a:defRPr sz="1200">
-                          <a:solidFill>
-                            <a:srgbClr val="202020"/>
-                          </a:solidFill>
-                          <a:latin typeface="Calibri"/>
-                        </a:defRPr>
-                      </a:pPr>
-                      <a:r>
-                        <a:t>0.579</a:t>
-                      </a:r>
-                    </a:p>
-                  </a:txBody>
-                  <a:tcPr anchor="ctr">
-                    <a:solidFill>
-                      <a:srgbClr val="F2F2F2"/>
-                    </a:solidFill>
-                  </a:tcPr>
-                </a:tc>
-                <a:tc>
-                  <a:txBody>
-                    <a:bodyPr/>
-                    <a:lstStyle/>
-                    <a:p>
-                      <a:pPr algn="ctr">
-                        <a:defRPr sz="1200">
-                          <a:solidFill>
-                            <a:srgbClr val="202020"/>
-                          </a:solidFill>
-                          <a:latin typeface="Calibri"/>
-                        </a:defRPr>
-                      </a:pPr>
-                      <a:r>
-                        <a:t>Lexicon aug.</a:t>
-                      </a:r>
-                    </a:p>
-                  </a:txBody>
-                  <a:tcPr anchor="ctr">
-                    <a:solidFill>
-                      <a:srgbClr val="F2F2F2"/>
-                    </a:solidFill>
-                  </a:tcPr>
-                </a:tc>
-              </a:tr>
-              <a:tr h="432261">
-                <a:tc>
-                  <a:txBody>
-                    <a:bodyPr/>
-                    <a:lstStyle/>
-                    <a:p>
-                      <a:pPr algn="ctr">
-                        <a:defRPr sz="1200">
-                          <a:solidFill>
-                            <a:srgbClr val="202020"/>
-                          </a:solidFill>
-                          <a:latin typeface="Calibri"/>
-                        </a:defRPr>
-                      </a:pPr>
-                      <a:r>
-                        <a:t>FinBERT zero-shot</a:t>
-                      </a:r>
-                    </a:p>
-                  </a:txBody>
-                  <a:tcPr anchor="ctr">
-                    <a:solidFill>
-                      <a:srgbClr val="FFFFFF"/>
-                    </a:solidFill>
-                  </a:tcPr>
-                </a:tc>
-                <a:tc>
-                  <a:txBody>
-                    <a:bodyPr/>
-                    <a:lstStyle/>
-                    <a:p>
-                      <a:pPr algn="ctr">
-                        <a:defRPr sz="1200">
-                          <a:solidFill>
-                            <a:srgbClr val="202020"/>
-                          </a:solidFill>
-                          <a:latin typeface="Calibri"/>
-                        </a:defRPr>
-                      </a:pPr>
-                      <a:r>
-                        <a:t>97.35%</a:t>
-                      </a:r>
-                    </a:p>
-                  </a:txBody>
-                  <a:tcPr anchor="ctr">
-                    <a:solidFill>
-                      <a:srgbClr val="FFFFFF"/>
-                    </a:solidFill>
-                  </a:tcPr>
-                </a:tc>
-                <a:tc>
-                  <a:txBody>
-                    <a:bodyPr/>
-                    <a:lstStyle/>
-                    <a:p>
-                      <a:pPr algn="ctr">
-                        <a:defRPr sz="1200">
-                          <a:solidFill>
-                            <a:srgbClr val="202020"/>
-                          </a:solidFill>
-                          <a:latin typeface="Calibri"/>
-                        </a:defRPr>
-                      </a:pPr>
-                      <a:r>
-                        <a:t>0.958</a:t>
-                      </a:r>
-                    </a:p>
-                  </a:txBody>
-                  <a:tcPr anchor="ctr">
-                    <a:solidFill>
-                      <a:srgbClr val="FFFFFF"/>
-                    </a:solidFill>
-                  </a:tcPr>
-                </a:tc>
-                <a:tc>
-                  <a:txBody>
-                    <a:bodyPr/>
-                    <a:lstStyle/>
-                    <a:p>
-                      <a:pPr algn="ctr">
-                        <a:defRPr sz="1200">
-                          <a:solidFill>
-                            <a:srgbClr val="202020"/>
-                          </a:solidFill>
-                          <a:latin typeface="Calibri"/>
-                        </a:defRPr>
-                      </a:pPr>
-                      <a:r>
-                        <a:t>—</a:t>
-                      </a:r>
-                    </a:p>
-                  </a:txBody>
-                  <a:tcPr anchor="ctr">
-                    <a:solidFill>
-                      <a:srgbClr val="FFFFFF"/>
-                    </a:solidFill>
-                  </a:tcPr>
-                </a:tc>
-                <a:tc>
-                  <a:txBody>
-                    <a:bodyPr/>
-                    <a:lstStyle/>
-                    <a:p>
-                      <a:pPr algn="ctr">
-                        <a:defRPr sz="1200">
-                          <a:solidFill>
-                            <a:srgbClr val="202020"/>
-                          </a:solidFill>
-                          <a:latin typeface="Calibri"/>
-                        </a:defRPr>
-                      </a:pPr>
-                      <a:r>
-                        <a:t>—</a:t>
-                      </a:r>
-                    </a:p>
-                  </a:txBody>
-                  <a:tcPr anchor="ctr">
-                    <a:solidFill>
-                      <a:srgbClr val="FFFFFF"/>
-                    </a:solidFill>
-                  </a:tcPr>
-                </a:tc>
-                <a:tc>
-                  <a:txBody>
-                    <a:bodyPr/>
-                    <a:lstStyle/>
-                    <a:p>
-                      <a:pPr algn="ctr">
-                        <a:defRPr sz="1200">
-                          <a:solidFill>
-                            <a:srgbClr val="202020"/>
-                          </a:solidFill>
-                          <a:latin typeface="Calibri"/>
-                        </a:defRPr>
-                      </a:pPr>
-                      <a:r>
-                        <a:t>Native head</a:t>
-                      </a:r>
-                    </a:p>
-                  </a:txBody>
-                  <a:tcPr anchor="ctr">
-                    <a:solidFill>
-                      <a:srgbClr val="FFFFFF"/>
-                    </a:solidFill>
-                  </a:tcPr>
-                </a:tc>
-              </a:tr>
-              <a:tr h="432261">
-                <a:tc>
-                  <a:txBody>
-                    <a:bodyPr/>
-                    <a:lstStyle/>
-                    <a:p>
-                      <a:pPr algn="ctr">
-                        <a:defRPr sz="1200">
-                          <a:solidFill>
-                            <a:srgbClr val="202020"/>
-                          </a:solidFill>
-                          <a:latin typeface="Calibri"/>
-                        </a:defRPr>
-                      </a:pPr>
-                      <a:r>
-                        <a:t>FinBERT 16-shot</a:t>
-                      </a:r>
-                    </a:p>
-                  </a:txBody>
-                  <a:tcPr anchor="ctr">
-                    <a:solidFill>
-                      <a:srgbClr val="F2F2F2"/>
-                    </a:solidFill>
-                  </a:tcPr>
-                </a:tc>
-                <a:tc>
-                  <a:txBody>
-                    <a:bodyPr/>
-                    <a:lstStyle/>
-                    <a:p>
-                      <a:pPr algn="ctr">
-                        <a:defRPr sz="1200">
-                          <a:solidFill>
-                            <a:srgbClr val="202020"/>
-                          </a:solidFill>
-                          <a:latin typeface="Calibri"/>
-                        </a:defRPr>
-                      </a:pPr>
-                      <a:r>
-                        <a:t>97.70%</a:t>
-                      </a:r>
-                    </a:p>
-                  </a:txBody>
-                  <a:tcPr anchor="ctr">
-                    <a:solidFill>
-                      <a:srgbClr val="F2F2F2"/>
-                    </a:solidFill>
-                  </a:tcPr>
-                </a:tc>
-                <a:tc>
-                  <a:txBody>
-                    <a:bodyPr/>
-                    <a:lstStyle/>
-                    <a:p>
-                      <a:pPr algn="ctr">
-                        <a:defRPr sz="1200">
-                          <a:solidFill>
-                            <a:srgbClr val="202020"/>
-                          </a:solidFill>
-                          <a:latin typeface="Calibri"/>
-                        </a:defRPr>
-                      </a:pPr>
-                      <a:r>
-                        <a:t>0.963</a:t>
-                      </a:r>
-                    </a:p>
-                  </a:txBody>
-                  <a:tcPr anchor="ctr">
-                    <a:solidFill>
-                      <a:srgbClr val="F2F2F2"/>
-                    </a:solidFill>
-                  </a:tcPr>
-                </a:tc>
-                <a:tc>
-                  <a:txBody>
-                    <a:bodyPr/>
-                    <a:lstStyle/>
-                    <a:p>
-                      <a:pPr algn="ctr">
-                        <a:defRPr sz="1200">
-                          <a:solidFill>
-                            <a:srgbClr val="202020"/>
-                          </a:solidFill>
-                          <a:latin typeface="Calibri"/>
-                        </a:defRPr>
-                      </a:pPr>
-                      <a:r>
-                        <a:t>54.0%</a:t>
-                      </a:r>
-                    </a:p>
-                  </a:txBody>
-                  <a:tcPr anchor="ctr">
-                    <a:solidFill>
-                      <a:srgbClr val="F2F2F2"/>
-                    </a:solidFill>
-                  </a:tcPr>
-                </a:tc>
-                <a:tc>
-                  <a:txBody>
-                    <a:bodyPr/>
-                    <a:lstStyle/>
-                    <a:p>
-                      <a:pPr algn="ctr">
-                        <a:defRPr sz="1200">
-                          <a:solidFill>
-                            <a:srgbClr val="202020"/>
-                          </a:solidFill>
-                          <a:latin typeface="Calibri"/>
-                        </a:defRPr>
-                      </a:pPr>
-                      <a:r>
-                        <a:t>0.490</a:t>
-                      </a:r>
-                    </a:p>
-                  </a:txBody>
-                  <a:tcPr anchor="ctr">
-                    <a:solidFill>
-                      <a:srgbClr val="F2F2F2"/>
-                    </a:solidFill>
-                  </a:tcPr>
-                </a:tc>
-                <a:tc>
-                  <a:txBody>
-                    <a:bodyPr/>
-                    <a:lstStyle/>
-                    <a:p>
-                      <a:pPr algn="ctr">
-                        <a:defRPr sz="1200">
-                          <a:solidFill>
-                            <a:srgbClr val="202020"/>
-                          </a:solidFill>
-                          <a:latin typeface="Calibri"/>
-                        </a:defRPr>
-                      </a:pPr>
-                      <a:r>
-                        <a:t>SetFit</a:t>
-                      </a:r>
-                    </a:p>
-                  </a:txBody>
-                  <a:tcPr anchor="ctr">
-                    <a:solidFill>
-                      <a:srgbClr val="F2F2F2"/>
-                    </a:solidFill>
-                  </a:tcPr>
-                </a:tc>
-              </a:tr>
-              <a:tr h="432261">
-                <a:tc>
-                  <a:txBody>
-                    <a:bodyPr/>
-                    <a:lstStyle/>
-                    <a:p>
-                      <a:pPr algn="ctr">
-                        <a:defRPr sz="1200">
-                          <a:solidFill>
-                            <a:srgbClr val="202020"/>
-                          </a:solidFill>
-                          <a:latin typeface="Calibri"/>
-                        </a:defRPr>
-                      </a:pPr>
-                      <a:r>
-                        <a:t>BERT 16-shot</a:t>
-                      </a:r>
-                    </a:p>
-                  </a:txBody>
-                  <a:tcPr anchor="ctr">
-                    <a:solidFill>
-                      <a:srgbClr val="FFFFFF"/>
-                    </a:solidFill>
-                  </a:tcPr>
-                </a:tc>
-                <a:tc>
-                  <a:txBody>
-                    <a:bodyPr/>
-                    <a:lstStyle/>
-                    <a:p>
-                      <a:pPr algn="ctr">
-                        <a:defRPr sz="1200">
-                          <a:solidFill>
-                            <a:srgbClr val="202020"/>
-                          </a:solidFill>
-                          <a:latin typeface="Calibri"/>
-                        </a:defRPr>
-                      </a:pPr>
-                      <a:r>
-                        <a:t>74.20%</a:t>
-                      </a:r>
-                    </a:p>
-                  </a:txBody>
-                  <a:tcPr anchor="ctr">
-                    <a:solidFill>
-                      <a:srgbClr val="FFFFFF"/>
-                    </a:solidFill>
-                  </a:tcPr>
-                </a:tc>
-                <a:tc>
-                  <a:txBody>
-                    <a:bodyPr/>
-                    <a:lstStyle/>
-                    <a:p>
-                      <a:pPr algn="ctr">
-                        <a:defRPr sz="1200">
-                          <a:solidFill>
-                            <a:srgbClr val="202020"/>
-                          </a:solidFill>
-                          <a:latin typeface="Calibri"/>
-                        </a:defRPr>
-                      </a:pPr>
-                      <a:r>
-                        <a:t>0.668</a:t>
-                      </a:r>
-                    </a:p>
-                  </a:txBody>
-                  <a:tcPr anchor="ctr">
-                    <a:solidFill>
-                      <a:srgbClr val="FFFFFF"/>
-                    </a:solidFill>
-                  </a:tcPr>
-                </a:tc>
-                <a:tc>
-                  <a:txBody>
-                    <a:bodyPr/>
-                    <a:lstStyle/>
-                    <a:p>
-                      <a:pPr algn="ctr">
-                        <a:defRPr sz="1200">
-                          <a:solidFill>
-                            <a:srgbClr val="202020"/>
-                          </a:solidFill>
-                          <a:latin typeface="Calibri"/>
-                        </a:defRPr>
-                      </a:pPr>
-                      <a:r>
-                        <a:t>48.8%</a:t>
-                      </a:r>
-                    </a:p>
-                  </a:txBody>
-                  <a:tcPr anchor="ctr">
-                    <a:solidFill>
-                      <a:srgbClr val="FFFFFF"/>
-                    </a:solidFill>
-                  </a:tcPr>
-                </a:tc>
-                <a:tc>
-                  <a:txBody>
-                    <a:bodyPr/>
-                    <a:lstStyle/>
-                    <a:p>
-                      <a:pPr algn="ctr">
-                        <a:defRPr sz="1200">
-                          <a:solidFill>
-                            <a:srgbClr val="202020"/>
-                          </a:solidFill>
-                          <a:latin typeface="Calibri"/>
-                        </a:defRPr>
-                      </a:pPr>
-                      <a:r>
-                        <a:t>0.433</a:t>
-                      </a:r>
-                    </a:p>
-                  </a:txBody>
-                  <a:tcPr anchor="ctr">
-                    <a:solidFill>
-                      <a:srgbClr val="FFFFFF"/>
-                    </a:solidFill>
-                  </a:tcPr>
-                </a:tc>
-                <a:tc>
-                  <a:txBody>
-                    <a:bodyPr/>
-                    <a:lstStyle/>
-                    <a:p>
-                      <a:pPr algn="ctr">
-                        <a:defRPr sz="1200">
-                          <a:solidFill>
-                            <a:srgbClr val="202020"/>
-                          </a:solidFill>
-                          <a:latin typeface="Calibri"/>
-                        </a:defRPr>
-                      </a:pPr>
-                      <a:r>
-                        <a:t>SetFit</a:t>
-                      </a:r>
-                    </a:p>
-                  </a:txBody>
-                  <a:tcPr anchor="ctr">
-                    <a:solidFill>
-                      <a:srgbClr val="FFFFFF"/>
-                    </a:solidFill>
-                  </a:tcPr>
-                </a:tc>
-              </a:tr>
-              <a:tr h="432261">
-                <a:tc>
-                  <a:txBody>
-                    <a:bodyPr/>
-                    <a:lstStyle/>
-                    <a:p>
-                      <a:pPr algn="ctr">
-                        <a:defRPr sz="1200">
-                          <a:solidFill>
-                            <a:srgbClr val="202020"/>
-                          </a:solidFill>
-                          <a:latin typeface="Calibri"/>
-                        </a:defRPr>
-                      </a:pPr>
-                      <a:r>
-                        <a:t>FinBERT fine-tuned</a:t>
-                      </a:r>
-                    </a:p>
-                  </a:txBody>
-                  <a:tcPr anchor="ctr">
-                    <a:solidFill>
-                      <a:srgbClr val="F2F2F2"/>
-                    </a:solidFill>
-                  </a:tcPr>
-                </a:tc>
-                <a:tc>
-                  <a:txBody>
-                    <a:bodyPr/>
-                    <a:lstStyle/>
-                    <a:p>
-                      <a:pPr algn="ctr">
-                        <a:defRPr sz="1200">
-                          <a:solidFill>
-                            <a:srgbClr val="202020"/>
-                          </a:solidFill>
-                          <a:latin typeface="Calibri"/>
-                        </a:defRPr>
-                      </a:pPr>
-                      <a:r>
-                        <a:t>96.7%</a:t>
-                      </a:r>
-                    </a:p>
-                  </a:txBody>
-                  <a:tcPr anchor="ctr">
-                    <a:solidFill>
-                      <a:srgbClr val="F2F2F2"/>
-                    </a:solidFill>
-                  </a:tcPr>
-                </a:tc>
-                <a:tc>
-                  <a:txBody>
-                    <a:bodyPr/>
-                    <a:lstStyle/>
-                    <a:p>
-                      <a:pPr algn="ctr">
-                        <a:defRPr sz="1200">
-                          <a:solidFill>
-                            <a:srgbClr val="202020"/>
-                          </a:solidFill>
-                          <a:latin typeface="Calibri"/>
-                        </a:defRPr>
-                      </a:pPr>
-                      <a:r>
-                        <a:t>0.952</a:t>
-                      </a:r>
-                    </a:p>
-                  </a:txBody>
-                  <a:tcPr anchor="ctr">
-                    <a:solidFill>
-                      <a:srgbClr val="F2F2F2"/>
-                    </a:solidFill>
-                  </a:tcPr>
-                </a:tc>
-                <a:tc>
-                  <a:txBody>
-                    <a:bodyPr/>
-                    <a:lstStyle/>
-                    <a:p>
-                      <a:pPr algn="ctr">
-                        <a:defRPr sz="1200">
-                          <a:solidFill>
-                            <a:srgbClr val="202020"/>
-                          </a:solidFill>
-                          <a:latin typeface="Calibri"/>
-                        </a:defRPr>
-                      </a:pPr>
-                      <a:r>
-                        <a:t>64.3%</a:t>
-                      </a:r>
-                    </a:p>
-                  </a:txBody>
-                  <a:tcPr anchor="ctr">
-                    <a:solidFill>
-                      <a:srgbClr val="F2F2F2"/>
-                    </a:solidFill>
-                  </a:tcPr>
-                </a:tc>
-                <a:tc>
-                  <a:txBody>
-                    <a:bodyPr/>
-                    <a:lstStyle/>
-                    <a:p>
-                      <a:pPr algn="ctr">
-                        <a:defRPr sz="1200">
-                          <a:solidFill>
-                            <a:srgbClr val="202020"/>
-                          </a:solidFill>
-                          <a:latin typeface="Calibri"/>
-                        </a:defRPr>
-                      </a:pPr>
-                      <a:r>
-                        <a:t>0.626</a:t>
-                      </a:r>
-                    </a:p>
-                  </a:txBody>
-                  <a:tcPr anchor="ctr">
-                    <a:solidFill>
-                      <a:srgbClr val="F2F2F2"/>
-                    </a:solidFill>
-                  </a:tcPr>
-                </a:tc>
-                <a:tc>
-                  <a:txBody>
-                    <a:bodyPr/>
-                    <a:lstStyle/>
-                    <a:p>
-                      <a:pPr algn="ctr">
-                        <a:defRPr sz="1200">
-                          <a:solidFill>
-                            <a:srgbClr val="202020"/>
-                          </a:solidFill>
-                          <a:latin typeface="Calibri"/>
-                        </a:defRPr>
-                      </a:pPr>
-                      <a:r>
-                        <a:t>Single-task</a:t>
-                      </a:r>
-                    </a:p>
-                  </a:txBody>
-                  <a:tcPr anchor="ctr">
-                    <a:solidFill>
-                      <a:srgbClr val="F2F2F2"/>
-                    </a:solidFill>
-                  </a:tcPr>
-                </a:tc>
-              </a:tr>
-              <a:tr h="432261">
-                <a:tc>
-                  <a:txBody>
-                    <a:bodyPr/>
-                    <a:lstStyle/>
-                    <a:p>
-                      <a:pPr algn="ctr">
-                        <a:defRPr sz="1200">
-                          <a:solidFill>
-                            <a:srgbClr val="202020"/>
-                          </a:solidFill>
-                          <a:latin typeface="Calibri"/>
-                        </a:defRPr>
-                      </a:pPr>
-                      <a:r>
-                        <a:t>BERT + LLRD</a:t>
-                      </a:r>
-                    </a:p>
-                  </a:txBody>
-                  <a:tcPr anchor="ctr">
-                    <a:solidFill>
-                      <a:srgbClr val="FFFFFF"/>
-                    </a:solidFill>
-                  </a:tcPr>
-                </a:tc>
-                <a:tc>
-                  <a:txBody>
-                    <a:bodyPr/>
-                    <a:lstStyle/>
-                    <a:p>
-                      <a:pPr algn="ctr">
-                        <a:defRPr sz="1200">
-                          <a:solidFill>
-                            <a:srgbClr val="202020"/>
-                          </a:solidFill>
-                          <a:latin typeface="Calibri"/>
-                        </a:defRPr>
-                      </a:pPr>
-                      <a:r>
-                        <a:t>96.5%</a:t>
-                      </a:r>
-                    </a:p>
-                  </a:txBody>
-                  <a:tcPr anchor="ctr">
-                    <a:solidFill>
-                      <a:srgbClr val="FFFFFF"/>
-                    </a:solidFill>
-                  </a:tcPr>
-                </a:tc>
-                <a:tc>
-                  <a:txBody>
-                    <a:bodyPr/>
-                    <a:lstStyle/>
-                    <a:p>
-                      <a:pPr algn="ctr">
-                        <a:defRPr sz="1200">
-                          <a:solidFill>
-                            <a:srgbClr val="202020"/>
-                          </a:solidFill>
-                          <a:latin typeface="Calibri"/>
-                        </a:defRPr>
-                      </a:pPr>
-                      <a:r>
-                        <a:t>0.948</a:t>
-                      </a:r>
-                    </a:p>
-                  </a:txBody>
-                  <a:tcPr anchor="ctr">
-                    <a:solidFill>
-                      <a:srgbClr val="FFFFFF"/>
-                    </a:solidFill>
-                  </a:tcPr>
-                </a:tc>
-                <a:tc>
-                  <a:txBody>
-                    <a:bodyPr/>
-                    <a:lstStyle/>
-                    <a:p>
-                      <a:pPr algn="ctr">
-                        <a:defRPr sz="1200">
-                          <a:solidFill>
-                            <a:srgbClr val="202020"/>
-                          </a:solidFill>
-                          <a:latin typeface="Calibri"/>
-                        </a:defRPr>
-                      </a:pPr>
-                      <a:r>
-                        <a:t>63.7%</a:t>
-                      </a:r>
-                    </a:p>
-                  </a:txBody>
-                  <a:tcPr anchor="ctr">
-                    <a:solidFill>
-                      <a:srgbClr val="FFFFFF"/>
-                    </a:solidFill>
-                  </a:tcPr>
-                </a:tc>
-                <a:tc>
-                  <a:txBody>
-                    <a:bodyPr/>
-                    <a:lstStyle/>
-                    <a:p>
-                      <a:pPr algn="ctr">
-                        <a:defRPr sz="1200">
-                          <a:solidFill>
-                            <a:srgbClr val="202020"/>
-                          </a:solidFill>
-                          <a:latin typeface="Calibri"/>
-                        </a:defRPr>
-                      </a:pPr>
-                      <a:r>
-                        <a:t>0.618</a:t>
-                      </a:r>
-                    </a:p>
-                  </a:txBody>
-                  <a:tcPr anchor="ctr">
-                    <a:solidFill>
-                      <a:srgbClr val="FFFFFF"/>
-                    </a:solidFill>
-                  </a:tcPr>
-                </a:tc>
-                <a:tc>
-                  <a:txBody>
-                    <a:bodyPr/>
-                    <a:lstStyle/>
-                    <a:p>
-                      <a:pPr algn="ctr">
-                        <a:defRPr sz="1200">
-                          <a:solidFill>
-                            <a:srgbClr val="202020"/>
-                          </a:solidFill>
-                          <a:latin typeface="Calibri"/>
-                        </a:defRPr>
-                      </a:pPr>
-                      <a:r>
-                        <a:t>Single-task</a:t>
-                      </a:r>
-                    </a:p>
-                  </a:txBody>
-                  <a:tcPr anchor="ctr">
-                    <a:solidFill>
-                      <a:srgbClr val="FFFFFF"/>
-                    </a:solidFill>
-                  </a:tcPr>
-                </a:tc>
-              </a:tr>
-              <a:tr h="432270">
-                <a:tc>
-                  <a:txBody>
-                    <a:bodyPr/>
-                    <a:lstStyle/>
-                    <a:p>
-                      <a:pPr algn="ctr">
-                        <a:defRPr sz="1200" b="1">
-                          <a:solidFill>
-                            <a:srgbClr val="155724"/>
-                          </a:solidFill>
-                          <a:latin typeface="Calibri"/>
-                        </a:defRPr>
-                      </a:pPr>
-                      <a:r>
-                        <a:t>Multi-task FinBERT</a:t>
-                      </a:r>
-                    </a:p>
-                  </a:txBody>
-                  <a:tcPr anchor="ctr">
-                    <a:solidFill>
-                      <a:srgbClr val="D4EDDA"/>
-                    </a:solidFill>
-                  </a:tcPr>
-                </a:tc>
-                <a:tc>
-                  <a:txBody>
-                    <a:bodyPr/>
-                    <a:lstStyle/>
-                    <a:p>
-                      <a:pPr algn="ctr">
-                        <a:defRPr sz="1200" b="1">
-                          <a:solidFill>
-                            <a:srgbClr val="155724"/>
-                          </a:solidFill>
-                          <a:latin typeface="Calibri"/>
-                        </a:defRPr>
-                      </a:pPr>
-                      <a:r>
-                        <a:t>98.45%</a:t>
-                      </a:r>
-                    </a:p>
-                  </a:txBody>
-                  <a:tcPr anchor="ctr">
-                    <a:solidFill>
-                      <a:srgbClr val="D4EDDA"/>
-                    </a:solidFill>
-                  </a:tcPr>
-                </a:tc>
-                <a:tc>
-                  <a:txBody>
-                    <a:bodyPr/>
-                    <a:lstStyle/>
-                    <a:p>
-                      <a:pPr algn="ctr">
-                        <a:defRPr sz="1200" b="1">
-                          <a:solidFill>
-                            <a:srgbClr val="155724"/>
-                          </a:solidFill>
-                          <a:latin typeface="Calibri"/>
-                        </a:defRPr>
-                      </a:pPr>
-                      <a:r>
-                        <a:t>0.977</a:t>
-                      </a:r>
-                    </a:p>
-                  </a:txBody>
-                  <a:tcPr anchor="ctr">
-                    <a:solidFill>
-                      <a:srgbClr val="D4EDDA"/>
-                    </a:solidFill>
-                  </a:tcPr>
-                </a:tc>
-                <a:tc>
-                  <a:txBody>
-                    <a:bodyPr/>
-                    <a:lstStyle/>
-                    <a:p>
-                      <a:pPr algn="ctr">
-                        <a:defRPr sz="1200" b="1">
-                          <a:solidFill>
-                            <a:srgbClr val="155724"/>
-                          </a:solidFill>
-                          <a:latin typeface="Calibri"/>
-                        </a:defRPr>
-                      </a:pPr>
-                      <a:r>
-                        <a:t>67.74%</a:t>
-                      </a:r>
-                    </a:p>
-                  </a:txBody>
-                  <a:tcPr anchor="ctr">
-                    <a:solidFill>
-                      <a:srgbClr val="D4EDDA"/>
-                    </a:solidFill>
-                  </a:tcPr>
-                </a:tc>
-                <a:tc>
-                  <a:txBody>
-                    <a:bodyPr/>
-                    <a:lstStyle/>
-                    <a:p>
-                      <a:pPr algn="ctr">
-                        <a:defRPr sz="1200" b="1">
-                          <a:solidFill>
-                            <a:srgbClr val="155724"/>
-                          </a:solidFill>
-                          <a:latin typeface="Calibri"/>
-                        </a:defRPr>
-                      </a:pPr>
-                      <a:r>
-                        <a:t>0.668</a:t>
-                      </a:r>
-                    </a:p>
-                  </a:txBody>
-                  <a:tcPr anchor="ctr">
-                    <a:solidFill>
-                      <a:srgbClr val="D4EDDA"/>
-                    </a:solidFill>
-                  </a:tcPr>
-                </a:tc>
-                <a:tc>
-                  <a:txBody>
-                    <a:bodyPr/>
-                    <a:lstStyle/>
-                    <a:p>
-                      <a:pPr algn="ctr">
-                        <a:defRPr sz="1200" b="1">
-                          <a:solidFill>
-                            <a:srgbClr val="155724"/>
-                          </a:solidFill>
-                          <a:latin typeface="Calibri"/>
-                        </a:defRPr>
-                      </a:pPr>
-                      <a:r>
-                        <a:t>BEST</a:t>
-                      </a:r>
-                    </a:p>
-                  </a:txBody>
-                  <a:tcPr anchor="ctr">
-                    <a:solidFill>
-                      <a:srgbClr val="D4EDDA"/>
-                    </a:solidFill>
-                  </a:tcPr>
-                </a:tc>
-              </a:tr>
-            </a:tbl>
-          </a:graphicData>
-        </a:graphic>
-      </p:graphicFrame>
     </p:spTree>
   </p:cSld>
   <p:clrMapOvr>

--- a/presentation/COMP6713_Financial_NLP.pptx
+++ b/presentation/COMP6713_Financial_NLP.pptx
@@ -3963,7 +3963,7 @@
               </a:lnSpc>
             </a:pPr>
             <a:r>
-              <a:t>• Early stopping on combined validation loss</a:t>
+              <a:t>• Best-checkpoint selection by average val macro-F1</a:t>
             </a:r>
           </a:p>
         </p:txBody>
@@ -4294,7 +4294,7 @@
                         </a:defRPr>
                       </a:pPr>
                       <a:r>
-                        <a:t>0.9800</a:t>
+                        <a:t>0.9846</a:t>
                       </a:r>
                     </a:p>
                   </a:txBody>
@@ -4318,7 +4318,7 @@
                         </a:defRPr>
                       </a:pPr>
                       <a:r>
-                        <a:t>0.6583</a:t>
+                        <a:t>0.6835</a:t>
                       </a:r>
                     </a:p>
                   </a:txBody>
@@ -4574,7 +4574,7 @@
                 <a:gridCol w="1645920"/>
                 <a:gridCol w="2926080"/>
               </a:tblGrid>
-              <a:tr h="432261">
+              <a:tr h="365760">
                 <a:tc>
                   <a:txBody>
                     <a:bodyPr/>
@@ -4720,7 +4720,7 @@
                   </a:tcPr>
                 </a:tc>
               </a:tr>
-              <a:tr h="432261">
+              <a:tr h="365760">
                 <a:tc>
                   <a:txBody>
                     <a:bodyPr/>
@@ -4759,7 +4759,7 @@
                         </a:defRPr>
                       </a:pPr>
                       <a:r>
-                        <a:t>87.0%</a:t>
+                        <a:t>87.20%</a:t>
                       </a:r>
                     </a:p>
                   </a:txBody>
@@ -4783,7 +4783,7 @@
                         </a:defRPr>
                       </a:pPr>
                       <a:r>
-                        <a:t>0.838</a:t>
+                        <a:t>0.823</a:t>
                       </a:r>
                     </a:p>
                   </a:txBody>
@@ -4807,7 +4807,7 @@
                         </a:defRPr>
                       </a:pPr>
                       <a:r>
-                        <a:t>60.1%</a:t>
+                        <a:t>60.89%</a:t>
                       </a:r>
                     </a:p>
                   </a:txBody>
@@ -4831,7 +4831,7 @@
                         </a:defRPr>
                       </a:pPr>
                       <a:r>
-                        <a:t>0.561</a:t>
+                        <a:t>0.587</a:t>
                       </a:r>
                     </a:p>
                   </a:txBody>
@@ -4866,7 +4866,7 @@
                   </a:tcPr>
                 </a:tc>
               </a:tr>
-              <a:tr h="432261">
+              <a:tr h="365760">
                 <a:tc>
                   <a:txBody>
                     <a:bodyPr/>
@@ -4905,7 +4905,7 @@
                         </a:defRPr>
                       </a:pPr>
                       <a:r>
-                        <a:t>89.4%</a:t>
+                        <a:t>89.40%</a:t>
                       </a:r>
                     </a:p>
                   </a:txBody>
@@ -4929,7 +4929,7 @@
                         </a:defRPr>
                       </a:pPr>
                       <a:r>
-                        <a:t>0.866</a:t>
+                        <a:t>0.853</a:t>
                       </a:r>
                     </a:p>
                   </a:txBody>
@@ -4953,7 +4953,7 @@
                         </a:defRPr>
                       </a:pPr>
                       <a:r>
-                        <a:t>63.3%</a:t>
+                        <a:t>63.31%</a:t>
                       </a:r>
                     </a:p>
                   </a:txBody>
@@ -4977,7 +4977,7 @@
                         </a:defRPr>
                       </a:pPr>
                       <a:r>
-                        <a:t>0.583</a:t>
+                        <a:t>0.606</a:t>
                       </a:r>
                     </a:p>
                   </a:txBody>
@@ -5012,7 +5012,7 @@
                   </a:tcPr>
                 </a:tc>
               </a:tr>
-              <a:tr h="432261">
+              <a:tr h="365760">
                 <a:tc>
                   <a:txBody>
                     <a:bodyPr/>
@@ -5027,12 +5027,304 @@
                         </a:defRPr>
                       </a:pPr>
                       <a:r>
+                        <a:t>TF-IDF (tri) + LR</a:t>
+                      </a:r>
+                    </a:p>
+                  </a:txBody>
+                  <a:tcPr anchor="ctr">
+                    <a:solidFill>
+                      <a:srgbClr val="FFFFFF"/>
+                    </a:solidFill>
+                  </a:tcPr>
+                </a:tc>
+                <a:tc>
+                  <a:txBody>
+                    <a:bodyPr/>
+                    <a:lstStyle/>
+                    <a:p>
+                      <a:pPr algn="ctr">
+                        <a:defRPr sz="1200">
+                          <a:solidFill>
+                            <a:srgbClr val="202020"/>
+                          </a:solidFill>
+                          <a:latin typeface="Calibri"/>
+                        </a:defRPr>
+                      </a:pPr>
+                      <a:r>
+                        <a:t>87.86%</a:t>
+                      </a:r>
+                    </a:p>
+                  </a:txBody>
+                  <a:tcPr anchor="ctr">
+                    <a:solidFill>
+                      <a:srgbClr val="FFFFFF"/>
+                    </a:solidFill>
+                  </a:tcPr>
+                </a:tc>
+                <a:tc>
+                  <a:txBody>
+                    <a:bodyPr/>
+                    <a:lstStyle/>
+                    <a:p>
+                      <a:pPr algn="ctr">
+                        <a:defRPr sz="1200">
+                          <a:solidFill>
+                            <a:srgbClr val="202020"/>
+                          </a:solidFill>
+                          <a:latin typeface="Calibri"/>
+                        </a:defRPr>
+                      </a:pPr>
+                      <a:r>
+                        <a:t>0.831</a:t>
+                      </a:r>
+                    </a:p>
+                  </a:txBody>
+                  <a:tcPr anchor="ctr">
+                    <a:solidFill>
+                      <a:srgbClr val="FFFFFF"/>
+                    </a:solidFill>
+                  </a:tcPr>
+                </a:tc>
+                <a:tc>
+                  <a:txBody>
+                    <a:bodyPr/>
+                    <a:lstStyle/>
+                    <a:p>
+                      <a:pPr algn="ctr">
+                        <a:defRPr sz="1200">
+                          <a:solidFill>
+                            <a:srgbClr val="202020"/>
+                          </a:solidFill>
+                          <a:latin typeface="Calibri"/>
+                        </a:defRPr>
+                      </a:pPr>
+                      <a:r>
+                        <a:t>61.09%</a:t>
+                      </a:r>
+                    </a:p>
+                  </a:txBody>
+                  <a:tcPr anchor="ctr">
+                    <a:solidFill>
+                      <a:srgbClr val="FFFFFF"/>
+                    </a:solidFill>
+                  </a:tcPr>
+                </a:tc>
+                <a:tc>
+                  <a:txBody>
+                    <a:bodyPr/>
+                    <a:lstStyle/>
+                    <a:p>
+                      <a:pPr algn="ctr">
+                        <a:defRPr sz="1200">
+                          <a:solidFill>
+                            <a:srgbClr val="202020"/>
+                          </a:solidFill>
+                          <a:latin typeface="Calibri"/>
+                        </a:defRPr>
+                      </a:pPr>
+                      <a:r>
+                        <a:t>0.591</a:t>
+                      </a:r>
+                    </a:p>
+                  </a:txBody>
+                  <a:tcPr anchor="ctr">
+                    <a:solidFill>
+                      <a:srgbClr val="FFFFFF"/>
+                    </a:solidFill>
+                  </a:tcPr>
+                </a:tc>
+                <a:tc>
+                  <a:txBody>
+                    <a:bodyPr/>
+                    <a:lstStyle/>
+                    <a:p>
+                      <a:pPr algn="ctr">
+                        <a:defRPr sz="1200">
+                          <a:solidFill>
+                            <a:srgbClr val="202020"/>
+                          </a:solidFill>
+                          <a:latin typeface="Calibri"/>
+                        </a:defRPr>
+                      </a:pPr>
+                      <a:r>
+                        <a:t>Trigram variant</a:t>
+                      </a:r>
+                    </a:p>
+                  </a:txBody>
+                  <a:tcPr anchor="ctr">
+                    <a:solidFill>
+                      <a:srgbClr val="FFFFFF"/>
+                    </a:solidFill>
+                  </a:tcPr>
+                </a:tc>
+              </a:tr>
+              <a:tr h="365760">
+                <a:tc>
+                  <a:txBody>
+                    <a:bodyPr/>
+                    <a:lstStyle/>
+                    <a:p>
+                      <a:pPr algn="ctr">
+                        <a:defRPr sz="1200">
+                          <a:solidFill>
+                            <a:srgbClr val="202020"/>
+                          </a:solidFill>
+                          <a:latin typeface="Calibri"/>
+                        </a:defRPr>
+                      </a:pPr>
+                      <a:r>
                         <a:t>LM Lexicon (rule)</a:t>
                       </a:r>
                     </a:p>
                   </a:txBody>
                   <a:tcPr anchor="ctr">
                     <a:solidFill>
+                      <a:srgbClr val="F2F2F2"/>
+                    </a:solidFill>
+                  </a:tcPr>
+                </a:tc>
+                <a:tc>
+                  <a:txBody>
+                    <a:bodyPr/>
+                    <a:lstStyle/>
+                    <a:p>
+                      <a:pPr algn="ctr">
+                        <a:defRPr sz="1200">
+                          <a:solidFill>
+                            <a:srgbClr val="202020"/>
+                          </a:solidFill>
+                          <a:latin typeface="Calibri"/>
+                        </a:defRPr>
+                      </a:pPr>
+                      <a:r>
+                        <a:t>69.32%</a:t>
+                      </a:r>
+                    </a:p>
+                  </a:txBody>
+                  <a:tcPr anchor="ctr">
+                    <a:solidFill>
+                      <a:srgbClr val="F2F2F2"/>
+                    </a:solidFill>
+                  </a:tcPr>
+                </a:tc>
+                <a:tc>
+                  <a:txBody>
+                    <a:bodyPr/>
+                    <a:lstStyle/>
+                    <a:p>
+                      <a:pPr algn="ctr">
+                        <a:defRPr sz="1200">
+                          <a:solidFill>
+                            <a:srgbClr val="202020"/>
+                          </a:solidFill>
+                          <a:latin typeface="Calibri"/>
+                        </a:defRPr>
+                      </a:pPr>
+                      <a:r>
+                        <a:t>0.532</a:t>
+                      </a:r>
+                    </a:p>
+                  </a:txBody>
+                  <a:tcPr anchor="ctr">
+                    <a:solidFill>
+                      <a:srgbClr val="F2F2F2"/>
+                    </a:solidFill>
+                  </a:tcPr>
+                </a:tc>
+                <a:tc>
+                  <a:txBody>
+                    <a:bodyPr/>
+                    <a:lstStyle/>
+                    <a:p>
+                      <a:pPr algn="ctr">
+                        <a:defRPr sz="1200">
+                          <a:solidFill>
+                            <a:srgbClr val="202020"/>
+                          </a:solidFill>
+                          <a:latin typeface="Calibri"/>
+                        </a:defRPr>
+                      </a:pPr>
+                      <a:r>
+                        <a:t>41.53%</a:t>
+                      </a:r>
+                    </a:p>
+                  </a:txBody>
+                  <a:tcPr anchor="ctr">
+                    <a:solidFill>
+                      <a:srgbClr val="F2F2F2"/>
+                    </a:solidFill>
+                  </a:tcPr>
+                </a:tc>
+                <a:tc>
+                  <a:txBody>
+                    <a:bodyPr/>
+                    <a:lstStyle/>
+                    <a:p>
+                      <a:pPr algn="ctr">
+                        <a:defRPr sz="1200">
+                          <a:solidFill>
+                            <a:srgbClr val="202020"/>
+                          </a:solidFill>
+                          <a:latin typeface="Calibri"/>
+                        </a:defRPr>
+                      </a:pPr>
+                      <a:r>
+                        <a:t>0.389</a:t>
+                      </a:r>
+                    </a:p>
+                  </a:txBody>
+                  <a:tcPr anchor="ctr">
+                    <a:solidFill>
+                      <a:srgbClr val="F2F2F2"/>
+                    </a:solidFill>
+                  </a:tcPr>
+                </a:tc>
+                <a:tc>
+                  <a:txBody>
+                    <a:bodyPr/>
+                    <a:lstStyle/>
+                    <a:p>
+                      <a:pPr algn="ctr">
+                        <a:defRPr sz="1200">
+                          <a:solidFill>
+                            <a:srgbClr val="202020"/>
+                          </a:solidFill>
+                          <a:latin typeface="Calibri"/>
+                        </a:defRPr>
+                      </a:pPr>
+                      <a:r>
+                        <a:t>No context</a:t>
+                      </a:r>
+                    </a:p>
+                  </a:txBody>
+                  <a:tcPr anchor="ctr">
+                    <a:solidFill>
+                      <a:srgbClr val="F2F2F2"/>
+                    </a:solidFill>
+                  </a:tcPr>
+                </a:tc>
+              </a:tr>
+              <a:tr h="365760">
+                <a:tc>
+                  <a:txBody>
+                    <a:bodyPr/>
+                    <a:lstStyle/>
+                    <a:p>
+                      <a:pPr algn="ctr">
+                        <a:defRPr sz="1200">
+                          <a:solidFill>
+                            <a:srgbClr val="202020"/>
+                          </a:solidFill>
+                          <a:latin typeface="Calibri"/>
+                        </a:defRPr>
+                      </a:pPr>
+                      <a:r>
+                        <a:t>TF-IDF + LM + LR</a:t>
+                      </a:r>
+                    </a:p>
+                  </a:txBody>
+                  <a:tcPr anchor="ctr">
+                    <a:solidFill>
                       <a:srgbClr val="FFFFFF"/>
                     </a:solidFill>
                   </a:tcPr>
@@ -5051,7 +5343,7 @@
                         </a:defRPr>
                       </a:pPr>
                       <a:r>
-                        <a:t>62.8%</a:t>
+                        <a:t>85.43%</a:t>
                       </a:r>
                     </a:p>
                   </a:txBody>
@@ -5075,7 +5367,7 @@
                         </a:defRPr>
                       </a:pPr>
                       <a:r>
-                        <a:t>0.510</a:t>
+                        <a:t>0.805</a:t>
                       </a:r>
                     </a:p>
                   </a:txBody>
@@ -5099,7 +5391,7 @@
                         </a:defRPr>
                       </a:pPr>
                       <a:r>
-                        <a:t>45.2%</a:t>
+                        <a:t>61.09%</a:t>
                       </a:r>
                     </a:p>
                   </a:txBody>
@@ -5123,7 +5415,7 @@
                         </a:defRPr>
                       </a:pPr>
                       <a:r>
-                        <a:t>0.388</a:t>
+                        <a:t>0.586</a:t>
                       </a:r>
                     </a:p>
                   </a:txBody>
@@ -5147,7 +5439,7 @@
                         </a:defRPr>
                       </a:pPr>
                       <a:r>
-                        <a:t>No context</a:t>
+                        <a:t>Lexicon aug.</a:t>
                       </a:r>
                     </a:p>
                   </a:txBody>
@@ -5158,7 +5450,7 @@
                   </a:tcPr>
                 </a:tc>
               </a:tr>
-              <a:tr h="432261">
+              <a:tr h="365760">
                 <a:tc>
                   <a:txBody>
                     <a:bodyPr/>
@@ -5173,7 +5465,7 @@
                         </a:defRPr>
                       </a:pPr>
                       <a:r>
-                        <a:t>TF-IDF + LM + SVM</a:t>
+                        <a:t>FinBERT zero-shot</a:t>
                       </a:r>
                     </a:p>
                   </a:txBody>
@@ -5197,7 +5489,7 @@
                         </a:defRPr>
                       </a:pPr>
                       <a:r>
-                        <a:t>89.6%</a:t>
+                        <a:t>97.35%</a:t>
                       </a:r>
                     </a:p>
                   </a:txBody>
@@ -5221,7 +5513,7 @@
                         </a:defRPr>
                       </a:pPr>
                       <a:r>
-                        <a:t>0.869</a:t>
+                        <a:t>0.965</a:t>
                       </a:r>
                     </a:p>
                   </a:txBody>
@@ -5245,7 +5537,7 @@
                         </a:defRPr>
                       </a:pPr>
                       <a:r>
-                        <a:t>62.8%</a:t>
+                        <a:t>49.80%</a:t>
                       </a:r>
                     </a:p>
                   </a:txBody>
@@ -5269,7 +5561,7 @@
                         </a:defRPr>
                       </a:pPr>
                       <a:r>
-                        <a:t>0.579</a:t>
+                        <a:t>0.487</a:t>
                       </a:r>
                     </a:p>
                   </a:txBody>
@@ -5293,7 +5585,7 @@
                         </a:defRPr>
                       </a:pPr>
                       <a:r>
-                        <a:t>Lexicon aug.</a:t>
+                        <a:t>Native head</a:t>
                       </a:r>
                     </a:p>
                   </a:txBody>
@@ -5304,7 +5596,7 @@
                   </a:tcPr>
                 </a:tc>
               </a:tr>
-              <a:tr h="432261">
+              <a:tr h="365760">
                 <a:tc>
                   <a:txBody>
                     <a:bodyPr/>
@@ -5319,7 +5611,7 @@
                         </a:defRPr>
                       </a:pPr>
                       <a:r>
-                        <a:t>FinBERT zero-shot</a:t>
+                        <a:t>FinBERT 16-shot</a:t>
                       </a:r>
                     </a:p>
                   </a:txBody>
@@ -5343,7 +5635,7 @@
                         </a:defRPr>
                       </a:pPr>
                       <a:r>
-                        <a:t>97.35%</a:t>
+                        <a:t>98.01%</a:t>
                       </a:r>
                     </a:p>
                   </a:txBody>
@@ -5367,7 +5659,7 @@
                         </a:defRPr>
                       </a:pPr>
                       <a:r>
-                        <a:t>0.958</a:t>
+                        <a:t>0.969</a:t>
                       </a:r>
                     </a:p>
                   </a:txBody>
@@ -5391,7 +5683,7 @@
                         </a:defRPr>
                       </a:pPr>
                       <a:r>
-                        <a:t>—</a:t>
+                        <a:t>48.59%</a:t>
                       </a:r>
                     </a:p>
                   </a:txBody>
@@ -5415,7 +5707,7 @@
                         </a:defRPr>
                       </a:pPr>
                       <a:r>
-                        <a:t>—</a:t>
+                        <a:t>0.455</a:t>
                       </a:r>
                     </a:p>
                   </a:txBody>
@@ -5439,7 +5731,7 @@
                         </a:defRPr>
                       </a:pPr>
                       <a:r>
-                        <a:t>Native head</a:t>
+                        <a:t>Linear probe</a:t>
                       </a:r>
                     </a:p>
                   </a:txBody>
@@ -5450,7 +5742,7 @@
                   </a:tcPr>
                 </a:tc>
               </a:tr>
-              <a:tr h="432261">
+              <a:tr h="365760">
                 <a:tc>
                   <a:txBody>
                     <a:bodyPr/>
@@ -5465,7 +5757,7 @@
                         </a:defRPr>
                       </a:pPr>
                       <a:r>
-                        <a:t>FinBERT 16-shot</a:t>
+                        <a:t>BERT 16-shot</a:t>
                       </a:r>
                     </a:p>
                   </a:txBody>
@@ -5489,7 +5781,7 @@
                         </a:defRPr>
                       </a:pPr>
                       <a:r>
-                        <a:t>97.70%</a:t>
+                        <a:t>74.61%</a:t>
                       </a:r>
                     </a:p>
                   </a:txBody>
@@ -5513,7 +5805,7 @@
                         </a:defRPr>
                       </a:pPr>
                       <a:r>
-                        <a:t>0.963</a:t>
+                        <a:t>0.660</a:t>
                       </a:r>
                     </a:p>
                   </a:txBody>
@@ -5537,7 +5829,7 @@
                         </a:defRPr>
                       </a:pPr>
                       <a:r>
-                        <a:t>54.0%</a:t>
+                        <a:t>37.90%</a:t>
                       </a:r>
                     </a:p>
                   </a:txBody>
@@ -5561,7 +5853,7 @@
                         </a:defRPr>
                       </a:pPr>
                       <a:r>
-                        <a:t>0.490</a:t>
+                        <a:t>0.369</a:t>
                       </a:r>
                     </a:p>
                   </a:txBody>
@@ -5585,7 +5877,7 @@
                         </a:defRPr>
                       </a:pPr>
                       <a:r>
-                        <a:t>SetFit</a:t>
+                        <a:t>Linear probe</a:t>
                       </a:r>
                     </a:p>
                   </a:txBody>
@@ -5596,7 +5888,7 @@
                   </a:tcPr>
                 </a:tc>
               </a:tr>
-              <a:tr h="432261">
+              <a:tr h="365760">
                 <a:tc>
                   <a:txBody>
                     <a:bodyPr/>
@@ -5611,7 +5903,7 @@
                         </a:defRPr>
                       </a:pPr>
                       <a:r>
-                        <a:t>BERT 16-shot</a:t>
+                        <a:t>RoBERTa 16-shot</a:t>
                       </a:r>
                     </a:p>
                   </a:txBody>
@@ -5635,7 +5927,7 @@
                         </a:defRPr>
                       </a:pPr>
                       <a:r>
-                        <a:t>74.20%</a:t>
+                        <a:t>75.72%</a:t>
                       </a:r>
                     </a:p>
                   </a:txBody>
@@ -5659,7 +5951,7 @@
                         </a:defRPr>
                       </a:pPr>
                       <a:r>
-                        <a:t>0.668</a:t>
+                        <a:t>0.644</a:t>
                       </a:r>
                     </a:p>
                   </a:txBody>
@@ -5683,7 +5975,7 @@
                         </a:defRPr>
                       </a:pPr>
                       <a:r>
-                        <a:t>48.8%</a:t>
+                        <a:t>35.89%</a:t>
                       </a:r>
                     </a:p>
                   </a:txBody>
@@ -5707,7 +5999,7 @@
                         </a:defRPr>
                       </a:pPr>
                       <a:r>
-                        <a:t>0.433</a:t>
+                        <a:t>0.349</a:t>
                       </a:r>
                     </a:p>
                   </a:txBody>
@@ -5731,7 +6023,7 @@
                         </a:defRPr>
                       </a:pPr>
                       <a:r>
-                        <a:t>SetFit</a:t>
+                        <a:t>Linear probe</a:t>
                       </a:r>
                     </a:p>
                   </a:txBody>
@@ -5742,7 +6034,7 @@
                   </a:tcPr>
                 </a:tc>
               </a:tr>
-              <a:tr h="432261">
+              <a:tr h="365760">
                 <a:tc>
                   <a:txBody>
                     <a:bodyPr/>
@@ -5781,7 +6073,7 @@
                         </a:defRPr>
                       </a:pPr>
                       <a:r>
-                        <a:t>96.7%</a:t>
+                        <a:t>96.69%</a:t>
                       </a:r>
                     </a:p>
                   </a:txBody>
@@ -5805,7 +6097,7 @@
                         </a:defRPr>
                       </a:pPr>
                       <a:r>
-                        <a:t>0.952</a:t>
+                        <a:t>0.947</a:t>
                       </a:r>
                     </a:p>
                   </a:txBody>
@@ -5829,7 +6121,7 @@
                         </a:defRPr>
                       </a:pPr>
                       <a:r>
-                        <a:t>64.3%</a:t>
+                        <a:t>61.29%</a:t>
                       </a:r>
                     </a:p>
                   </a:txBody>
@@ -5853,7 +6145,7 @@
                         </a:defRPr>
                       </a:pPr>
                       <a:r>
-                        <a:t>0.626</a:t>
+                        <a:t>0.599</a:t>
                       </a:r>
                     </a:p>
                   </a:txBody>
@@ -5888,7 +6180,7 @@
                   </a:tcPr>
                 </a:tc>
               </a:tr>
-              <a:tr h="432261">
+              <a:tr h="365760">
                 <a:tc>
                   <a:txBody>
                     <a:bodyPr/>
@@ -5927,7 +6219,7 @@
                         </a:defRPr>
                       </a:pPr>
                       <a:r>
-                        <a:t>96.5%</a:t>
+                        <a:t>96.91%</a:t>
                       </a:r>
                     </a:p>
                   </a:txBody>
@@ -5951,7 +6243,7 @@
                         </a:defRPr>
                       </a:pPr>
                       <a:r>
-                        <a:t>0.948</a:t>
+                        <a:t>0.953</a:t>
                       </a:r>
                     </a:p>
                   </a:txBody>
@@ -5975,7 +6267,7 @@
                         </a:defRPr>
                       </a:pPr>
                       <a:r>
-                        <a:t>63.7%</a:t>
+                        <a:t>65.12%</a:t>
                       </a:r>
                     </a:p>
                   </a:txBody>
@@ -5999,7 +6291,7 @@
                         </a:defRPr>
                       </a:pPr>
                       <a:r>
-                        <a:t>0.618</a:t>
+                        <a:t>0.637</a:t>
                       </a:r>
                     </a:p>
                   </a:txBody>
@@ -6034,7 +6326,7 @@
                   </a:tcPr>
                 </a:tc>
               </a:tr>
-              <a:tr h="432270">
+              <a:tr h="365760">
                 <a:tc>
                   <a:txBody>
                     <a:bodyPr/>
@@ -7538,7 +7830,7 @@
                 <a:gridCol w="2560320"/>
                 <a:gridCol w="2926080"/>
               </a:tblGrid>
-              <a:tr h="335280">
+              <a:tr h="287382">
                 <a:tc>
                   <a:txBody>
                     <a:bodyPr/>
@@ -7553,7 +7845,7 @@
                         </a:defRPr>
                       </a:pPr>
                       <a:r>
-                        <a:t>Error Type</a:t>
+                        <a:t>Metric</a:t>
                       </a:r>
                     </a:p>
                   </a:txBody>
@@ -7636,7 +7928,7 @@
                   </a:tcPr>
                 </a:tc>
               </a:tr>
-              <a:tr h="335280">
+              <a:tr h="287382">
                 <a:tc>
                   <a:txBody>
                     <a:bodyPr/>
@@ -7651,7 +7943,7 @@
                         </a:defRPr>
                       </a:pPr>
                       <a:r>
-                        <a:t>Neutral→Hawkish (stance)</a:t>
+                        <a:t>Sentiment accuracy</a:t>
                       </a:r>
                     </a:p>
                   </a:txBody>
@@ -7675,7 +7967,7 @@
                         </a:defRPr>
                       </a:pPr>
                       <a:r>
-                        <a:t>18.2%</a:t>
+                        <a:t>96.69%</a:t>
                       </a:r>
                     </a:p>
                   </a:txBody>
@@ -7699,7 +7991,7 @@
                         </a:defRPr>
                       </a:pPr>
                       <a:r>
-                        <a:t>15.4%</a:t>
+                        <a:t>98.45%</a:t>
                       </a:r>
                     </a:p>
                   </a:txBody>
@@ -7723,7 +8015,7 @@
                         </a:defRPr>
                       </a:pPr>
                       <a:r>
-                        <a:t>−2.8 pp</a:t>
+                        <a:t>+1.76 pp</a:t>
                       </a:r>
                     </a:p>
                   </a:txBody>
@@ -7734,7 +8026,7 @@
                   </a:tcPr>
                 </a:tc>
               </a:tr>
-              <a:tr h="335280">
+              <a:tr h="287382">
                 <a:tc>
                   <a:txBody>
                     <a:bodyPr/>
@@ -7749,7 +8041,7 @@
                         </a:defRPr>
                       </a:pPr>
                       <a:r>
-                        <a:t>Hawkish→Neutral (stance)</a:t>
+                        <a:t>Sentiment macro-F1</a:t>
                       </a:r>
                     </a:p>
                   </a:txBody>
@@ -7773,7 +8065,7 @@
                         </a:defRPr>
                       </a:pPr>
                       <a:r>
-                        <a:t>14.6%</a:t>
+                        <a:t>0.9467</a:t>
                       </a:r>
                     </a:p>
                   </a:txBody>
@@ -7797,7 +8089,7 @@
                         </a:defRPr>
                       </a:pPr>
                       <a:r>
-                        <a:t>13.1%</a:t>
+                        <a:t>0.9772</a:t>
                       </a:r>
                     </a:p>
                   </a:txBody>
@@ -7821,7 +8113,7 @@
                         </a:defRPr>
                       </a:pPr>
                       <a:r>
-                        <a:t>−1.5 pp</a:t>
+                        <a:t>+3.05 pp</a:t>
                       </a:r>
                     </a:p>
                   </a:txBody>
@@ -7832,7 +8124,7 @@
                   </a:tcPr>
                 </a:tc>
               </a:tr>
-              <a:tr h="335280">
+              <a:tr h="287382">
                 <a:tc>
                   <a:txBody>
                     <a:bodyPr/>
@@ -7847,7 +8139,7 @@
                         </a:defRPr>
                       </a:pPr>
                       <a:r>
-                        <a:t>Neutral→Negative (sent.)</a:t>
+                        <a:t>Sentiment error rate</a:t>
                       </a:r>
                     </a:p>
                   </a:txBody>
@@ -7871,7 +8163,7 @@
                         </a:defRPr>
                       </a:pPr>
                       <a:r>
-                        <a:t>2.1%</a:t>
+                        <a:t>3.31%</a:t>
                       </a:r>
                     </a:p>
                   </a:txBody>
@@ -7895,7 +8187,7 @@
                         </a:defRPr>
                       </a:pPr>
                       <a:r>
-                        <a:t>1.4%</a:t>
+                        <a:t>1.55%</a:t>
                       </a:r>
                     </a:p>
                   </a:txBody>
@@ -7919,7 +8211,7 @@
                         </a:defRPr>
                       </a:pPr>
                       <a:r>
-                        <a:t>−0.7 pp</a:t>
+                        <a:t>−1.76 pp</a:t>
                       </a:r>
                     </a:p>
                   </a:txBody>
@@ -7930,7 +8222,7 @@
                   </a:tcPr>
                 </a:tc>
               </a:tr>
-              <a:tr h="335280">
+              <a:tr h="287382">
                 <a:tc>
                   <a:txBody>
                     <a:bodyPr/>
@@ -7945,7 +8237,7 @@
                         </a:defRPr>
                       </a:pPr>
                       <a:r>
-                        <a:t>Overall error rate (sent.)</a:t>
+                        <a:t>Stance accuracy</a:t>
                       </a:r>
                     </a:p>
                   </a:txBody>
@@ -7969,7 +8261,7 @@
                         </a:defRPr>
                       </a:pPr>
                       <a:r>
-                        <a:t>3.3%</a:t>
+                        <a:t>61.29%</a:t>
                       </a:r>
                     </a:p>
                   </a:txBody>
@@ -7993,7 +8285,7 @@
                         </a:defRPr>
                       </a:pPr>
                       <a:r>
-                        <a:t>1.99%</a:t>
+                        <a:t>67.74%</a:t>
                       </a:r>
                     </a:p>
                   </a:txBody>
@@ -8017,7 +8309,7 @@
                         </a:defRPr>
                       </a:pPr>
                       <a:r>
-                        <a:t>−1.3 pp</a:t>
+                        <a:t>+6.45 pp</a:t>
                       </a:r>
                     </a:p>
                   </a:txBody>
@@ -8028,7 +8320,7 @@
                   </a:tcPr>
                 </a:tc>
               </a:tr>
-              <a:tr h="335280">
+              <a:tr h="287382">
                 <a:tc>
                   <a:txBody>
                     <a:bodyPr/>
@@ -8043,7 +8335,7 @@
                         </a:defRPr>
                       </a:pPr>
                       <a:r>
-                        <a:t>Overall error rate (stance)</a:t>
+                        <a:t>Stance macro-F1</a:t>
                       </a:r>
                     </a:p>
                   </a:txBody>
@@ -8067,7 +8359,7 @@
                         </a:defRPr>
                       </a:pPr>
                       <a:r>
-                        <a:t>35.7%</a:t>
+                        <a:t>0.5988</a:t>
                       </a:r>
                     </a:p>
                   </a:txBody>
@@ -8091,7 +8383,7 @@
                         </a:defRPr>
                       </a:pPr>
                       <a:r>
-                        <a:t>34.07%</a:t>
+                        <a:t>0.6684</a:t>
                       </a:r>
                     </a:p>
                   </a:txBody>
@@ -8115,13 +8407,111 @@
                         </a:defRPr>
                       </a:pPr>
                       <a:r>
-                        <a:t>−1.6 pp</a:t>
+                        <a:t>+6.96 pp</a:t>
                       </a:r>
                     </a:p>
                   </a:txBody>
                   <a:tcPr anchor="ctr">
                     <a:solidFill>
                       <a:srgbClr val="FFFFFF"/>
+                    </a:solidFill>
+                  </a:tcPr>
+                </a:tc>
+              </a:tr>
+              <a:tr h="287388">
+                <a:tc>
+                  <a:txBody>
+                    <a:bodyPr/>
+                    <a:lstStyle/>
+                    <a:p>
+                      <a:pPr algn="ctr">
+                        <a:defRPr sz="1200">
+                          <a:solidFill>
+                            <a:srgbClr val="202020"/>
+                          </a:solidFill>
+                          <a:latin typeface="Calibri"/>
+                        </a:defRPr>
+                      </a:pPr>
+                      <a:r>
+                        <a:t>Stance error rate</a:t>
+                      </a:r>
+                    </a:p>
+                  </a:txBody>
+                  <a:tcPr anchor="ctr">
+                    <a:solidFill>
+                      <a:srgbClr val="F2F2F2"/>
+                    </a:solidFill>
+                  </a:tcPr>
+                </a:tc>
+                <a:tc>
+                  <a:txBody>
+                    <a:bodyPr/>
+                    <a:lstStyle/>
+                    <a:p>
+                      <a:pPr algn="ctr">
+                        <a:defRPr sz="1200">
+                          <a:solidFill>
+                            <a:srgbClr val="202020"/>
+                          </a:solidFill>
+                          <a:latin typeface="Calibri"/>
+                        </a:defRPr>
+                      </a:pPr>
+                      <a:r>
+                        <a:t>38.71%</a:t>
+                      </a:r>
+                    </a:p>
+                  </a:txBody>
+                  <a:tcPr anchor="ctr">
+                    <a:solidFill>
+                      <a:srgbClr val="F2F2F2"/>
+                    </a:solidFill>
+                  </a:tcPr>
+                </a:tc>
+                <a:tc>
+                  <a:txBody>
+                    <a:bodyPr/>
+                    <a:lstStyle/>
+                    <a:p>
+                      <a:pPr algn="ctr">
+                        <a:defRPr sz="1200">
+                          <a:solidFill>
+                            <a:srgbClr val="202020"/>
+                          </a:solidFill>
+                          <a:latin typeface="Calibri"/>
+                        </a:defRPr>
+                      </a:pPr>
+                      <a:r>
+                        <a:t>32.26%</a:t>
+                      </a:r>
+                    </a:p>
+                  </a:txBody>
+                  <a:tcPr anchor="ctr">
+                    <a:solidFill>
+                      <a:srgbClr val="F2F2F2"/>
+                    </a:solidFill>
+                  </a:tcPr>
+                </a:tc>
+                <a:tc>
+                  <a:txBody>
+                    <a:bodyPr/>
+                    <a:lstStyle/>
+                    <a:p>
+                      <a:pPr algn="ctr">
+                        <a:defRPr sz="1200">
+                          <a:solidFill>
+                            <a:srgbClr val="202020"/>
+                          </a:solidFill>
+                          <a:latin typeface="Calibri"/>
+                        </a:defRPr>
+                      </a:pPr>
+                      <a:r>
+                        <a:t>−6.45 pp</a:t>
+                      </a:r>
+                    </a:p>
+                  </a:txBody>
+                  <a:tcPr anchor="ctr">
+                    <a:solidFill>
+                      <a:srgbClr val="F2F2F2"/>
                     </a:solidFill>
                   </a:tcPr>
                 </a:tc>
@@ -11127,7 +11517,7 @@
                         </a:defRPr>
                       </a:pPr>
                       <a:r>
-                        <a:t>Neutral ~50%, Hawkish ~30%,</a:t>
+                        <a:t>Neutral ~49%, Dovish ~26%,</a:t>
                       </a:r>
                     </a:p>
                     <a:p>
@@ -11140,7 +11530,7 @@
                         </a:defRPr>
                       </a:pPr>
                       <a:r>
-                        <a:t>Dovish ~20%</a:t>
+                        <a:t>Hawkish ~24%</a:t>
                       </a:r>
                     </a:p>
                   </a:txBody>
@@ -11275,7 +11665,7 @@
                         </a:defRPr>
                       </a:pPr>
                       <a:r>
-                        <a:t>Neutral ~59%, Positive ~28%,</a:t>
+                        <a:t>Neutral ~61%, Positive ~25%,</a:t>
                       </a:r>
                     </a:p>
                     <a:p>
@@ -11288,7 +11678,7 @@
                         </a:defRPr>
                       </a:pPr>
                       <a:r>
-                        <a:t>Negative ~13%</a:t>
+                        <a:t>Negative ~14%</a:t>
                       </a:r>
                     </a:p>
                   </a:txBody>
@@ -11954,7 +12344,7 @@
         <p:spPr>
           <a:xfrm>
             <a:off x="274320" y="1371600"/>
-            <a:ext cx="5669280" cy="1964338"/>
+            <a:ext cx="5669280" cy="1977465"/>
           </a:xfrm>
           <a:prstGeom prst="rect">
             <a:avLst/>
@@ -11978,7 +12368,7 @@
         <p:spPr>
           <a:xfrm>
             <a:off x="6217920" y="1371600"/>
-            <a:ext cx="5669280" cy="1964338"/>
+            <a:ext cx="5669280" cy="1967187"/>
           </a:xfrm>
           <a:prstGeom prst="rect">
             <a:avLst/>
@@ -13078,7 +13468,7 @@
               </a:lnSpc>
             </a:pPr>
             <a:r>
-              <a:t>• Few-shot: 16-shot in-context w/ SetFit</a:t>
+              <a:t>• Few-shot: 16-shot linear probe on frozen [CLS]</a:t>
             </a:r>
           </a:p>
           <a:p>
@@ -13582,7 +13972,7 @@
                 <a:gridCol w="2286000"/>
                 <a:gridCol w="2286000"/>
               </a:tblGrid>
-              <a:tr h="457200">
+              <a:tr h="381000">
                 <a:tc>
                   <a:txBody>
                     <a:bodyPr/>
@@ -13704,7 +14094,7 @@
                   </a:tcPr>
                 </a:tc>
               </a:tr>
-              <a:tr h="457200">
+              <a:tr h="381000">
                 <a:tc>
                   <a:txBody>
                     <a:bodyPr/>
@@ -13743,7 +14133,7 @@
                         </a:defRPr>
                       </a:pPr>
                       <a:r>
-                        <a:t>87.0%</a:t>
+                        <a:t>87.20%</a:t>
                       </a:r>
                     </a:p>
                   </a:txBody>
@@ -13767,7 +14157,7 @@
                         </a:defRPr>
                       </a:pPr>
                       <a:r>
-                        <a:t>0.8382</a:t>
+                        <a:t>0.8232</a:t>
                       </a:r>
                     </a:p>
                   </a:txBody>
@@ -13791,7 +14181,7 @@
                         </a:defRPr>
                       </a:pPr>
                       <a:r>
-                        <a:t>60.1%</a:t>
+                        <a:t>60.89%</a:t>
                       </a:r>
                     </a:p>
                   </a:txBody>
@@ -13815,7 +14205,7 @@
                         </a:defRPr>
                       </a:pPr>
                       <a:r>
-                        <a:t>0.5612</a:t>
+                        <a:t>0.5873</a:t>
                       </a:r>
                     </a:p>
                   </a:txBody>
@@ -13826,7 +14216,7 @@
                   </a:tcPr>
                 </a:tc>
               </a:tr>
-              <a:tr h="457200">
+              <a:tr h="381000">
                 <a:tc>
                   <a:txBody>
                     <a:bodyPr/>
@@ -13841,7 +14231,7 @@
                         </a:defRPr>
                       </a:pPr>
                       <a:r>
-                        <a:t>TF-IDF + SVM (RBF)</a:t>
+                        <a:t>TF-IDF + SVM (LinearSVC)</a:t>
                       </a:r>
                     </a:p>
                   </a:txBody>
@@ -13865,7 +14255,7 @@
                         </a:defRPr>
                       </a:pPr>
                       <a:r>
-                        <a:t>89.4%</a:t>
+                        <a:t>89.40%</a:t>
                       </a:r>
                     </a:p>
                   </a:txBody>
@@ -13889,7 +14279,7 @@
                         </a:defRPr>
                       </a:pPr>
                       <a:r>
-                        <a:t>0.8661</a:t>
+                        <a:t>0.8534</a:t>
                       </a:r>
                     </a:p>
                   </a:txBody>
@@ -13913,7 +14303,7 @@
                         </a:defRPr>
                       </a:pPr>
                       <a:r>
-                        <a:t>63.3%</a:t>
+                        <a:t>63.31%</a:t>
                       </a:r>
                     </a:p>
                   </a:txBody>
@@ -13937,7 +14327,7 @@
                         </a:defRPr>
                       </a:pPr>
                       <a:r>
-                        <a:t>0.5830</a:t>
+                        <a:t>0.6061</a:t>
                       </a:r>
                     </a:p>
                   </a:txBody>
@@ -13948,7 +14338,7 @@
                   </a:tcPr>
                 </a:tc>
               </a:tr>
-              <a:tr h="457200">
+              <a:tr h="381000">
                 <a:tc>
                   <a:txBody>
                     <a:bodyPr/>
@@ -13963,12 +14353,256 @@
                         </a:defRPr>
                       </a:pPr>
                       <a:r>
+                        <a:t>TF-IDF (trigrams) + LR</a:t>
+                      </a:r>
+                    </a:p>
+                  </a:txBody>
+                  <a:tcPr anchor="ctr">
+                    <a:solidFill>
+                      <a:srgbClr val="FFFFFF"/>
+                    </a:solidFill>
+                  </a:tcPr>
+                </a:tc>
+                <a:tc>
+                  <a:txBody>
+                    <a:bodyPr/>
+                    <a:lstStyle/>
+                    <a:p>
+                      <a:pPr algn="ctr">
+                        <a:defRPr sz="1300">
+                          <a:solidFill>
+                            <a:srgbClr val="202020"/>
+                          </a:solidFill>
+                          <a:latin typeface="Calibri"/>
+                        </a:defRPr>
+                      </a:pPr>
+                      <a:r>
+                        <a:t>87.86%</a:t>
+                      </a:r>
+                    </a:p>
+                  </a:txBody>
+                  <a:tcPr anchor="ctr">
+                    <a:solidFill>
+                      <a:srgbClr val="FFFFFF"/>
+                    </a:solidFill>
+                  </a:tcPr>
+                </a:tc>
+                <a:tc>
+                  <a:txBody>
+                    <a:bodyPr/>
+                    <a:lstStyle/>
+                    <a:p>
+                      <a:pPr algn="ctr">
+                        <a:defRPr sz="1300">
+                          <a:solidFill>
+                            <a:srgbClr val="202020"/>
+                          </a:solidFill>
+                          <a:latin typeface="Calibri"/>
+                        </a:defRPr>
+                      </a:pPr>
+                      <a:r>
+                        <a:t>0.8310</a:t>
+                      </a:r>
+                    </a:p>
+                  </a:txBody>
+                  <a:tcPr anchor="ctr">
+                    <a:solidFill>
+                      <a:srgbClr val="FFFFFF"/>
+                    </a:solidFill>
+                  </a:tcPr>
+                </a:tc>
+                <a:tc>
+                  <a:txBody>
+                    <a:bodyPr/>
+                    <a:lstStyle/>
+                    <a:p>
+                      <a:pPr algn="ctr">
+                        <a:defRPr sz="1300">
+                          <a:solidFill>
+                            <a:srgbClr val="202020"/>
+                          </a:solidFill>
+                          <a:latin typeface="Calibri"/>
+                        </a:defRPr>
+                      </a:pPr>
+                      <a:r>
+                        <a:t>61.09%</a:t>
+                      </a:r>
+                    </a:p>
+                  </a:txBody>
+                  <a:tcPr anchor="ctr">
+                    <a:solidFill>
+                      <a:srgbClr val="FFFFFF"/>
+                    </a:solidFill>
+                  </a:tcPr>
+                </a:tc>
+                <a:tc>
+                  <a:txBody>
+                    <a:bodyPr/>
+                    <a:lstStyle/>
+                    <a:p>
+                      <a:pPr algn="ctr">
+                        <a:defRPr sz="1300">
+                          <a:solidFill>
+                            <a:srgbClr val="202020"/>
+                          </a:solidFill>
+                          <a:latin typeface="Calibri"/>
+                        </a:defRPr>
+                      </a:pPr>
+                      <a:r>
+                        <a:t>0.5914</a:t>
+                      </a:r>
+                    </a:p>
+                  </a:txBody>
+                  <a:tcPr anchor="ctr">
+                    <a:solidFill>
+                      <a:srgbClr val="FFFFFF"/>
+                    </a:solidFill>
+                  </a:tcPr>
+                </a:tc>
+              </a:tr>
+              <a:tr h="381000">
+                <a:tc>
+                  <a:txBody>
+                    <a:bodyPr/>
+                    <a:lstStyle/>
+                    <a:p>
+                      <a:pPr algn="ctr">
+                        <a:defRPr sz="1300">
+                          <a:solidFill>
+                            <a:srgbClr val="202020"/>
+                          </a:solidFill>
+                          <a:latin typeface="Calibri"/>
+                        </a:defRPr>
+                      </a:pPr>
+                      <a:r>
                         <a:t>LM Lexicon (rule-based)</a:t>
                       </a:r>
                     </a:p>
                   </a:txBody>
                   <a:tcPr anchor="ctr">
                     <a:solidFill>
+                      <a:srgbClr val="F2F2F2"/>
+                    </a:solidFill>
+                  </a:tcPr>
+                </a:tc>
+                <a:tc>
+                  <a:txBody>
+                    <a:bodyPr/>
+                    <a:lstStyle/>
+                    <a:p>
+                      <a:pPr algn="ctr">
+                        <a:defRPr sz="1300">
+                          <a:solidFill>
+                            <a:srgbClr val="202020"/>
+                          </a:solidFill>
+                          <a:latin typeface="Calibri"/>
+                        </a:defRPr>
+                      </a:pPr>
+                      <a:r>
+                        <a:t>69.32%</a:t>
+                      </a:r>
+                    </a:p>
+                  </a:txBody>
+                  <a:tcPr anchor="ctr">
+                    <a:solidFill>
+                      <a:srgbClr val="F2F2F2"/>
+                    </a:solidFill>
+                  </a:tcPr>
+                </a:tc>
+                <a:tc>
+                  <a:txBody>
+                    <a:bodyPr/>
+                    <a:lstStyle/>
+                    <a:p>
+                      <a:pPr algn="ctr">
+                        <a:defRPr sz="1300">
+                          <a:solidFill>
+                            <a:srgbClr val="202020"/>
+                          </a:solidFill>
+                          <a:latin typeface="Calibri"/>
+                        </a:defRPr>
+                      </a:pPr>
+                      <a:r>
+                        <a:t>0.5315</a:t>
+                      </a:r>
+                    </a:p>
+                  </a:txBody>
+                  <a:tcPr anchor="ctr">
+                    <a:solidFill>
+                      <a:srgbClr val="F2F2F2"/>
+                    </a:solidFill>
+                  </a:tcPr>
+                </a:tc>
+                <a:tc>
+                  <a:txBody>
+                    <a:bodyPr/>
+                    <a:lstStyle/>
+                    <a:p>
+                      <a:pPr algn="ctr">
+                        <a:defRPr sz="1300">
+                          <a:solidFill>
+                            <a:srgbClr val="202020"/>
+                          </a:solidFill>
+                          <a:latin typeface="Calibri"/>
+                        </a:defRPr>
+                      </a:pPr>
+                      <a:r>
+                        <a:t>41.53%</a:t>
+                      </a:r>
+                    </a:p>
+                  </a:txBody>
+                  <a:tcPr anchor="ctr">
+                    <a:solidFill>
+                      <a:srgbClr val="F2F2F2"/>
+                    </a:solidFill>
+                  </a:tcPr>
+                </a:tc>
+                <a:tc>
+                  <a:txBody>
+                    <a:bodyPr/>
+                    <a:lstStyle/>
+                    <a:p>
+                      <a:pPr algn="ctr">
+                        <a:defRPr sz="1300">
+                          <a:solidFill>
+                            <a:srgbClr val="202020"/>
+                          </a:solidFill>
+                          <a:latin typeface="Calibri"/>
+                        </a:defRPr>
+                      </a:pPr>
+                      <a:r>
+                        <a:t>0.3885</a:t>
+                      </a:r>
+                    </a:p>
+                  </a:txBody>
+                  <a:tcPr anchor="ctr">
+                    <a:solidFill>
+                      <a:srgbClr val="F2F2F2"/>
+                    </a:solidFill>
+                  </a:tcPr>
+                </a:tc>
+              </a:tr>
+              <a:tr h="381000">
+                <a:tc>
+                  <a:txBody>
+                    <a:bodyPr/>
+                    <a:lstStyle/>
+                    <a:p>
+                      <a:pPr algn="ctr">
+                        <a:defRPr sz="1300">
+                          <a:solidFill>
+                            <a:srgbClr val="202020"/>
+                          </a:solidFill>
+                          <a:latin typeface="Calibri"/>
+                        </a:defRPr>
+                      </a:pPr>
+                      <a:r>
+                        <a:t>TF-IDF + LM features + LR</a:t>
+                      </a:r>
+                    </a:p>
+                  </a:txBody>
+                  <a:tcPr anchor="ctr">
+                    <a:solidFill>
                       <a:srgbClr val="FFFFFF"/>
                     </a:solidFill>
                   </a:tcPr>
@@ -13987,7 +14621,7 @@
                         </a:defRPr>
                       </a:pPr>
                       <a:r>
-                        <a:t>62.8%</a:t>
+                        <a:t>85.43%</a:t>
                       </a:r>
                     </a:p>
                   </a:txBody>
@@ -14011,7 +14645,7 @@
                         </a:defRPr>
                       </a:pPr>
                       <a:r>
-                        <a:t>0.5100</a:t>
+                        <a:t>0.8050</a:t>
                       </a:r>
                     </a:p>
                   </a:txBody>
@@ -14035,7 +14669,7 @@
                         </a:defRPr>
                       </a:pPr>
                       <a:r>
-                        <a:t>45.2%</a:t>
+                        <a:t>61.09%</a:t>
                       </a:r>
                     </a:p>
                   </a:txBody>
@@ -14059,135 +14693,13 @@
                         </a:defRPr>
                       </a:pPr>
                       <a:r>
-                        <a:t>0.3880</a:t>
+                        <a:t>0.5863</a:t>
                       </a:r>
                     </a:p>
                   </a:txBody>
                   <a:tcPr anchor="ctr">
                     <a:solidFill>
                       <a:srgbClr val="FFFFFF"/>
-                    </a:solidFill>
-                  </a:tcPr>
-                </a:tc>
-              </a:tr>
-              <a:tr h="457200">
-                <a:tc>
-                  <a:txBody>
-                    <a:bodyPr/>
-                    <a:lstStyle/>
-                    <a:p>
-                      <a:pPr algn="ctr">
-                        <a:defRPr sz="1300">
-                          <a:solidFill>
-                            <a:srgbClr val="202020"/>
-                          </a:solidFill>
-                          <a:latin typeface="Calibri"/>
-                        </a:defRPr>
-                      </a:pPr>
-                      <a:r>
-                        <a:t>TF-IDF + LM features + SVM</a:t>
-                      </a:r>
-                    </a:p>
-                  </a:txBody>
-                  <a:tcPr anchor="ctr">
-                    <a:solidFill>
-                      <a:srgbClr val="F2F2F2"/>
-                    </a:solidFill>
-                  </a:tcPr>
-                </a:tc>
-                <a:tc>
-                  <a:txBody>
-                    <a:bodyPr/>
-                    <a:lstStyle/>
-                    <a:p>
-                      <a:pPr algn="ctr">
-                        <a:defRPr sz="1300">
-                          <a:solidFill>
-                            <a:srgbClr val="202020"/>
-                          </a:solidFill>
-                          <a:latin typeface="Calibri"/>
-                        </a:defRPr>
-                      </a:pPr>
-                      <a:r>
-                        <a:t>89.6%</a:t>
-                      </a:r>
-                    </a:p>
-                  </a:txBody>
-                  <a:tcPr anchor="ctr">
-                    <a:solidFill>
-                      <a:srgbClr val="F2F2F2"/>
-                    </a:solidFill>
-                  </a:tcPr>
-                </a:tc>
-                <a:tc>
-                  <a:txBody>
-                    <a:bodyPr/>
-                    <a:lstStyle/>
-                    <a:p>
-                      <a:pPr algn="ctr">
-                        <a:defRPr sz="1300">
-                          <a:solidFill>
-                            <a:srgbClr val="202020"/>
-                          </a:solidFill>
-                          <a:latin typeface="Calibri"/>
-                        </a:defRPr>
-                      </a:pPr>
-                      <a:r>
-                        <a:t>0.8690</a:t>
-                      </a:r>
-                    </a:p>
-                  </a:txBody>
-                  <a:tcPr anchor="ctr">
-                    <a:solidFill>
-                      <a:srgbClr val="F2F2F2"/>
-                    </a:solidFill>
-                  </a:tcPr>
-                </a:tc>
-                <a:tc>
-                  <a:txBody>
-                    <a:bodyPr/>
-                    <a:lstStyle/>
-                    <a:p>
-                      <a:pPr algn="ctr">
-                        <a:defRPr sz="1300">
-                          <a:solidFill>
-                            <a:srgbClr val="202020"/>
-                          </a:solidFill>
-                          <a:latin typeface="Calibri"/>
-                        </a:defRPr>
-                      </a:pPr>
-                      <a:r>
-                        <a:t>62.8%</a:t>
-                      </a:r>
-                    </a:p>
-                  </a:txBody>
-                  <a:tcPr anchor="ctr">
-                    <a:solidFill>
-                      <a:srgbClr val="F2F2F2"/>
-                    </a:solidFill>
-                  </a:tcPr>
-                </a:tc>
-                <a:tc>
-                  <a:txBody>
-                    <a:bodyPr/>
-                    <a:lstStyle/>
-                    <a:p>
-                      <a:pPr algn="ctr">
-                        <a:defRPr sz="1300">
-                          <a:solidFill>
-                            <a:srgbClr val="202020"/>
-                          </a:solidFill>
-                          <a:latin typeface="Calibri"/>
-                        </a:defRPr>
-                      </a:pPr>
-                      <a:r>
-                        <a:t>0.5790</a:t>
-                      </a:r>
-                    </a:p>
-                  </a:txBody>
-                  <a:tcPr anchor="ctr">
-                    <a:solidFill>
-                      <a:srgbClr val="F2F2F2"/>
                     </a:solidFill>
                   </a:tcPr>
                 </a:tc>
@@ -14275,7 +14787,7 @@
               </a:lnSpc>
             </a:pPr>
             <a:r>
-              <a:t>• TF-IDF + SVM is the strongest baseline (RBF kernel, C=10)</a:t>
+              <a:t>• TF-IDF + SVM is the strongest baseline (LinearSVC, C=1.0)</a:t>
             </a:r>
           </a:p>
           <a:p>
@@ -14313,7 +14825,7 @@
               </a:lnSpc>
             </a:pPr>
             <a:r>
-              <a:t>• LM feature augmentation gives marginal lift (+0.2% sentiment)</a:t>
+              <a:t>• LM feature augmentation does not improve over TF-IDF on sentiment</a:t>
             </a:r>
           </a:p>
           <a:p>
@@ -14929,7 +15441,7 @@
                         </a:defRPr>
                       </a:pPr>
                       <a:r>
-                        <a:t>0.9583</a:t>
+                        <a:t>0.9650</a:t>
                       </a:r>
                     </a:p>
                   </a:txBody>
@@ -14953,7 +15465,7 @@
                         </a:defRPr>
                       </a:pPr>
                       <a:r>
-                        <a:t>—</a:t>
+                        <a:t>49.80%</a:t>
                       </a:r>
                     </a:p>
                   </a:txBody>
@@ -14977,7 +15489,7 @@
                         </a:defRPr>
                       </a:pPr>
                       <a:r>
-                        <a:t>—</a:t>
+                        <a:t>0.4874</a:t>
                       </a:r>
                     </a:p>
                   </a:txBody>
@@ -15027,7 +15539,7 @@
                         </a:defRPr>
                       </a:pPr>
                       <a:r>
-                        <a:t>16-shot SetFit</a:t>
+                        <a:t>16-shot linear probe</a:t>
                       </a:r>
                     </a:p>
                   </a:txBody>
@@ -15051,7 +15563,7 @@
                         </a:defRPr>
                       </a:pPr>
                       <a:r>
-                        <a:t>97.70%</a:t>
+                        <a:t>98.01%</a:t>
                       </a:r>
                     </a:p>
                   </a:txBody>
@@ -15075,7 +15587,7 @@
                         </a:defRPr>
                       </a:pPr>
                       <a:r>
-                        <a:t>0.9630</a:t>
+                        <a:t>0.9690</a:t>
                       </a:r>
                     </a:p>
                   </a:txBody>
@@ -15099,7 +15611,7 @@
                         </a:defRPr>
                       </a:pPr>
                       <a:r>
-                        <a:t>54.0%</a:t>
+                        <a:t>48.59%</a:t>
                       </a:r>
                     </a:p>
                   </a:txBody>
@@ -15123,7 +15635,7 @@
                         </a:defRPr>
                       </a:pPr>
                       <a:r>
-                        <a:t>0.4900</a:t>
+                        <a:t>0.4552</a:t>
                       </a:r>
                     </a:p>
                   </a:txBody>
@@ -15173,7 +15685,7 @@
                         </a:defRPr>
                       </a:pPr>
                       <a:r>
-                        <a:t>16-shot SetFit</a:t>
+                        <a:t>16-shot linear probe</a:t>
                       </a:r>
                     </a:p>
                   </a:txBody>
@@ -15197,7 +15709,7 @@
                         </a:defRPr>
                       </a:pPr>
                       <a:r>
-                        <a:t>74.20%</a:t>
+                        <a:t>74.61%</a:t>
                       </a:r>
                     </a:p>
                   </a:txBody>
@@ -15221,7 +15733,7 @@
                         </a:defRPr>
                       </a:pPr>
                       <a:r>
-                        <a:t>0.6680</a:t>
+                        <a:t>0.6599</a:t>
                       </a:r>
                     </a:p>
                   </a:txBody>
@@ -15245,7 +15757,7 @@
                         </a:defRPr>
                       </a:pPr>
                       <a:r>
-                        <a:t>48.8%</a:t>
+                        <a:t>37.90%</a:t>
                       </a:r>
                     </a:p>
                   </a:txBody>
@@ -15269,7 +15781,7 @@
                         </a:defRPr>
                       </a:pPr>
                       <a:r>
-                        <a:t>0.4330</a:t>
+                        <a:t>0.3694</a:t>
                       </a:r>
                     </a:p>
                   </a:txBody>
@@ -15319,7 +15831,7 @@
                         </a:defRPr>
                       </a:pPr>
                       <a:r>
-                        <a:t>16-shot SetFit</a:t>
+                        <a:t>16-shot linear probe</a:t>
                       </a:r>
                     </a:p>
                   </a:txBody>
@@ -15343,7 +15855,7 @@
                         </a:defRPr>
                       </a:pPr>
                       <a:r>
-                        <a:t>69.50%</a:t>
+                        <a:t>75.72%</a:t>
                       </a:r>
                     </a:p>
                   </a:txBody>
@@ -15367,7 +15879,7 @@
                         </a:defRPr>
                       </a:pPr>
                       <a:r>
-                        <a:t>0.6120</a:t>
+                        <a:t>0.6439</a:t>
                       </a:r>
                     </a:p>
                   </a:txBody>
@@ -15391,7 +15903,7 @@
                         </a:defRPr>
                       </a:pPr>
                       <a:r>
-                        <a:t>47.2%</a:t>
+                        <a:t>35.89%</a:t>
                       </a:r>
                     </a:p>
                   </a:txBody>
@@ -15415,7 +15927,7 @@
                         </a:defRPr>
                       </a:pPr>
                       <a:r>
-                        <a:t>0.4050</a:t>
+                        <a:t>0.3489</a:t>
                       </a:r>
                     </a:p>
                   </a:txBody>
@@ -15547,7 +16059,7 @@
               </a:lnSpc>
             </a:pPr>
             <a:r>
-              <a:t>• FinBERT 16-shot &gt;&gt; BERT 16-shot (+23.5 pp on sentiment)</a:t>
+              <a:t>• FinBERT 16-shot &gt;&gt; BERT 16-shot (+23.4 pp on sentiment)</a:t>
             </a:r>
           </a:p>
           <a:p>
@@ -16102,7 +16614,7 @@
               </a:lnSpc>
             </a:pPr>
             <a:r>
-              <a:t>• Results: 96.7% sentiment / 64.3% stance accuracy</a:t>
+              <a:t>• Results: 96.69% sentiment / 61.29% stance accuracy</a:t>
             </a:r>
           </a:p>
           <a:p>
@@ -16324,7 +16836,7 @@
               </a:lnSpc>
             </a:pPr>
             <a:r>
-              <a:t>• Label smoothing: α=0.1 for regularisation</a:t>
+              <a:t>• Label smoothing: ε=0.1 for regularisation</a:t>
             </a:r>
           </a:p>
           <a:p>
@@ -16343,7 +16855,7 @@
               </a:lnSpc>
             </a:pPr>
             <a:r>
-              <a:t>• Epochs: 10, lr=3e-5, batch_size=16</a:t>
+              <a:t>• Epochs: 10, head lr=2e-5, batch_size=32</a:t>
             </a:r>
           </a:p>
           <a:p>
@@ -16362,7 +16874,7 @@
               </a:lnSpc>
             </a:pPr>
             <a:r>
-              <a:t>• Results: 96.5% sentiment / 63.7% stance accuracy</a:t>
+              <a:t>• Results: 96.91% sentiment / 65.12% stance accuracy</a:t>
             </a:r>
           </a:p>
           <a:p>
